--- a/deliverables/milestone1.pptx
+++ b/deliverables/milestone1.pptx
@@ -18,6 +18,9 @@
     <p:sldId id="266" r:id="rId17"/>
     <p:sldId id="267" r:id="rId18"/>
     <p:sldId id="268" r:id="rId19"/>
+    <p:sldId id="269" r:id="rId20"/>
+    <p:sldId id="270" r:id="rId21"/>
+    <p:sldId id="271" r:id="rId22"/>
   </p:sldIdLst>
   <p:sldSz cx="12191695" cy="6858000" type="screen4x3"/>
   <p:notesSz cx="6858000" cy="9144000"/>
@@ -3286,7 +3289,7 @@
         <p:spPr>
           <a:xfrm>
             <a:off x="777240" y="1554480"/>
-            <a:ext cx="8229600" cy="320040"/>
+            <a:ext cx="10058400" cy="320040"/>
           </a:xfrm>
           <a:prstGeom prst="rect">
             <a:avLst/>
@@ -3331,7 +3334,7 @@
         <p:spPr>
           <a:xfrm>
             <a:off x="777240" y="1965960"/>
-            <a:ext cx="8778240" cy="2926080"/>
+            <a:ext cx="8961120" cy="2926080"/>
           </a:xfrm>
           <a:prstGeom prst="rect">
             <a:avLst/>
@@ -3700,7 +3703,7 @@
                 </a:solidFill>
                 <a:latin typeface="JetBrains Mono"/>
               </a:rPr>
-              <a:t>INSPIRING METHOD ①</a:t>
+              <a:t>NAÏVE BASELINE</a:t>
             </a:r>
           </a:p>
         </p:txBody>
@@ -3860,7 +3863,7 @@
                 </a:solidFill>
                 <a:latin typeface="JetBrains Mono"/>
               </a:rPr>
-              <a:t>10 / 13</a:t>
+              <a:t>10 / 16</a:t>
             </a:r>
           </a:p>
         </p:txBody>
@@ -3873,8 +3876,8 @@
         </p:nvSpPr>
         <p:spPr>
           <a:xfrm>
-            <a:off x="777240" y="1325880"/>
-            <a:ext cx="8229600" cy="320040"/>
+            <a:off x="777240" y="1051560"/>
+            <a:ext cx="10058400" cy="320040"/>
           </a:xfrm>
           <a:prstGeom prst="rect">
             <a:avLst/>
@@ -3905,21 +3908,56 @@
                 </a:solidFill>
                 <a:latin typeface="JetBrains Mono"/>
               </a:rPr>
-              <a:t>OPTIMAL TRANSPORT · MATH &amp; VISION ORIGIN · SCOT+ 2025</a:t>
-            </a:r>
-          </a:p>
-        </p:txBody>
-      </p:sp>
-      <p:sp>
-        <p:nvSpPr>
-          <p:cNvPr id="11" name="TextBox 10"/>
-          <p:cNvSpPr txBox="1"/>
-          <p:nvPr/>
-        </p:nvSpPr>
-        <p:spPr>
-          <a:xfrm>
-            <a:off x="777240" y="1737360"/>
-            <a:ext cx="10424160" cy="914400"/>
+              <a:t>MANDATORY BASELINE — DROP A WHOLE MODALITY, RECOVER, THEN MEASURE DISTANCES</a:t>
+            </a:r>
+          </a:p>
+        </p:txBody>
+      </p:sp>
+      <p:cxnSp>
+        <p:nvCxnSpPr>
+          <p:cNvPr id="11" name="Connector 10"/>
+          <p:cNvCxnSpPr/>
+          <p:nvPr/>
+        </p:nvCxnSpPr>
+        <p:spPr>
+          <a:xfrm>
+            <a:off x="6263640" y="1554480"/>
+            <a:ext cx="0" cy="3291840"/>
+          </a:xfrm>
+          <a:prstGeom prst="bentConnector3">
+            <a:avLst/>
+          </a:prstGeom>
+          <a:ln w="12700">
+            <a:solidFill>
+              <a:srgbClr val="DAD7CF"/>
+            </a:solidFill>
+          </a:ln>
+        </p:spPr>
+        <p:style>
+          <a:lnRef idx="2">
+            <a:schemeClr val="accent1"/>
+          </a:lnRef>
+          <a:fillRef idx="0">
+            <a:schemeClr val="accent1"/>
+          </a:fillRef>
+          <a:effectRef idx="1">
+            <a:schemeClr val="accent1"/>
+          </a:effectRef>
+          <a:fontRef idx="minor">
+            <a:schemeClr val="tx1"/>
+          </a:fontRef>
+        </p:style>
+      </p:cxnSp>
+      <p:sp>
+        <p:nvSpPr>
+          <p:cNvPr id="12" name="TextBox 11"/>
+          <p:cNvSpPr txBox="1"/>
+          <p:nvPr/>
+        </p:nvSpPr>
+        <p:spPr>
+          <a:xfrm>
+            <a:off x="777240" y="1554480"/>
+            <a:ext cx="5486400" cy="320040"/>
           </a:xfrm>
           <a:prstGeom prst="rect">
             <a:avLst/>
@@ -3944,36 +3982,1251 @@
               </a:spcAft>
             </a:pPr>
             <a:r>
-              <a:rPr sz="3000" b="1" i="0">
+              <a:rPr sz="1000" b="1" i="0" spc="120">
                 <a:solidFill>
                   <a:srgbClr val="FF2D55"/>
                 </a:solidFill>
+                <a:latin typeface="JetBrains Mono"/>
+              </a:rPr>
+              <a:t>DROP WHOLE METABOLOME · RECOVER · MANTEL</a:t>
+            </a:r>
+          </a:p>
+        </p:txBody>
+      </p:sp>
+      <p:sp>
+        <p:nvSpPr>
+          <p:cNvPr id="13" name="TextBox 12"/>
+          <p:cNvSpPr txBox="1"/>
+          <p:nvPr/>
+        </p:nvSpPr>
+        <p:spPr>
+          <a:xfrm>
+            <a:off x="777240" y="2011680"/>
+            <a:ext cx="1143000" cy="274320"/>
+          </a:xfrm>
+          <a:prstGeom prst="rect">
+            <a:avLst/>
+          </a:prstGeom>
+          <a:noFill/>
+        </p:spPr>
+        <p:txBody>
+          <a:bodyPr wrap="square" anchor="t" lIns="0" rIns="0" tIns="0" bIns="0">
+            <a:spAutoFit/>
+          </a:bodyPr>
+          <a:lstStyle/>
+          <a:p>
+            <a:pPr algn="l">
+              <a:lnSpc>
+                <a:spcPct val="100000"/>
+              </a:lnSpc>
+              <a:spcBef>
+                <a:spcPts val="0"/>
+              </a:spcBef>
+              <a:spcAft>
+                <a:spcPts val="600"/>
+              </a:spcAft>
+            </a:pPr>
+            <a:r>
+              <a:rPr sz="900" b="0" i="0" spc="100">
+                <a:solidFill>
+                  <a:srgbClr val="6B6863"/>
+                </a:solidFill>
+                <a:latin typeface="JetBrains Mono"/>
+              </a:rPr>
+              <a:t>DROPPED</a:t>
+            </a:r>
+          </a:p>
+        </p:txBody>
+      </p:sp>
+      <p:sp>
+        <p:nvSpPr>
+          <p:cNvPr id="14" name="TextBox 13"/>
+          <p:cNvSpPr txBox="1"/>
+          <p:nvPr/>
+        </p:nvSpPr>
+        <p:spPr>
+          <a:xfrm>
+            <a:off x="1920240" y="2011680"/>
+            <a:ext cx="914400" cy="274320"/>
+          </a:xfrm>
+          <a:prstGeom prst="rect">
+            <a:avLst/>
+          </a:prstGeom>
+          <a:noFill/>
+        </p:spPr>
+        <p:txBody>
+          <a:bodyPr wrap="square" anchor="t" lIns="0" rIns="0" tIns="0" bIns="0">
+            <a:spAutoFit/>
+          </a:bodyPr>
+          <a:lstStyle/>
+          <a:p>
+            <a:pPr algn="r">
+              <a:lnSpc>
+                <a:spcPct val="100000"/>
+              </a:lnSpc>
+              <a:spcBef>
+                <a:spcPts val="0"/>
+              </a:spcBef>
+              <a:spcAft>
+                <a:spcPts val="600"/>
+              </a:spcAft>
+            </a:pPr>
+            <a:r>
+              <a:rPr sz="900" b="0" i="0" spc="100">
+                <a:solidFill>
+                  <a:srgbClr val="6B6863"/>
+                </a:solidFill>
+                <a:latin typeface="JetBrains Mono"/>
+              </a:rPr>
+              <a:t>MEAN</a:t>
+            </a:r>
+          </a:p>
+        </p:txBody>
+      </p:sp>
+      <p:sp>
+        <p:nvSpPr>
+          <p:cNvPr id="15" name="TextBox 14"/>
+          <p:cNvSpPr txBox="1"/>
+          <p:nvPr/>
+        </p:nvSpPr>
+        <p:spPr>
+          <a:xfrm>
+            <a:off x="2834640" y="2011680"/>
+            <a:ext cx="914400" cy="274320"/>
+          </a:xfrm>
+          <a:prstGeom prst="rect">
+            <a:avLst/>
+          </a:prstGeom>
+          <a:noFill/>
+        </p:spPr>
+        <p:txBody>
+          <a:bodyPr wrap="square" anchor="t" lIns="0" rIns="0" tIns="0" bIns="0">
+            <a:spAutoFit/>
+          </a:bodyPr>
+          <a:lstStyle/>
+          <a:p>
+            <a:pPr algn="r">
+              <a:lnSpc>
+                <a:spcPct val="100000"/>
+              </a:lnSpc>
+              <a:spcBef>
+                <a:spcPts val="0"/>
+              </a:spcBef>
+              <a:spcAft>
+                <a:spcPts val="600"/>
+              </a:spcAft>
+            </a:pPr>
+            <a:r>
+              <a:rPr sz="900" b="0" i="0" spc="100">
+                <a:solidFill>
+                  <a:srgbClr val="6B6863"/>
+                </a:solidFill>
+                <a:latin typeface="JetBrains Mono"/>
+              </a:rPr>
+              <a:t>MED</a:t>
+            </a:r>
+          </a:p>
+        </p:txBody>
+      </p:sp>
+      <p:sp>
+        <p:nvSpPr>
+          <p:cNvPr id="16" name="TextBox 15"/>
+          <p:cNvSpPr txBox="1"/>
+          <p:nvPr/>
+        </p:nvSpPr>
+        <p:spPr>
+          <a:xfrm>
+            <a:off x="3749039" y="2011680"/>
+            <a:ext cx="914400" cy="274320"/>
+          </a:xfrm>
+          <a:prstGeom prst="rect">
+            <a:avLst/>
+          </a:prstGeom>
+          <a:noFill/>
+        </p:spPr>
+        <p:txBody>
+          <a:bodyPr wrap="square" anchor="t" lIns="0" rIns="0" tIns="0" bIns="0">
+            <a:spAutoFit/>
+          </a:bodyPr>
+          <a:lstStyle/>
+          <a:p>
+            <a:pPr algn="r">
+              <a:lnSpc>
+                <a:spcPct val="100000"/>
+              </a:lnSpc>
+              <a:spcBef>
+                <a:spcPts val="0"/>
+              </a:spcBef>
+              <a:spcAft>
+                <a:spcPts val="600"/>
+              </a:spcAft>
+            </a:pPr>
+            <a:r>
+              <a:rPr sz="900" b="0" i="0" spc="100">
+                <a:solidFill>
+                  <a:srgbClr val="6B6863"/>
+                </a:solidFill>
+                <a:latin typeface="JetBrains Mono"/>
+              </a:rPr>
+              <a:t>KNN</a:t>
+            </a:r>
+          </a:p>
+        </p:txBody>
+      </p:sp>
+      <p:sp>
+        <p:nvSpPr>
+          <p:cNvPr id="17" name="TextBox 16"/>
+          <p:cNvSpPr txBox="1"/>
+          <p:nvPr/>
+        </p:nvSpPr>
+        <p:spPr>
+          <a:xfrm>
+            <a:off x="4663440" y="2011680"/>
+            <a:ext cx="914400" cy="274320"/>
+          </a:xfrm>
+          <a:prstGeom prst="rect">
+            <a:avLst/>
+          </a:prstGeom>
+          <a:noFill/>
+        </p:spPr>
+        <p:txBody>
+          <a:bodyPr wrap="square" anchor="t" lIns="0" rIns="0" tIns="0" bIns="0">
+            <a:spAutoFit/>
+          </a:bodyPr>
+          <a:lstStyle/>
+          <a:p>
+            <a:pPr algn="r">
+              <a:lnSpc>
+                <a:spcPct val="100000"/>
+              </a:lnSpc>
+              <a:spcBef>
+                <a:spcPts val="0"/>
+              </a:spcBef>
+              <a:spcAft>
+                <a:spcPts val="600"/>
+              </a:spcAft>
+            </a:pPr>
+            <a:r>
+              <a:rPr sz="900" b="0" i="0" spc="100">
+                <a:solidFill>
+                  <a:srgbClr val="6B6863"/>
+                </a:solidFill>
+                <a:latin typeface="JetBrains Mono"/>
+              </a:rPr>
+              <a:t>RF</a:t>
+            </a:r>
+          </a:p>
+        </p:txBody>
+      </p:sp>
+      <p:cxnSp>
+        <p:nvCxnSpPr>
+          <p:cNvPr id="18" name="Connector 17"/>
+          <p:cNvCxnSpPr/>
+          <p:nvPr/>
+        </p:nvCxnSpPr>
+        <p:spPr>
+          <a:xfrm>
+            <a:off x="777240" y="2322576"/>
+            <a:ext cx="4800600" cy="0"/>
+          </a:xfrm>
+          <a:prstGeom prst="bentConnector3">
+            <a:avLst/>
+          </a:prstGeom>
+          <a:ln w="20320">
+            <a:solidFill>
+              <a:srgbClr val="0A0A0A"/>
+            </a:solidFill>
+          </a:ln>
+        </p:spPr>
+        <p:style>
+          <a:lnRef idx="2">
+            <a:schemeClr val="accent1"/>
+          </a:lnRef>
+          <a:fillRef idx="0">
+            <a:schemeClr val="accent1"/>
+          </a:fillRef>
+          <a:effectRef idx="1">
+            <a:schemeClr val="accent1"/>
+          </a:effectRef>
+          <a:fontRef idx="minor">
+            <a:schemeClr val="tx1"/>
+          </a:fontRef>
+        </p:style>
+      </p:cxnSp>
+      <p:sp>
+        <p:nvSpPr>
+          <p:cNvPr id="19" name="TextBox 18"/>
+          <p:cNvSpPr txBox="1"/>
+          <p:nvPr/>
+        </p:nvSpPr>
+        <p:spPr>
+          <a:xfrm>
+            <a:off x="777240" y="2468880"/>
+            <a:ext cx="1143000" cy="411480"/>
+          </a:xfrm>
+          <a:prstGeom prst="rect">
+            <a:avLst/>
+          </a:prstGeom>
+          <a:noFill/>
+        </p:spPr>
+        <p:txBody>
+          <a:bodyPr wrap="square" anchor="t" lIns="0" rIns="0" tIns="0" bIns="0">
+            <a:spAutoFit/>
+          </a:bodyPr>
+          <a:lstStyle/>
+          <a:p>
+            <a:pPr algn="l">
+              <a:lnSpc>
+                <a:spcPct val="100000"/>
+              </a:lnSpc>
+              <a:spcBef>
+                <a:spcPts val="0"/>
+              </a:spcBef>
+              <a:spcAft>
+                <a:spcPts val="600"/>
+              </a:spcAft>
+            </a:pPr>
+            <a:r>
+              <a:rPr sz="1100" b="0" i="0">
+                <a:solidFill>
+                  <a:srgbClr val="6B6863"/>
+                </a:solidFill>
+                <a:latin typeface="JetBrains Mono"/>
+              </a:rPr>
+              <a:t>10%</a:t>
+            </a:r>
+          </a:p>
+        </p:txBody>
+      </p:sp>
+      <p:sp>
+        <p:nvSpPr>
+          <p:cNvPr id="20" name="TextBox 19"/>
+          <p:cNvSpPr txBox="1"/>
+          <p:nvPr/>
+        </p:nvSpPr>
+        <p:spPr>
+          <a:xfrm>
+            <a:off x="1920240" y="2441448"/>
+            <a:ext cx="914400" cy="411480"/>
+          </a:xfrm>
+          <a:prstGeom prst="rect">
+            <a:avLst/>
+          </a:prstGeom>
+          <a:noFill/>
+        </p:spPr>
+        <p:txBody>
+          <a:bodyPr wrap="square" anchor="t" lIns="0" rIns="0" tIns="0" bIns="0">
+            <a:spAutoFit/>
+          </a:bodyPr>
+          <a:lstStyle/>
+          <a:p>
+            <a:pPr algn="r">
+              <a:lnSpc>
+                <a:spcPct val="100000"/>
+              </a:lnSpc>
+              <a:spcBef>
+                <a:spcPts val="0"/>
+              </a:spcBef>
+              <a:spcAft>
+                <a:spcPts val="600"/>
+              </a:spcAft>
+            </a:pPr>
+            <a:r>
+              <a:rPr sz="1400" b="1" i="0">
+                <a:solidFill>
+                  <a:srgbClr val="FF2D55"/>
+                </a:solidFill>
+                <a:latin typeface="JetBrains Mono"/>
+              </a:rPr>
+              <a:t>0.957</a:t>
+            </a:r>
+          </a:p>
+        </p:txBody>
+      </p:sp>
+      <p:sp>
+        <p:nvSpPr>
+          <p:cNvPr id="21" name="TextBox 20"/>
+          <p:cNvSpPr txBox="1"/>
+          <p:nvPr/>
+        </p:nvSpPr>
+        <p:spPr>
+          <a:xfrm>
+            <a:off x="2834640" y="2441448"/>
+            <a:ext cx="914400" cy="411480"/>
+          </a:xfrm>
+          <a:prstGeom prst="rect">
+            <a:avLst/>
+          </a:prstGeom>
+          <a:noFill/>
+        </p:spPr>
+        <p:txBody>
+          <a:bodyPr wrap="square" anchor="t" lIns="0" rIns="0" tIns="0" bIns="0">
+            <a:spAutoFit/>
+          </a:bodyPr>
+          <a:lstStyle/>
+          <a:p>
+            <a:pPr algn="r">
+              <a:lnSpc>
+                <a:spcPct val="100000"/>
+              </a:lnSpc>
+              <a:spcBef>
+                <a:spcPts val="0"/>
+              </a:spcBef>
+              <a:spcAft>
+                <a:spcPts val="600"/>
+              </a:spcAft>
+            </a:pPr>
+            <a:r>
+              <a:rPr sz="1400" b="1" i="0">
+                <a:solidFill>
+                  <a:srgbClr val="FF2D55"/>
+                </a:solidFill>
+                <a:latin typeface="JetBrains Mono"/>
+              </a:rPr>
+              <a:t>0.957</a:t>
+            </a:r>
+          </a:p>
+        </p:txBody>
+      </p:sp>
+      <p:sp>
+        <p:nvSpPr>
+          <p:cNvPr id="22" name="TextBox 21"/>
+          <p:cNvSpPr txBox="1"/>
+          <p:nvPr/>
+        </p:nvSpPr>
+        <p:spPr>
+          <a:xfrm>
+            <a:off x="3749039" y="2441448"/>
+            <a:ext cx="914400" cy="411480"/>
+          </a:xfrm>
+          <a:prstGeom prst="rect">
+            <a:avLst/>
+          </a:prstGeom>
+          <a:noFill/>
+        </p:spPr>
+        <p:txBody>
+          <a:bodyPr wrap="square" anchor="t" lIns="0" rIns="0" tIns="0" bIns="0">
+            <a:spAutoFit/>
+          </a:bodyPr>
+          <a:lstStyle/>
+          <a:p>
+            <a:pPr algn="r">
+              <a:lnSpc>
+                <a:spcPct val="100000"/>
+              </a:lnSpc>
+              <a:spcBef>
+                <a:spcPts val="0"/>
+              </a:spcBef>
+              <a:spcAft>
+                <a:spcPts val="600"/>
+              </a:spcAft>
+            </a:pPr>
+            <a:r>
+              <a:rPr sz="1400" b="0" i="0">
+                <a:solidFill>
+                  <a:srgbClr val="0A0A0A"/>
+                </a:solidFill>
+                <a:latin typeface="JetBrains Mono"/>
+              </a:rPr>
+              <a:t>0.956</a:t>
+            </a:r>
+          </a:p>
+        </p:txBody>
+      </p:sp>
+      <p:sp>
+        <p:nvSpPr>
+          <p:cNvPr id="23" name="TextBox 22"/>
+          <p:cNvSpPr txBox="1"/>
+          <p:nvPr/>
+        </p:nvSpPr>
+        <p:spPr>
+          <a:xfrm>
+            <a:off x="4663440" y="2441448"/>
+            <a:ext cx="914400" cy="411480"/>
+          </a:xfrm>
+          <a:prstGeom prst="rect">
+            <a:avLst/>
+          </a:prstGeom>
+          <a:noFill/>
+        </p:spPr>
+        <p:txBody>
+          <a:bodyPr wrap="square" anchor="t" lIns="0" rIns="0" tIns="0" bIns="0">
+            <a:spAutoFit/>
+          </a:bodyPr>
+          <a:lstStyle/>
+          <a:p>
+            <a:pPr algn="r">
+              <a:lnSpc>
+                <a:spcPct val="100000"/>
+              </a:lnSpc>
+              <a:spcBef>
+                <a:spcPts val="0"/>
+              </a:spcBef>
+              <a:spcAft>
+                <a:spcPts val="600"/>
+              </a:spcAft>
+            </a:pPr>
+            <a:r>
+              <a:rPr sz="1400" b="0" i="0">
+                <a:solidFill>
+                  <a:srgbClr val="0A0A0A"/>
+                </a:solidFill>
+                <a:latin typeface="JetBrains Mono"/>
+              </a:rPr>
+              <a:t>0.955</a:t>
+            </a:r>
+          </a:p>
+        </p:txBody>
+      </p:sp>
+      <p:cxnSp>
+        <p:nvCxnSpPr>
+          <p:cNvPr id="24" name="Connector 23"/>
+          <p:cNvCxnSpPr/>
+          <p:nvPr/>
+        </p:nvCxnSpPr>
+        <p:spPr>
+          <a:xfrm>
+            <a:off x="777240" y="2926080"/>
+            <a:ext cx="4800600" cy="0"/>
+          </a:xfrm>
+          <a:prstGeom prst="bentConnector3">
+            <a:avLst/>
+          </a:prstGeom>
+          <a:ln w="12700">
+            <a:solidFill>
+              <a:srgbClr val="DAD7CF"/>
+            </a:solidFill>
+          </a:ln>
+        </p:spPr>
+        <p:style>
+          <a:lnRef idx="2">
+            <a:schemeClr val="accent1"/>
+          </a:lnRef>
+          <a:fillRef idx="0">
+            <a:schemeClr val="accent1"/>
+          </a:fillRef>
+          <a:effectRef idx="1">
+            <a:schemeClr val="accent1"/>
+          </a:effectRef>
+          <a:fontRef idx="minor">
+            <a:schemeClr val="tx1"/>
+          </a:fontRef>
+        </p:style>
+      </p:cxnSp>
+      <p:sp>
+        <p:nvSpPr>
+          <p:cNvPr id="25" name="TextBox 24"/>
+          <p:cNvSpPr txBox="1"/>
+          <p:nvPr/>
+        </p:nvSpPr>
+        <p:spPr>
+          <a:xfrm>
+            <a:off x="777240" y="3035808"/>
+            <a:ext cx="1143000" cy="411480"/>
+          </a:xfrm>
+          <a:prstGeom prst="rect">
+            <a:avLst/>
+          </a:prstGeom>
+          <a:noFill/>
+        </p:spPr>
+        <p:txBody>
+          <a:bodyPr wrap="square" anchor="t" lIns="0" rIns="0" tIns="0" bIns="0">
+            <a:spAutoFit/>
+          </a:bodyPr>
+          <a:lstStyle/>
+          <a:p>
+            <a:pPr algn="l">
+              <a:lnSpc>
+                <a:spcPct val="100000"/>
+              </a:lnSpc>
+              <a:spcBef>
+                <a:spcPts val="0"/>
+              </a:spcBef>
+              <a:spcAft>
+                <a:spcPts val="600"/>
+              </a:spcAft>
+            </a:pPr>
+            <a:r>
+              <a:rPr sz="1100" b="0" i="0">
+                <a:solidFill>
+                  <a:srgbClr val="6B6863"/>
+                </a:solidFill>
+                <a:latin typeface="JetBrains Mono"/>
+              </a:rPr>
+              <a:t>30%</a:t>
+            </a:r>
+          </a:p>
+        </p:txBody>
+      </p:sp>
+      <p:sp>
+        <p:nvSpPr>
+          <p:cNvPr id="26" name="TextBox 25"/>
+          <p:cNvSpPr txBox="1"/>
+          <p:nvPr/>
+        </p:nvSpPr>
+        <p:spPr>
+          <a:xfrm>
+            <a:off x="1920240" y="3008376"/>
+            <a:ext cx="914400" cy="411480"/>
+          </a:xfrm>
+          <a:prstGeom prst="rect">
+            <a:avLst/>
+          </a:prstGeom>
+          <a:noFill/>
+        </p:spPr>
+        <p:txBody>
+          <a:bodyPr wrap="square" anchor="t" lIns="0" rIns="0" tIns="0" bIns="0">
+            <a:spAutoFit/>
+          </a:bodyPr>
+          <a:lstStyle/>
+          <a:p>
+            <a:pPr algn="r">
+              <a:lnSpc>
+                <a:spcPct val="100000"/>
+              </a:lnSpc>
+              <a:spcBef>
+                <a:spcPts val="0"/>
+              </a:spcBef>
+              <a:spcAft>
+                <a:spcPts val="600"/>
+              </a:spcAft>
+            </a:pPr>
+            <a:r>
+              <a:rPr sz="1400" b="0" i="0">
+                <a:solidFill>
+                  <a:srgbClr val="0A0A0A"/>
+                </a:solidFill>
+                <a:latin typeface="JetBrains Mono"/>
+              </a:rPr>
+              <a:t>0.848</a:t>
+            </a:r>
+          </a:p>
+        </p:txBody>
+      </p:sp>
+      <p:sp>
+        <p:nvSpPr>
+          <p:cNvPr id="27" name="TextBox 26"/>
+          <p:cNvSpPr txBox="1"/>
+          <p:nvPr/>
+        </p:nvSpPr>
+        <p:spPr>
+          <a:xfrm>
+            <a:off x="2834640" y="3008376"/>
+            <a:ext cx="914400" cy="411480"/>
+          </a:xfrm>
+          <a:prstGeom prst="rect">
+            <a:avLst/>
+          </a:prstGeom>
+          <a:noFill/>
+        </p:spPr>
+        <p:txBody>
+          <a:bodyPr wrap="square" anchor="t" lIns="0" rIns="0" tIns="0" bIns="0">
+            <a:spAutoFit/>
+          </a:bodyPr>
+          <a:lstStyle/>
+          <a:p>
+            <a:pPr algn="r">
+              <a:lnSpc>
+                <a:spcPct val="100000"/>
+              </a:lnSpc>
+              <a:spcBef>
+                <a:spcPts val="0"/>
+              </a:spcBef>
+              <a:spcAft>
+                <a:spcPts val="600"/>
+              </a:spcAft>
+            </a:pPr>
+            <a:r>
+              <a:rPr sz="1400" b="0" i="0">
+                <a:solidFill>
+                  <a:srgbClr val="0A0A0A"/>
+                </a:solidFill>
+                <a:latin typeface="JetBrains Mono"/>
+              </a:rPr>
+              <a:t>0.848</a:t>
+            </a:r>
+          </a:p>
+        </p:txBody>
+      </p:sp>
+      <p:sp>
+        <p:nvSpPr>
+          <p:cNvPr id="28" name="TextBox 27"/>
+          <p:cNvSpPr txBox="1"/>
+          <p:nvPr/>
+        </p:nvSpPr>
+        <p:spPr>
+          <a:xfrm>
+            <a:off x="3749039" y="3008376"/>
+            <a:ext cx="914400" cy="411480"/>
+          </a:xfrm>
+          <a:prstGeom prst="rect">
+            <a:avLst/>
+          </a:prstGeom>
+          <a:noFill/>
+        </p:spPr>
+        <p:txBody>
+          <a:bodyPr wrap="square" anchor="t" lIns="0" rIns="0" tIns="0" bIns="0">
+            <a:spAutoFit/>
+          </a:bodyPr>
+          <a:lstStyle/>
+          <a:p>
+            <a:pPr algn="r">
+              <a:lnSpc>
+                <a:spcPct val="100000"/>
+              </a:lnSpc>
+              <a:spcBef>
+                <a:spcPts val="0"/>
+              </a:spcBef>
+              <a:spcAft>
+                <a:spcPts val="600"/>
+              </a:spcAft>
+            </a:pPr>
+            <a:r>
+              <a:rPr sz="1400" b="0" i="0">
+                <a:solidFill>
+                  <a:srgbClr val="0A0A0A"/>
+                </a:solidFill>
+                <a:latin typeface="JetBrains Mono"/>
+              </a:rPr>
+              <a:t>0.851</a:t>
+            </a:r>
+          </a:p>
+        </p:txBody>
+      </p:sp>
+      <p:sp>
+        <p:nvSpPr>
+          <p:cNvPr id="29" name="TextBox 28"/>
+          <p:cNvSpPr txBox="1"/>
+          <p:nvPr/>
+        </p:nvSpPr>
+        <p:spPr>
+          <a:xfrm>
+            <a:off x="4663440" y="3008376"/>
+            <a:ext cx="914400" cy="411480"/>
+          </a:xfrm>
+          <a:prstGeom prst="rect">
+            <a:avLst/>
+          </a:prstGeom>
+          <a:noFill/>
+        </p:spPr>
+        <p:txBody>
+          <a:bodyPr wrap="square" anchor="t" lIns="0" rIns="0" tIns="0" bIns="0">
+            <a:spAutoFit/>
+          </a:bodyPr>
+          <a:lstStyle/>
+          <a:p>
+            <a:pPr algn="r">
+              <a:lnSpc>
+                <a:spcPct val="100000"/>
+              </a:lnSpc>
+              <a:spcBef>
+                <a:spcPts val="0"/>
+              </a:spcBef>
+              <a:spcAft>
+                <a:spcPts val="600"/>
+              </a:spcAft>
+            </a:pPr>
+            <a:r>
+              <a:rPr sz="1400" b="1" i="0">
+                <a:solidFill>
+                  <a:srgbClr val="FF2D55"/>
+                </a:solidFill>
+                <a:latin typeface="JetBrains Mono"/>
+              </a:rPr>
+              <a:t>0.852</a:t>
+            </a:r>
+          </a:p>
+        </p:txBody>
+      </p:sp>
+      <p:cxnSp>
+        <p:nvCxnSpPr>
+          <p:cNvPr id="30" name="Connector 29"/>
+          <p:cNvCxnSpPr/>
+          <p:nvPr/>
+        </p:nvCxnSpPr>
+        <p:spPr>
+          <a:xfrm>
+            <a:off x="777240" y="3493008"/>
+            <a:ext cx="4800600" cy="0"/>
+          </a:xfrm>
+          <a:prstGeom prst="bentConnector3">
+            <a:avLst/>
+          </a:prstGeom>
+          <a:ln w="12700">
+            <a:solidFill>
+              <a:srgbClr val="DAD7CF"/>
+            </a:solidFill>
+          </a:ln>
+        </p:spPr>
+        <p:style>
+          <a:lnRef idx="2">
+            <a:schemeClr val="accent1"/>
+          </a:lnRef>
+          <a:fillRef idx="0">
+            <a:schemeClr val="accent1"/>
+          </a:fillRef>
+          <a:effectRef idx="1">
+            <a:schemeClr val="accent1"/>
+          </a:effectRef>
+          <a:fontRef idx="minor">
+            <a:schemeClr val="tx1"/>
+          </a:fontRef>
+        </p:style>
+      </p:cxnSp>
+      <p:sp>
+        <p:nvSpPr>
+          <p:cNvPr id="31" name="TextBox 30"/>
+          <p:cNvSpPr txBox="1"/>
+          <p:nvPr/>
+        </p:nvSpPr>
+        <p:spPr>
+          <a:xfrm>
+            <a:off x="777240" y="3602736"/>
+            <a:ext cx="1143000" cy="411480"/>
+          </a:xfrm>
+          <a:prstGeom prst="rect">
+            <a:avLst/>
+          </a:prstGeom>
+          <a:noFill/>
+        </p:spPr>
+        <p:txBody>
+          <a:bodyPr wrap="square" anchor="t" lIns="0" rIns="0" tIns="0" bIns="0">
+            <a:spAutoFit/>
+          </a:bodyPr>
+          <a:lstStyle/>
+          <a:p>
+            <a:pPr algn="l">
+              <a:lnSpc>
+                <a:spcPct val="100000"/>
+              </a:lnSpc>
+              <a:spcBef>
+                <a:spcPts val="0"/>
+              </a:spcBef>
+              <a:spcAft>
+                <a:spcPts val="600"/>
+              </a:spcAft>
+            </a:pPr>
+            <a:r>
+              <a:rPr sz="1100" b="0" i="0">
+                <a:solidFill>
+                  <a:srgbClr val="6B6863"/>
+                </a:solidFill>
+                <a:latin typeface="JetBrains Mono"/>
+              </a:rPr>
+              <a:t>50%</a:t>
+            </a:r>
+          </a:p>
+        </p:txBody>
+      </p:sp>
+      <p:sp>
+        <p:nvSpPr>
+          <p:cNvPr id="32" name="TextBox 31"/>
+          <p:cNvSpPr txBox="1"/>
+          <p:nvPr/>
+        </p:nvSpPr>
+        <p:spPr>
+          <a:xfrm>
+            <a:off x="1920240" y="3575304"/>
+            <a:ext cx="914400" cy="411480"/>
+          </a:xfrm>
+          <a:prstGeom prst="rect">
+            <a:avLst/>
+          </a:prstGeom>
+          <a:noFill/>
+        </p:spPr>
+        <p:txBody>
+          <a:bodyPr wrap="square" anchor="t" lIns="0" rIns="0" tIns="0" bIns="0">
+            <a:spAutoFit/>
+          </a:bodyPr>
+          <a:lstStyle/>
+          <a:p>
+            <a:pPr algn="r">
+              <a:lnSpc>
+                <a:spcPct val="100000"/>
+              </a:lnSpc>
+              <a:spcBef>
+                <a:spcPts val="0"/>
+              </a:spcBef>
+              <a:spcAft>
+                <a:spcPts val="600"/>
+              </a:spcAft>
+            </a:pPr>
+            <a:r>
+              <a:rPr sz="1400" b="1" i="0">
+                <a:solidFill>
+                  <a:srgbClr val="FF2D55"/>
+                </a:solidFill>
+                <a:latin typeface="JetBrains Mono"/>
+              </a:rPr>
+              <a:t>0.78</a:t>
+            </a:r>
+          </a:p>
+        </p:txBody>
+      </p:sp>
+      <p:sp>
+        <p:nvSpPr>
+          <p:cNvPr id="33" name="TextBox 32"/>
+          <p:cNvSpPr txBox="1"/>
+          <p:nvPr/>
+        </p:nvSpPr>
+        <p:spPr>
+          <a:xfrm>
+            <a:off x="2834640" y="3575304"/>
+            <a:ext cx="914400" cy="411480"/>
+          </a:xfrm>
+          <a:prstGeom prst="rect">
+            <a:avLst/>
+          </a:prstGeom>
+          <a:noFill/>
+        </p:spPr>
+        <p:txBody>
+          <a:bodyPr wrap="square" anchor="t" lIns="0" rIns="0" tIns="0" bIns="0">
+            <a:spAutoFit/>
+          </a:bodyPr>
+          <a:lstStyle/>
+          <a:p>
+            <a:pPr algn="r">
+              <a:lnSpc>
+                <a:spcPct val="100000"/>
+              </a:lnSpc>
+              <a:spcBef>
+                <a:spcPts val="0"/>
+              </a:spcBef>
+              <a:spcAft>
+                <a:spcPts val="600"/>
+              </a:spcAft>
+            </a:pPr>
+            <a:r>
+              <a:rPr sz="1400" b="0" i="0">
+                <a:solidFill>
+                  <a:srgbClr val="0A0A0A"/>
+                </a:solidFill>
+                <a:latin typeface="JetBrains Mono"/>
+              </a:rPr>
+              <a:t>0.779</a:t>
+            </a:r>
+          </a:p>
+        </p:txBody>
+      </p:sp>
+      <p:sp>
+        <p:nvSpPr>
+          <p:cNvPr id="34" name="TextBox 33"/>
+          <p:cNvSpPr txBox="1"/>
+          <p:nvPr/>
+        </p:nvSpPr>
+        <p:spPr>
+          <a:xfrm>
+            <a:off x="3749039" y="3575304"/>
+            <a:ext cx="914400" cy="411480"/>
+          </a:xfrm>
+          <a:prstGeom prst="rect">
+            <a:avLst/>
+          </a:prstGeom>
+          <a:noFill/>
+        </p:spPr>
+        <p:txBody>
+          <a:bodyPr wrap="square" anchor="t" lIns="0" rIns="0" tIns="0" bIns="0">
+            <a:spAutoFit/>
+          </a:bodyPr>
+          <a:lstStyle/>
+          <a:p>
+            <a:pPr algn="r">
+              <a:lnSpc>
+                <a:spcPct val="100000"/>
+              </a:lnSpc>
+              <a:spcBef>
+                <a:spcPts val="0"/>
+              </a:spcBef>
+              <a:spcAft>
+                <a:spcPts val="600"/>
+              </a:spcAft>
+            </a:pPr>
+            <a:r>
+              <a:rPr sz="1400" b="0" i="0">
+                <a:solidFill>
+                  <a:srgbClr val="0A0A0A"/>
+                </a:solidFill>
+                <a:latin typeface="JetBrains Mono"/>
+              </a:rPr>
+              <a:t>0.75</a:t>
+            </a:r>
+          </a:p>
+        </p:txBody>
+      </p:sp>
+      <p:sp>
+        <p:nvSpPr>
+          <p:cNvPr id="35" name="TextBox 34"/>
+          <p:cNvSpPr txBox="1"/>
+          <p:nvPr/>
+        </p:nvSpPr>
+        <p:spPr>
+          <a:xfrm>
+            <a:off x="4663440" y="3575304"/>
+            <a:ext cx="914400" cy="411480"/>
+          </a:xfrm>
+          <a:prstGeom prst="rect">
+            <a:avLst/>
+          </a:prstGeom>
+          <a:noFill/>
+        </p:spPr>
+        <p:txBody>
+          <a:bodyPr wrap="square" anchor="t" lIns="0" rIns="0" tIns="0" bIns="0">
+            <a:spAutoFit/>
+          </a:bodyPr>
+          <a:lstStyle/>
+          <a:p>
+            <a:pPr algn="r">
+              <a:lnSpc>
+                <a:spcPct val="100000"/>
+              </a:lnSpc>
+              <a:spcBef>
+                <a:spcPts val="0"/>
+              </a:spcBef>
+              <a:spcAft>
+                <a:spcPts val="600"/>
+              </a:spcAft>
+            </a:pPr>
+            <a:r>
+              <a:rPr sz="1400" b="0" i="0">
+                <a:solidFill>
+                  <a:srgbClr val="0A0A0A"/>
+                </a:solidFill>
+                <a:latin typeface="JetBrains Mono"/>
+              </a:rPr>
+              <a:t>0.771</a:t>
+            </a:r>
+          </a:p>
+        </p:txBody>
+      </p:sp>
+      <p:cxnSp>
+        <p:nvCxnSpPr>
+          <p:cNvPr id="36" name="Connector 35"/>
+          <p:cNvCxnSpPr/>
+          <p:nvPr/>
+        </p:nvCxnSpPr>
+        <p:spPr>
+          <a:xfrm>
+            <a:off x="777240" y="4059936"/>
+            <a:ext cx="4800600" cy="0"/>
+          </a:xfrm>
+          <a:prstGeom prst="bentConnector3">
+            <a:avLst/>
+          </a:prstGeom>
+          <a:ln w="12700">
+            <a:solidFill>
+              <a:srgbClr val="DAD7CF"/>
+            </a:solidFill>
+          </a:ln>
+        </p:spPr>
+        <p:style>
+          <a:lnRef idx="2">
+            <a:schemeClr val="accent1"/>
+          </a:lnRef>
+          <a:fillRef idx="0">
+            <a:schemeClr val="accent1"/>
+          </a:fillRef>
+          <a:effectRef idx="1">
+            <a:schemeClr val="accent1"/>
+          </a:effectRef>
+          <a:fontRef idx="minor">
+            <a:schemeClr val="tx1"/>
+          </a:fontRef>
+        </p:style>
+      </p:cxnSp>
+      <p:sp>
+        <p:nvSpPr>
+          <p:cNvPr id="37" name="TextBox 36"/>
+          <p:cNvSpPr txBox="1"/>
+          <p:nvPr/>
+        </p:nvSpPr>
+        <p:spPr>
+          <a:xfrm>
+            <a:off x="777240" y="3977639"/>
+            <a:ext cx="5212080" cy="1371600"/>
+          </a:xfrm>
+          <a:prstGeom prst="rect">
+            <a:avLst/>
+          </a:prstGeom>
+          <a:noFill/>
+        </p:spPr>
+        <p:txBody>
+          <a:bodyPr wrap="square" anchor="t" lIns="0" rIns="0" tIns="0" bIns="0">
+            <a:spAutoFit/>
+          </a:bodyPr>
+          <a:lstStyle/>
+          <a:p>
+            <a:pPr algn="l">
+              <a:lnSpc>
+                <a:spcPct val="120000"/>
+              </a:lnSpc>
+              <a:spcBef>
+                <a:spcPts val="0"/>
+              </a:spcBef>
+              <a:spcAft>
+                <a:spcPts val="600"/>
+              </a:spcAft>
+            </a:pPr>
+            <a:r>
+              <a:rPr sz="1150" b="0" i="0">
+                <a:solidFill>
+                  <a:srgbClr val="6B6863"/>
+                </a:solidFill>
                 <a:latin typeface="Space Grotesk"/>
               </a:rPr>
-              <a:t>①  </a:t>
-            </a:r>
-            <a:r>
-              <a:rPr sz="3000" b="1" i="0">
+              <a:t>Row = share whose whole metabolome we hid; column = how we rebuilt it; number = Mantel score (1 = identical to the true distances).</a:t>
+            </a:r>
+          </a:p>
+        </p:txBody>
+      </p:sp>
+      <p:sp>
+        <p:nvSpPr>
+          <p:cNvPr id="38" name="TextBox 37"/>
+          <p:cNvSpPr txBox="1"/>
+          <p:nvPr/>
+        </p:nvSpPr>
+        <p:spPr>
+          <a:xfrm>
+            <a:off x="6583680" y="1783080"/>
+            <a:ext cx="4754880" cy="3108960"/>
+          </a:xfrm>
+          <a:prstGeom prst="rect">
+            <a:avLst/>
+          </a:prstGeom>
+          <a:noFill/>
+        </p:spPr>
+        <p:txBody>
+          <a:bodyPr wrap="square" anchor="t" lIns="0" rIns="0" tIns="0" bIns="0">
+            <a:spAutoFit/>
+          </a:bodyPr>
+          <a:lstStyle/>
+          <a:p>
+            <a:pPr algn="l">
+              <a:lnSpc>
+                <a:spcPct val="130000"/>
+              </a:lnSpc>
+              <a:spcBef>
+                <a:spcPts val="0"/>
+              </a:spcBef>
+              <a:spcAft>
+                <a:spcPts val="1000"/>
+              </a:spcAft>
+            </a:pPr>
+            <a:r>
+              <a:rPr sz="1300" b="0" i="0">
+                <a:solidFill>
+                  <a:srgbClr val="1C1B19"/>
+                </a:solidFill>
+                <a:latin typeface="Space Grotesk"/>
+              </a:rPr>
+              <a:t>All four </a:t>
+            </a:r>
+            <a:r>
+              <a:rPr sz="1300" b="1" i="0">
+                <a:solidFill>
+                  <a:srgbClr val="FF2D55"/>
+                </a:solidFill>
+                <a:latin typeface="Space Grotesk"/>
+              </a:rPr>
+              <a:t>tie</a:t>
+            </a:r>
+            <a:r>
+              <a:rPr sz="1300" b="0" i="0">
+                <a:solidFill>
+                  <a:srgbClr val="1C1B19"/>
+                </a:solidFill>
+                <a:latin typeface="Space Grotesk"/>
+              </a:rPr>
+              <a:t> — once a whole metabolome is gone, the only way to rebuild it is from the microbiome, and the two are weakly linked (slide 09). So the clever fills add almost nothing over a plain mean; even mean clears ~0.77 at 50% missing.</a:t>
+            </a:r>
+          </a:p>
+          <a:p>
+            <a:pPr algn="l">
+              <a:lnSpc>
+                <a:spcPct val="130000"/>
+              </a:lnSpc>
+              <a:spcBef>
+                <a:spcPts val="0"/>
+              </a:spcBef>
+              <a:spcAft>
+                <a:spcPts val="600"/>
+              </a:spcAft>
+            </a:pPr>
+            <a:r>
+              <a:rPr sz="1250" b="0" i="0">
+                <a:solidFill>
+                  <a:srgbClr val="6B6863"/>
+                </a:solidFill>
+                <a:latin typeface="Space Grotesk"/>
+              </a:rPr>
+              <a:t>The high score is misleading: at low missing-% most patients keep both omics, so most distances are still exact and dominate it (slide 09). It is not the discriminating number.</a:t>
+            </a:r>
+          </a:p>
+        </p:txBody>
+      </p:sp>
+      <p:sp>
+        <p:nvSpPr>
+          <p:cNvPr id="39" name="TextBox 38"/>
+          <p:cNvSpPr txBox="1"/>
+          <p:nvPr/>
+        </p:nvSpPr>
+        <p:spPr>
+          <a:xfrm>
+            <a:off x="777240" y="5440680"/>
+            <a:ext cx="10607040" cy="502920"/>
+          </a:xfrm>
+          <a:prstGeom prst="rect">
+            <a:avLst/>
+          </a:prstGeom>
+          <a:noFill/>
+        </p:spPr>
+        <p:txBody>
+          <a:bodyPr wrap="square" anchor="t" lIns="0" rIns="0" tIns="0" bIns="0">
+            <a:spAutoFit/>
+          </a:bodyPr>
+          <a:lstStyle/>
+          <a:p>
+            <a:pPr algn="l">
+              <a:lnSpc>
+                <a:spcPct val="118000"/>
+              </a:lnSpc>
+              <a:spcBef>
+                <a:spcPts val="0"/>
+              </a:spcBef>
+              <a:spcAft>
+                <a:spcPts val="600"/>
+              </a:spcAft>
+            </a:pPr>
+            <a:r>
+              <a:rPr sz="900" b="1" i="0">
                 <a:solidFill>
                   <a:srgbClr val="0A0A0A"/>
                 </a:solidFill>
                 <a:latin typeface="Space Grotesk"/>
               </a:rPr>
-              <a:t>Augmented / Fused Gromov–Wasserstein</a:t>
-            </a:r>
-          </a:p>
-        </p:txBody>
-      </p:sp>
-      <p:sp>
-        <p:nvSpPr>
-          <p:cNvPr id="12" name="TextBox 11"/>
-          <p:cNvSpPr txBox="1"/>
-          <p:nvPr/>
-        </p:nvSpPr>
-        <p:spPr>
-          <a:xfrm>
-            <a:off x="777240" y="2880360"/>
-            <a:ext cx="10424160" cy="3108960"/>
+              <a:t>How the distances are made: </a:t>
+            </a:r>
+            <a:r>
+              <a:rPr sz="900" b="0" i="0">
+                <a:solidFill>
+                  <a:srgbClr val="1C1B19"/>
+                </a:solidFill>
+                <a:latin typeface="Space Grotesk"/>
+              </a:rPr>
+              <a:t>each matrix is n×n (one row/column per patient), built the grader's way (standardize both omics, PCA, Euclidean distance in the first 2 PCs). The Mantel test scores the rank correlation between our matrix and the true one, over every patient pair.</a:t>
+            </a:r>
+          </a:p>
+        </p:txBody>
+      </p:sp>
+      <p:sp>
+        <p:nvSpPr>
+          <p:cNvPr id="40" name="TextBox 39"/>
+          <p:cNvSpPr txBox="1"/>
+          <p:nvPr/>
+        </p:nvSpPr>
+        <p:spPr>
+          <a:xfrm>
+            <a:off x="777240" y="5943600"/>
+            <a:ext cx="10607040" cy="365760"/>
           </a:xfrm>
           <a:prstGeom prst="rect">
             <a:avLst/>
@@ -3988,179 +5241,23 @@
           <a:p>
             <a:pPr algn="l">
               <a:lnSpc>
-                <a:spcPct val="130000"/>
-              </a:lnSpc>
-              <a:spcBef>
-                <a:spcPts val="0"/>
-              </a:spcBef>
-              <a:spcAft>
-                <a:spcPts val="1100"/>
-              </a:spcAft>
-            </a:pPr>
-            <a:r>
-              <a:rPr sz="1450" b="0" i="0">
-                <a:solidFill>
-                  <a:srgbClr val="FF2D55"/>
-                </a:solidFill>
-                <a:latin typeface="Space Grotesk"/>
-              </a:rPr>
-              <a:t>— </a:t>
-            </a:r>
-            <a:r>
-              <a:rPr sz="1450" b="0" i="0">
-                <a:solidFill>
-                  <a:srgbClr val="1C1B19"/>
-                </a:solidFill>
-                <a:latin typeface="Space Grotesk"/>
-              </a:rPr>
-              <a:t>GW compares samples in </a:t>
-            </a:r>
-            <a:r>
-              <a:rPr sz="1450" b="1" i="0">
-                <a:solidFill>
-                  <a:srgbClr val="1C1B19"/>
-                </a:solidFill>
-                <a:latin typeface="Space Grotesk"/>
-              </a:rPr>
-              <a:t>incomparable spaces</a:t>
-            </a:r>
-            <a:r>
-              <a:rPr sz="1450" b="0" i="0">
-                <a:solidFill>
-                  <a:srgbClr val="1C1B19"/>
-                </a:solidFill>
-                <a:latin typeface="Space Grotesk"/>
-              </a:rPr>
-              <a:t> using only within-modality geometry — no shared features needed.</a:t>
-            </a:r>
-          </a:p>
-          <a:p>
-            <a:pPr algn="l">
-              <a:lnSpc>
-                <a:spcPct val="130000"/>
-              </a:lnSpc>
-              <a:spcBef>
-                <a:spcPts val="0"/>
-              </a:spcBef>
-              <a:spcAft>
-                <a:spcPts val="1100"/>
-              </a:spcAft>
-            </a:pPr>
-            <a:r>
-              <a:rPr sz="1450" b="0" i="0">
-                <a:solidFill>
-                  <a:srgbClr val="FF2D55"/>
-                </a:solidFill>
-                <a:latin typeface="Space Grotesk"/>
-              </a:rPr>
-              <a:t>— </a:t>
-            </a:r>
-            <a:r>
-              <a:rPr sz="1450" b="1" i="0">
-                <a:solidFill>
-                  <a:srgbClr val="1C1B19"/>
-                </a:solidFill>
-                <a:latin typeface="Space Grotesk"/>
-              </a:rPr>
-              <a:t>Adaptation: </a:t>
-            </a:r>
-            <a:r>
-              <a:rPr sz="1450" b="0" i="0">
-                <a:solidFill>
-                  <a:srgbClr val="1C1B19"/>
-                </a:solidFill>
-                <a:latin typeface="Space Grotesk"/>
-              </a:rPr>
-              <a:t>couple a missing-modality sample to the complete samples' geometry, then barycentric-project onto the joint-PCA anchor → distances.</a:t>
-            </a:r>
-          </a:p>
-          <a:p>
-            <a:pPr algn="l">
-              <a:lnSpc>
-                <a:spcPct val="130000"/>
-              </a:lnSpc>
-              <a:spcBef>
-                <a:spcPts val="0"/>
-              </a:spcBef>
-              <a:spcAft>
-                <a:spcPts val="1100"/>
-              </a:spcAft>
-            </a:pPr>
-            <a:r>
-              <a:rPr sz="1450" b="0" i="0">
-                <a:solidFill>
-                  <a:srgbClr val="FF2D55"/>
-                </a:solidFill>
-                <a:latin typeface="Space Grotesk"/>
-              </a:rPr>
-              <a:t>— </a:t>
-            </a:r>
-            <a:r>
-              <a:rPr sz="1450" b="0" i="0">
-                <a:solidFill>
-                  <a:srgbClr val="1C1B19"/>
-                </a:solidFill>
-                <a:latin typeface="Space Grotesk"/>
-              </a:rPr>
-              <a:t>Honest fix (red-team): use </a:t>
-            </a:r>
-            <a:r>
-              <a:rPr sz="1450" b="1" i="0">
-                <a:solidFill>
-                  <a:srgbClr val="FF2D55"/>
-                </a:solidFill>
-                <a:latin typeface="Space Grotesk"/>
-              </a:rPr>
-              <a:t>Augmented GW</a:t>
-            </a:r>
-            <a:r>
-              <a:rPr sz="1450" b="0" i="0">
-                <a:solidFill>
-                  <a:srgbClr val="1C1B19"/>
-                </a:solidFill>
-                <a:latin typeface="Space Grotesk"/>
-              </a:rPr>
-              <a:t> — the feature term breaks GW's rotation/reflection ambiguity.</a:t>
-            </a:r>
-          </a:p>
-          <a:p>
-            <a:pPr algn="l">
-              <a:lnSpc>
-                <a:spcPct val="130000"/>
-              </a:lnSpc>
-              <a:spcBef>
-                <a:spcPts val="0"/>
-              </a:spcBef>
-              <a:spcAft>
-                <a:spcPts val="1100"/>
-              </a:spcAft>
-            </a:pPr>
-            <a:r>
-              <a:rPr sz="1450" b="0" i="0">
-                <a:solidFill>
-                  <a:srgbClr val="FF2D55"/>
-                </a:solidFill>
-                <a:latin typeface="Space Grotesk"/>
-              </a:rPr>
-              <a:t>— </a:t>
-            </a:r>
-            <a:r>
-              <a:rPr sz="1450" b="1" i="0">
-                <a:solidFill>
-                  <a:srgbClr val="1C1B19"/>
-                </a:solidFill>
-                <a:latin typeface="Space Grotesk"/>
-              </a:rPr>
-              <a:t>Gate: </a:t>
-            </a:r>
-            <a:r>
-              <a:rPr sz="1450" b="0" i="0">
-                <a:solidFill>
-                  <a:srgbClr val="1C1B19"/>
-                </a:solidFill>
-                <a:latin typeface="Space Grotesk"/>
-              </a:rPr>
-              <a:t>must beat mean/PLS in the missing regime, else reported as a negative result.</a:t>
+                <a:spcPct val="100000"/>
+              </a:lnSpc>
+              <a:spcBef>
+                <a:spcPts val="0"/>
+              </a:spcBef>
+              <a:spcAft>
+                <a:spcPts val="600"/>
+              </a:spcAft>
+            </a:pPr>
+            <a:r>
+              <a:rPr sz="850" b="0" i="0" spc="60">
+                <a:solidFill>
+                  <a:srgbClr val="6B6863"/>
+                </a:solidFill>
+                <a:latin typeface="JetBrains Mono"/>
+              </a:rPr>
+              <a:t>ONE CONCLUSION: NAÏVE IMPUTATION CAN'T BEAT A TRIVIAL MEAN — THE CROSS-MODAL CEILING IS THE WALL THE PIPELINE MUST BREAK.</a:t>
             </a:r>
           </a:p>
         </p:txBody>
@@ -4365,7 +5462,7 @@
                 </a:solidFill>
                 <a:latin typeface="JetBrains Mono"/>
               </a:rPr>
-              <a:t>INSPIRING METHOD ②</a:t>
+              <a:t>METHOD SELECTION</a:t>
             </a:r>
           </a:p>
         </p:txBody>
@@ -4525,7 +5622,7 @@
                 </a:solidFill>
                 <a:latin typeface="JetBrains Mono"/>
               </a:rPr>
-              <a:t>11 / 13</a:t>
+              <a:t>11 / 16</a:t>
             </a:r>
           </a:p>
         </p:txBody>
@@ -4538,8 +5635,8 @@
         </p:nvSpPr>
         <p:spPr>
           <a:xfrm>
-            <a:off x="777240" y="1325880"/>
-            <a:ext cx="8229600" cy="320040"/>
+            <a:off x="777240" y="1371600"/>
+            <a:ext cx="10058400" cy="320040"/>
           </a:xfrm>
           <a:prstGeom prst="rect">
             <a:avLst/>
@@ -4570,7 +5667,7 @@
                 </a:solidFill>
                 <a:latin typeface="JetBrains Mono"/>
               </a:rPr>
-              <a:t>SIMILARITY NETWORK FUSION · BIOINFORMATICS 2025</a:t>
+              <a:t>HOW WE PICKED THE TWO METHODS ON THE NEXT SLIDES</a:t>
             </a:r>
           </a:p>
         </p:txBody>
@@ -4583,8 +5680,8 @@
         </p:nvSpPr>
         <p:spPr>
           <a:xfrm>
-            <a:off x="777240" y="1737360"/>
-            <a:ext cx="10424160" cy="914400"/>
+            <a:off x="777240" y="1783080"/>
+            <a:ext cx="10058400" cy="822960"/>
           </a:xfrm>
           <a:prstGeom prst="rect">
             <a:avLst/>
@@ -4609,214 +5706,223 @@
               </a:spcAft>
             </a:pPr>
             <a:r>
-              <a:rPr sz="3000" b="1" i="0">
+              <a:rPr sz="2600" b="1" i="0">
+                <a:solidFill>
+                  <a:srgbClr val="0A0A0A"/>
+                </a:solidFill>
+                <a:latin typeface="Space Grotesk"/>
+              </a:rPr>
+              <a:t>We scanned many fields, then tried hard to break what we found.</a:t>
+            </a:r>
+          </a:p>
+        </p:txBody>
+      </p:sp>
+      <p:sp>
+        <p:nvSpPr>
+          <p:cNvPr id="12" name="TextBox 11"/>
+          <p:cNvSpPr txBox="1"/>
+          <p:nvPr/>
+        </p:nvSpPr>
+        <p:spPr>
+          <a:xfrm>
+            <a:off x="777240" y="2743200"/>
+            <a:ext cx="10424160" cy="2103120"/>
+          </a:xfrm>
+          <a:prstGeom prst="rect">
+            <a:avLst/>
+          </a:prstGeom>
+          <a:noFill/>
+        </p:spPr>
+        <p:txBody>
+          <a:bodyPr wrap="square" anchor="t" lIns="0" rIns="0" tIns="0" bIns="0">
+            <a:spAutoFit/>
+          </a:bodyPr>
+          <a:lstStyle/>
+          <a:p>
+            <a:pPr algn="l">
+              <a:lnSpc>
+                <a:spcPct val="125000"/>
+              </a:lnSpc>
+              <a:spcBef>
+                <a:spcPts val="0"/>
+              </a:spcBef>
+              <a:spcAft>
+                <a:spcPts val="1000"/>
+              </a:spcAft>
+            </a:pPr>
+            <a:r>
+              <a:rPr sz="1350" b="0" i="0">
                 <a:solidFill>
                   <a:srgbClr val="FF2D55"/>
                 </a:solidFill>
                 <a:latin typeface="Space Grotesk"/>
               </a:rPr>
-              <a:t>②  </a:t>
-            </a:r>
-            <a:r>
-              <a:rPr sz="3000" b="1" i="0">
+              <a:t>— </a:t>
+            </a:r>
+            <a:r>
+              <a:rPr sz="1350" b="1" i="0">
+                <a:solidFill>
+                  <a:srgbClr val="1C1B19"/>
+                </a:solidFill>
+                <a:latin typeface="Space Grotesk"/>
+              </a:rPr>
+              <a:t>Test 1</a:t>
+            </a:r>
+            <a:r>
+              <a:rPr sz="1350" b="0" i="0">
+                <a:solidFill>
+                  <a:srgbClr val="1C1B19"/>
+                </a:solidFill>
+                <a:latin typeface="Space Grotesk"/>
+              </a:rPr>
+              <a:t> — does it respect how we are scored? Mantel ranks distances against a PCA map, so the danger is not nonlinearity but methods like UMAP/t-SNE that distort the global geometry. We kept global-preserving methods.</a:t>
+            </a:r>
+          </a:p>
+          <a:p>
+            <a:pPr algn="l">
+              <a:lnSpc>
+                <a:spcPct val="125000"/>
+              </a:lnSpc>
+              <a:spcBef>
+                <a:spcPts val="0"/>
+              </a:spcBef>
+              <a:spcAft>
+                <a:spcPts val="1000"/>
+              </a:spcAft>
+            </a:pPr>
+            <a:r>
+              <a:rPr sz="1350" b="0" i="0">
+                <a:solidFill>
+                  <a:srgbClr val="FF2D55"/>
+                </a:solidFill>
+                <a:latin typeface="Space Grotesk"/>
+              </a:rPr>
+              <a:t>— </a:t>
+            </a:r>
+            <a:r>
+              <a:rPr sz="1350" b="1" i="0">
+                <a:solidFill>
+                  <a:srgbClr val="1C1B19"/>
+                </a:solidFill>
+                <a:latin typeface="Space Grotesk"/>
+              </a:rPr>
+              <a:t>Test 2</a:t>
+            </a:r>
+            <a:r>
+              <a:rPr sz="1350" b="0" i="0">
+                <a:solidFill>
+                  <a:srgbClr val="1C1B19"/>
+                </a:solidFill>
+                <a:latin typeface="Space Grotesk"/>
+              </a:rPr>
+              <a:t> — can it place a patient missing a whole omics? We kept methods that build each omics' own similarity and combine them, so a patient is placeable from the omics they have.</a:t>
+            </a:r>
+          </a:p>
+        </p:txBody>
+      </p:sp>
+      <p:sp>
+        <p:nvSpPr>
+          <p:cNvPr id="13" name="Rectangle 12"/>
+          <p:cNvSpPr/>
+          <p:nvPr/>
+        </p:nvSpPr>
+        <p:spPr>
+          <a:xfrm>
+            <a:off x="777240" y="5029200"/>
+            <a:ext cx="36576" cy="914400"/>
+          </a:xfrm>
+          <a:prstGeom prst="rect">
+            <a:avLst/>
+          </a:prstGeom>
+          <a:solidFill>
+            <a:srgbClr val="FF2D55"/>
+          </a:solidFill>
+          <a:ln>
+            <a:noFill/>
+          </a:ln>
+          <a:effectLst/>
+        </p:spPr>
+        <p:style>
+          <a:lnRef idx="1">
+            <a:schemeClr val="accent1"/>
+          </a:lnRef>
+          <a:fillRef idx="3">
+            <a:schemeClr val="accent1"/>
+          </a:fillRef>
+          <a:effectRef idx="2">
+            <a:schemeClr val="accent1"/>
+          </a:effectRef>
+          <a:fontRef idx="minor">
+            <a:schemeClr val="lt1"/>
+          </a:fontRef>
+        </p:style>
+        <p:txBody>
+          <a:bodyPr rtlCol="0" anchor="ctr"/>
+          <a:lstStyle/>
+          <a:p>
+            <a:pPr algn="ctr"/>
+          </a:p>
+        </p:txBody>
+      </p:sp>
+      <p:sp>
+        <p:nvSpPr>
+          <p:cNvPr id="14" name="TextBox 13"/>
+          <p:cNvSpPr txBox="1"/>
+          <p:nvPr/>
+        </p:nvSpPr>
+        <p:spPr>
+          <a:xfrm>
+            <a:off x="1005840" y="5029200"/>
+            <a:ext cx="10058400" cy="1005840"/>
+          </a:xfrm>
+          <a:prstGeom prst="rect">
+            <a:avLst/>
+          </a:prstGeom>
+          <a:noFill/>
+        </p:spPr>
+        <p:txBody>
+          <a:bodyPr wrap="square" anchor="t" lIns="0" rIns="0" tIns="0" bIns="0">
+            <a:spAutoFit/>
+          </a:bodyPr>
+          <a:lstStyle/>
+          <a:p>
+            <a:pPr algn="l">
+              <a:lnSpc>
+                <a:spcPct val="130000"/>
+              </a:lnSpc>
+              <a:spcBef>
+                <a:spcPts val="0"/>
+              </a:spcBef>
+              <a:spcAft>
+                <a:spcPts val="600"/>
+              </a:spcAft>
+            </a:pPr>
+            <a:r>
+              <a:rPr sz="1400" b="0" i="0">
                 <a:solidFill>
                   <a:srgbClr val="0A0A0A"/>
                 </a:solidFill>
                 <a:latin typeface="Space Grotesk"/>
               </a:rPr>
-              <a:t>miss-SNF</a:t>
-            </a:r>
-          </a:p>
-        </p:txBody>
-      </p:sp>
-      <p:sp>
-        <p:nvSpPr>
-          <p:cNvPr id="12" name="TextBox 11"/>
-          <p:cNvSpPr txBox="1"/>
-          <p:nvPr/>
-        </p:nvSpPr>
-        <p:spPr>
-          <a:xfrm>
-            <a:off x="777240" y="2880360"/>
-            <a:ext cx="10424160" cy="3108960"/>
-          </a:xfrm>
-          <a:prstGeom prst="rect">
-            <a:avLst/>
-          </a:prstGeom>
-          <a:noFill/>
-        </p:spPr>
-        <p:txBody>
-          <a:bodyPr wrap="square" anchor="t" lIns="0" rIns="0" tIns="0" bIns="0">
-            <a:spAutoFit/>
-          </a:bodyPr>
-          <a:lstStyle/>
-          <a:p>
-            <a:pPr algn="l">
-              <a:lnSpc>
-                <a:spcPct val="130000"/>
-              </a:lnSpc>
-              <a:spcBef>
-                <a:spcPts val="0"/>
-              </a:spcBef>
-              <a:spcAft>
-                <a:spcPts val="1100"/>
-              </a:spcAft>
-            </a:pPr>
-            <a:r>
-              <a:rPr sz="1450" b="0" i="0">
+              <a:t>Then we </a:t>
+            </a:r>
+            <a:r>
+              <a:rPr sz="1400" b="1" i="0">
                 <a:solidFill>
                   <a:srgbClr val="FF2D55"/>
                 </a:solidFill>
                 <a:latin typeface="Space Grotesk"/>
               </a:rPr>
-              <a:t>— </a:t>
-            </a:r>
-            <a:r>
-              <a:rPr sz="1450" b="0" i="0">
-                <a:solidFill>
-                  <a:srgbClr val="1C1B19"/>
+              <a:t>tried to break our own picks</a:t>
+            </a:r>
+            <a:r>
+              <a:rPr sz="1400" b="0" i="0">
+                <a:solidFill>
+                  <a:srgbClr val="0A0A0A"/>
                 </a:solidFill>
                 <a:latin typeface="Space Grotesk"/>
               </a:rPr>
-              <a:t>First SNF variant for </a:t>
-            </a:r>
-            <a:r>
-              <a:rPr sz="1450" b="1" i="0">
-                <a:solidFill>
-                  <a:srgbClr val="1C1B19"/>
-                </a:solidFill>
-                <a:latin typeface="Space Grotesk"/>
-              </a:rPr>
-              <a:t>completely missing data sources</a:t>
-            </a:r>
-            <a:r>
-              <a:rPr sz="1450" b="0" i="0">
-                <a:solidFill>
-                  <a:srgbClr val="1C1B19"/>
-                </a:solidFill>
-                <a:latin typeface="Space Grotesk"/>
-              </a:rPr>
-              <a:t>. One similarity network per modality, fused by cross-diffusion.</a:t>
-            </a:r>
-          </a:p>
-          <a:p>
-            <a:pPr algn="l">
-              <a:lnSpc>
-                <a:spcPct val="130000"/>
-              </a:lnSpc>
-              <a:spcBef>
-                <a:spcPts val="0"/>
-              </a:spcBef>
-              <a:spcAft>
-                <a:spcPts val="1100"/>
-              </a:spcAft>
-            </a:pPr>
-            <a:r>
-              <a:rPr sz="1450" b="0" i="0">
-                <a:solidFill>
-                  <a:srgbClr val="FF2D55"/>
-                </a:solidFill>
-                <a:latin typeface="Space Grotesk"/>
-              </a:rPr>
-              <a:t>— </a:t>
-            </a:r>
-            <a:r>
-              <a:rPr sz="1450" b="0" i="0">
-                <a:solidFill>
-                  <a:srgbClr val="1C1B19"/>
-                </a:solidFill>
-                <a:latin typeface="Space Grotesk"/>
-              </a:rPr>
-              <a:t>A sample missing a source is reconstructed through its </a:t>
-            </a:r>
-            <a:r>
-              <a:rPr sz="1450" b="1" i="0">
-                <a:solidFill>
-                  <a:srgbClr val="FF2D55"/>
-                </a:solidFill>
-                <a:latin typeface="Space Grotesk"/>
-              </a:rPr>
-              <a:t>shared neighbours</a:t>
-            </a:r>
-            <a:r>
-              <a:rPr sz="1450" b="0" i="0">
-                <a:solidFill>
-                  <a:srgbClr val="1C1B19"/>
-                </a:solidFill>
-                <a:latin typeface="Space Grotesk"/>
-              </a:rPr>
-              <a:t> — no feature imputation.</a:t>
-            </a:r>
-          </a:p>
-          <a:p>
-            <a:pPr algn="l">
-              <a:lnSpc>
-                <a:spcPct val="130000"/>
-              </a:lnSpc>
-              <a:spcBef>
-                <a:spcPts val="0"/>
-              </a:spcBef>
-              <a:spcAft>
-                <a:spcPts val="1100"/>
-              </a:spcAft>
-            </a:pPr>
-            <a:r>
-              <a:rPr sz="1450" b="0" i="0">
-                <a:solidFill>
-                  <a:srgbClr val="FF2D55"/>
-                </a:solidFill>
-                <a:latin typeface="Space Grotesk"/>
-              </a:rPr>
-              <a:t>— </a:t>
-            </a:r>
-            <a:r>
-              <a:rPr sz="1450" b="1" i="0">
-                <a:solidFill>
-                  <a:srgbClr val="1C1B19"/>
-                </a:solidFill>
-                <a:latin typeface="Space Grotesk"/>
-              </a:rPr>
-              <a:t>Output is a fused n×n similarity → distance</a:t>
-            </a:r>
-            <a:r>
-              <a:rPr sz="1450" b="0" i="0">
-                <a:solidFill>
-                  <a:srgbClr val="1C1B19"/>
-                </a:solidFill>
-                <a:latin typeface="Space Grotesk"/>
-              </a:rPr>
-              <a:t> — our exact deliverable.</a:t>
-            </a:r>
-          </a:p>
-          <a:p>
-            <a:pPr algn="l">
-              <a:lnSpc>
-                <a:spcPct val="130000"/>
-              </a:lnSpc>
-              <a:spcBef>
-                <a:spcPts val="0"/>
-              </a:spcBef>
-              <a:spcAft>
-                <a:spcPts val="1100"/>
-              </a:spcAft>
-            </a:pPr>
-            <a:r>
-              <a:rPr sz="1450" b="0" i="0">
-                <a:solidFill>
-                  <a:srgbClr val="FF2D55"/>
-                </a:solidFill>
-                <a:latin typeface="Space Grotesk"/>
-              </a:rPr>
-              <a:t>— </a:t>
-            </a:r>
-            <a:r>
-              <a:rPr sz="1450" b="0" i="0">
-                <a:solidFill>
-                  <a:srgbClr val="1C1B19"/>
-                </a:solidFill>
-                <a:latin typeface="Space Grotesk"/>
-              </a:rPr>
-              <a:t>Risk we watch: diffusion is nonlinear → verify Mantel alignment vs. the linear target.</a:t>
+              <a:t> and feature the hardened version that fixes each weakness. Every method must beat the naive baseline in the missing-omics case, or we report it as a negative result.</a:t>
             </a:r>
           </a:p>
         </p:txBody>
@@ -5021,7 +6127,7 @@
                 </a:solidFill>
                 <a:latin typeface="JetBrains Mono"/>
               </a:rPr>
-              <a:t>PIPELINE &amp; EVALUATION</a:t>
+              <a:t>INSPIRING METHOD ①</a:t>
             </a:r>
           </a:p>
         </p:txBody>
@@ -5181,7 +6287,7 @@
                 </a:solidFill>
                 <a:latin typeface="JetBrains Mono"/>
               </a:rPr>
-              <a:t>12 / 13</a:t>
+              <a:t>12 / 16</a:t>
             </a:r>
           </a:p>
         </p:txBody>
@@ -5194,8 +6300,8 @@
         </p:nvSpPr>
         <p:spPr>
           <a:xfrm>
-            <a:off x="777240" y="1188720"/>
-            <a:ext cx="8229600" cy="320040"/>
+            <a:off x="777240" y="1325880"/>
+            <a:ext cx="10058400" cy="320040"/>
           </a:xfrm>
           <a:prstGeom prst="rect">
             <a:avLst/>
@@ -5226,46 +6332,65 @@
                 </a:solidFill>
                 <a:latin typeface="JetBrains Mono"/>
               </a:rPr>
-              <a:t>THE PLAN</a:t>
-            </a:r>
-          </a:p>
-        </p:txBody>
-      </p:sp>
-      <p:cxnSp>
-        <p:nvCxnSpPr>
-          <p:cNvPr id="11" name="Connector 10"/>
-          <p:cNvCxnSpPr/>
-          <p:nvPr/>
-        </p:nvCxnSpPr>
-        <p:spPr>
-          <a:xfrm>
-            <a:off x="5989320" y="1737360"/>
-            <a:ext cx="0" cy="4206240"/>
-          </a:xfrm>
-          <a:prstGeom prst="bentConnector3">
-            <a:avLst/>
-          </a:prstGeom>
-          <a:ln w="12700">
-            <a:solidFill>
-              <a:srgbClr val="DAD7CF"/>
-            </a:solidFill>
-          </a:ln>
-        </p:spPr>
-        <p:style>
-          <a:lnRef idx="2">
-            <a:schemeClr val="accent1"/>
-          </a:lnRef>
-          <a:fillRef idx="0">
-            <a:schemeClr val="accent1"/>
-          </a:fillRef>
-          <a:effectRef idx="1">
-            <a:schemeClr val="accent1"/>
-          </a:effectRef>
-          <a:fontRef idx="minor">
-            <a:schemeClr val="tx1"/>
-          </a:fontRef>
-        </p:style>
-      </p:cxnSp>
+              <a:t>OPTIMAL TRANSPORT · MATH &amp; VISION ORIGIN · SCOT+ 2025</a:t>
+            </a:r>
+          </a:p>
+        </p:txBody>
+      </p:sp>
+      <p:sp>
+        <p:nvSpPr>
+          <p:cNvPr id="11" name="TextBox 10"/>
+          <p:cNvSpPr txBox="1"/>
+          <p:nvPr/>
+        </p:nvSpPr>
+        <p:spPr>
+          <a:xfrm>
+            <a:off x="777240" y="1737360"/>
+            <a:ext cx="10424160" cy="914400"/>
+          </a:xfrm>
+          <a:prstGeom prst="rect">
+            <a:avLst/>
+          </a:prstGeom>
+          <a:noFill/>
+        </p:spPr>
+        <p:txBody>
+          <a:bodyPr wrap="square" anchor="t" lIns="0" rIns="0" tIns="0" bIns="0">
+            <a:spAutoFit/>
+          </a:bodyPr>
+          <a:lstStyle/>
+          <a:p>
+            <a:pPr algn="l">
+              <a:lnSpc>
+                <a:spcPct val="100000"/>
+              </a:lnSpc>
+              <a:spcBef>
+                <a:spcPts val="0"/>
+              </a:spcBef>
+              <a:spcAft>
+                <a:spcPts val="600"/>
+              </a:spcAft>
+            </a:pPr>
+            <a:r>
+              <a:rPr sz="3000" b="1" i="0">
+                <a:solidFill>
+                  <a:srgbClr val="FF2D55"/>
+                </a:solidFill>
+                <a:latin typeface="Space Grotesk"/>
+              </a:rPr>
+              <a:t>①  </a:t>
+            </a:r>
+            <a:r>
+              <a:rPr sz="3000" b="1" i="0">
+                <a:solidFill>
+                  <a:srgbClr val="0A0A0A"/>
+                </a:solidFill>
+                <a:latin typeface="Space Grotesk"/>
+              </a:rPr>
+              <a:t>Augmented / Fused Gromov–Wasserstein</a:t>
+            </a:r>
+          </a:p>
+        </p:txBody>
+      </p:sp>
       <p:sp>
         <p:nvSpPr>
           <p:cNvPr id="12" name="TextBox 11"/>
@@ -5274,8 +6399,8 @@
         </p:nvSpPr>
         <p:spPr>
           <a:xfrm>
-            <a:off x="777240" y="1737360"/>
-            <a:ext cx="4846320" cy="365760"/>
+            <a:off x="777240" y="2880360"/>
+            <a:ext cx="10424160" cy="3108960"/>
           </a:xfrm>
           <a:prstGeom prst="rect">
             <a:avLst/>
@@ -5290,97 +6415,66 @@
           <a:p>
             <a:pPr algn="l">
               <a:lnSpc>
-                <a:spcPct val="100000"/>
-              </a:lnSpc>
-              <a:spcBef>
-                <a:spcPts val="0"/>
-              </a:spcBef>
-              <a:spcAft>
-                <a:spcPts val="600"/>
-              </a:spcAft>
-            </a:pPr>
-            <a:r>
-              <a:rPr sz="1100" b="1" i="0" spc="160">
+                <a:spcPct val="130000"/>
+              </a:lnSpc>
+              <a:spcBef>
+                <a:spcPts val="0"/>
+              </a:spcBef>
+              <a:spcAft>
+                <a:spcPts val="1100"/>
+              </a:spcAft>
+            </a:pPr>
+            <a:r>
+              <a:rPr sz="1450" b="0" i="0">
                 <a:solidFill>
                   <a:srgbClr val="FF2D55"/>
                 </a:solidFill>
-                <a:latin typeface="JetBrains Mono"/>
-              </a:rPr>
-              <a:t>PIPELINE</a:t>
-            </a:r>
-          </a:p>
-        </p:txBody>
-      </p:sp>
-      <p:cxnSp>
-        <p:nvCxnSpPr>
-          <p:cNvPr id="13" name="Connector 12"/>
-          <p:cNvCxnSpPr/>
-          <p:nvPr/>
-        </p:nvCxnSpPr>
-        <p:spPr>
-          <a:xfrm>
-            <a:off x="777240" y="2121408"/>
-            <a:ext cx="4846319" cy="0"/>
-          </a:xfrm>
-          <a:prstGeom prst="bentConnector3">
-            <a:avLst/>
-          </a:prstGeom>
-          <a:ln w="12700">
-            <a:solidFill>
-              <a:srgbClr val="DAD7CF"/>
-            </a:solidFill>
-          </a:ln>
-        </p:spPr>
-        <p:style>
-          <a:lnRef idx="2">
-            <a:schemeClr val="accent1"/>
-          </a:lnRef>
-          <a:fillRef idx="0">
-            <a:schemeClr val="accent1"/>
-          </a:fillRef>
-          <a:effectRef idx="1">
-            <a:schemeClr val="accent1"/>
-          </a:effectRef>
-          <a:fontRef idx="minor">
-            <a:schemeClr val="tx1"/>
-          </a:fontRef>
-        </p:style>
-      </p:cxnSp>
-      <p:sp>
-        <p:nvSpPr>
-          <p:cNvPr id="14" name="TextBox 13"/>
-          <p:cNvSpPr txBox="1"/>
-          <p:nvPr/>
-        </p:nvSpPr>
-        <p:spPr>
-          <a:xfrm>
-            <a:off x="777240" y="2286000"/>
-            <a:ext cx="4846320" cy="3474720"/>
-          </a:xfrm>
-          <a:prstGeom prst="rect">
-            <a:avLst/>
-          </a:prstGeom>
-          <a:noFill/>
-        </p:spPr>
-        <p:txBody>
-          <a:bodyPr wrap="square" anchor="t" lIns="0" rIns="0" tIns="0" bIns="0">
-            <a:spAutoFit/>
-          </a:bodyPr>
-          <a:lstStyle/>
+                <a:latin typeface="Space Grotesk"/>
+              </a:rPr>
+              <a:t>— </a:t>
+            </a:r>
+            <a:r>
+              <a:rPr sz="1450" b="0" i="0">
+                <a:solidFill>
+                  <a:srgbClr val="1C1B19"/>
+                </a:solidFill>
+                <a:latin typeface="Space Grotesk"/>
+              </a:rPr>
+              <a:t>GW compares samples in </a:t>
+            </a:r>
+            <a:r>
+              <a:rPr sz="1450" b="1" i="0">
+                <a:solidFill>
+                  <a:srgbClr val="1C1B19"/>
+                </a:solidFill>
+                <a:latin typeface="Space Grotesk"/>
+              </a:rPr>
+              <a:t>incomparable spaces</a:t>
+            </a:r>
+            <a:r>
+              <a:rPr sz="1450" b="0" i="0">
+                <a:solidFill>
+                  <a:srgbClr val="1C1B19"/>
+                </a:solidFill>
+                <a:latin typeface="Space Grotesk"/>
+              </a:rPr>
+              <a:t> using only within-modality geometry — no shared features needed.</a:t>
+            </a:r>
+          </a:p>
           <a:p>
             <a:pPr algn="l">
               <a:lnSpc>
-                <a:spcPct val="128000"/>
-              </a:lnSpc>
-              <a:spcBef>
-                <a:spcPts val="0"/>
-              </a:spcBef>
-              <a:spcAft>
-                <a:spcPts val="900"/>
-              </a:spcAft>
-            </a:pPr>
-            <a:r>
-              <a:rPr sz="1300" b="0" i="0">
+                <a:spcPct val="130000"/>
+              </a:lnSpc>
+              <a:spcBef>
+                <a:spcPts val="0"/>
+              </a:spcBef>
+              <a:spcAft>
+                <a:spcPts val="1100"/>
+              </a:spcAft>
+            </a:pPr>
+            <a:r>
+              <a:rPr sz="1450" b="0" i="0">
                 <a:solidFill>
                   <a:srgbClr val="FF2D55"/>
                 </a:solidFill>
@@ -5389,47 +6483,87 @@
               <a:t>— </a:t>
             </a:r>
             <a:r>
-              <a:rPr sz="1300" b="0" i="0">
+              <a:rPr sz="1450" b="1" i="0">
                 <a:solidFill>
                   <a:srgbClr val="1C1B19"/>
                 </a:solidFill>
                 <a:latin typeface="Space Grotesk"/>
               </a:rPr>
-              <a:t>CLR(microbiome), log1p+standardise(metabolome); scaler &amp; PCA fit on </a:t>
-            </a:r>
-            <a:r>
-              <a:rPr sz="1300" b="1" i="0">
+              <a:t>Adaptation: </a:t>
+            </a:r>
+            <a:r>
+              <a:rPr sz="1450" b="0" i="0">
                 <a:solidFill>
                   <a:srgbClr val="1C1B19"/>
                 </a:solidFill>
                 <a:latin typeface="Space Grotesk"/>
               </a:rPr>
-              <a:t>train only</a:t>
-            </a:r>
-            <a:r>
-              <a:rPr sz="1300" b="0" i="0">
+              <a:t>couple a missing-modality sample to the complete samples' geometry, then barycentric-project onto the joint-PCA anchor → distances.</a:t>
+            </a:r>
+          </a:p>
+          <a:p>
+            <a:pPr algn="l">
+              <a:lnSpc>
+                <a:spcPct val="130000"/>
+              </a:lnSpc>
+              <a:spcBef>
+                <a:spcPts val="0"/>
+              </a:spcBef>
+              <a:spcAft>
+                <a:spcPts val="1100"/>
+              </a:spcAft>
+            </a:pPr>
+            <a:r>
+              <a:rPr sz="1450" b="0" i="0">
+                <a:solidFill>
+                  <a:srgbClr val="FF2D55"/>
+                </a:solidFill>
+                <a:latin typeface="Space Grotesk"/>
+              </a:rPr>
+              <a:t>— </a:t>
+            </a:r>
+            <a:r>
+              <a:rPr sz="1450" b="0" i="0">
                 <a:solidFill>
                   <a:srgbClr val="1C1B19"/>
                 </a:solidFill>
                 <a:latin typeface="Space Grotesk"/>
               </a:rPr>
-              <a:t>.</a:t>
+              <a:t>Honest fix (red-team): use </a:t>
+            </a:r>
+            <a:r>
+              <a:rPr sz="1450" b="1" i="0">
+                <a:solidFill>
+                  <a:srgbClr val="FF2D55"/>
+                </a:solidFill>
+                <a:latin typeface="Space Grotesk"/>
+              </a:rPr>
+              <a:t>Augmented GW</a:t>
+            </a:r>
+            <a:r>
+              <a:rPr sz="1450" b="0" i="0">
+                <a:solidFill>
+                  <a:srgbClr val="1C1B19"/>
+                </a:solidFill>
+                <a:latin typeface="Space Grotesk"/>
+              </a:rPr>
+              <a:t> — the feature term breaks GW's rotation/reflection ambiguity.</a:t>
             </a:r>
           </a:p>
           <a:p>
             <a:pPr algn="l">
               <a:lnSpc>
-                <a:spcPct val="128000"/>
-              </a:lnSpc>
-              <a:spcBef>
-                <a:spcPts val="0"/>
-              </a:spcBef>
-              <a:spcAft>
-                <a:spcPts val="900"/>
-              </a:spcAft>
-            </a:pPr>
-            <a:r>
-              <a:rPr sz="1300" b="0" i="0">
+                <a:spcPct val="130000"/>
+              </a:lnSpc>
+              <a:spcBef>
+                <a:spcPts val="0"/>
+              </a:spcBef>
+              <a:spcAft>
+                <a:spcPts val="1100"/>
+              </a:spcAft>
+            </a:pPr>
+            <a:r>
+              <a:rPr sz="1450" b="0" i="0">
                 <a:solidFill>
                   <a:srgbClr val="FF2D55"/>
                 </a:solidFill>
@@ -5438,347 +6572,22 @@
               <a:t>— </a:t>
             </a:r>
             <a:r>
-              <a:rPr sz="1300" b="0" i="0">
+              <a:rPr sz="1450" b="1" i="0">
                 <a:solidFill>
                   <a:srgbClr val="1C1B19"/>
                 </a:solidFill>
                 <a:latin typeface="Space Grotesk"/>
               </a:rPr>
-              <a:t>Core: AGW-OT and/or miss-SNF vs. the baseline ladder.</a:t>
-            </a:r>
-          </a:p>
-          <a:p>
-            <a:pPr algn="l">
-              <a:lnSpc>
-                <a:spcPct val="128000"/>
-              </a:lnSpc>
-              <a:spcBef>
-                <a:spcPts val="0"/>
-              </a:spcBef>
-              <a:spcAft>
-                <a:spcPts val="900"/>
-              </a:spcAft>
-            </a:pPr>
-            <a:r>
-              <a:rPr sz="1300" b="0" i="0">
-                <a:solidFill>
-                  <a:srgbClr val="FF2D55"/>
+              <a:t>Gate: </a:t>
+            </a:r>
+            <a:r>
+              <a:rPr sz="1450" b="0" i="0">
+                <a:solidFill>
+                  <a:srgbClr val="1C1B19"/>
                 </a:solidFill>
                 <a:latin typeface="Space Grotesk"/>
               </a:rPr>
-              <a:t>— </a:t>
-            </a:r>
-            <a:r>
-              <a:rPr sz="1300" b="0" i="0">
-                <a:solidFill>
-                  <a:srgbClr val="1C1B19"/>
-                </a:solidFill>
-                <a:latin typeface="Space Grotesk"/>
-              </a:rPr>
-              <a:t>Sound comparator: coupled factorisation (ACMTF-R, 2026) — distances from the </a:t>
-            </a:r>
-            <a:r>
-              <a:rPr sz="1300" b="1" i="0">
-                <a:solidFill>
-                  <a:srgbClr val="1C1B19"/>
-                </a:solidFill>
-                <a:latin typeface="Space Grotesk"/>
-              </a:rPr>
-              <a:t>common components only</a:t>
-            </a:r>
-            <a:r>
-              <a:rPr sz="1300" b="0" i="0">
-                <a:solidFill>
-                  <a:srgbClr val="1C1B19"/>
-                </a:solidFill>
-                <a:latin typeface="Space Grotesk"/>
-              </a:rPr>
-              <a:t>.</a:t>
-            </a:r>
-          </a:p>
-          <a:p>
-            <a:pPr algn="l">
-              <a:lnSpc>
-                <a:spcPct val="128000"/>
-              </a:lnSpc>
-              <a:spcBef>
-                <a:spcPts val="0"/>
-              </a:spcBef>
-              <a:spcAft>
-                <a:spcPts val="900"/>
-              </a:spcAft>
-            </a:pPr>
-            <a:r>
-              <a:rPr sz="1300" b="0" i="0">
-                <a:solidFill>
-                  <a:srgbClr val="FF2D55"/>
-                </a:solidFill>
-                <a:latin typeface="Space Grotesk"/>
-              </a:rPr>
-              <a:t>— </a:t>
-            </a:r>
-            <a:r>
-              <a:rPr sz="1300" b="0" i="0">
-                <a:solidFill>
-                  <a:srgbClr val="1C1B19"/>
-                </a:solidFill>
-                <a:latin typeface="Space Grotesk"/>
-              </a:rPr>
-              <a:t>Baseline ladder: mean / KNN / RF / PLS→frozen-PCA.</a:t>
-            </a:r>
-          </a:p>
-        </p:txBody>
-      </p:sp>
-      <p:sp>
-        <p:nvSpPr>
-          <p:cNvPr id="15" name="TextBox 14"/>
-          <p:cNvSpPr txBox="1"/>
-          <p:nvPr/>
-        </p:nvSpPr>
-        <p:spPr>
-          <a:xfrm>
-            <a:off x="6309359" y="1737360"/>
-            <a:ext cx="4846320" cy="365760"/>
-          </a:xfrm>
-          <a:prstGeom prst="rect">
-            <a:avLst/>
-          </a:prstGeom>
-          <a:noFill/>
-        </p:spPr>
-        <p:txBody>
-          <a:bodyPr wrap="square" anchor="t" lIns="0" rIns="0" tIns="0" bIns="0">
-            <a:spAutoFit/>
-          </a:bodyPr>
-          <a:lstStyle/>
-          <a:p>
-            <a:pPr algn="l">
-              <a:lnSpc>
-                <a:spcPct val="100000"/>
-              </a:lnSpc>
-              <a:spcBef>
-                <a:spcPts val="0"/>
-              </a:spcBef>
-              <a:spcAft>
-                <a:spcPts val="600"/>
-              </a:spcAft>
-            </a:pPr>
-            <a:r>
-              <a:rPr sz="1100" b="1" i="0" spc="160">
-                <a:solidFill>
-                  <a:srgbClr val="FF2D55"/>
-                </a:solidFill>
-                <a:latin typeface="JetBrains Mono"/>
-              </a:rPr>
-              <a:t>EVALUATION</a:t>
-            </a:r>
-          </a:p>
-        </p:txBody>
-      </p:sp>
-      <p:cxnSp>
-        <p:nvCxnSpPr>
-          <p:cNvPr id="16" name="Connector 15"/>
-          <p:cNvCxnSpPr/>
-          <p:nvPr/>
-        </p:nvCxnSpPr>
-        <p:spPr>
-          <a:xfrm>
-            <a:off x="6309359" y="2121408"/>
-            <a:ext cx="4846321" cy="0"/>
-          </a:xfrm>
-          <a:prstGeom prst="bentConnector3">
-            <a:avLst/>
-          </a:prstGeom>
-          <a:ln w="12700">
-            <a:solidFill>
-              <a:srgbClr val="DAD7CF"/>
-            </a:solidFill>
-          </a:ln>
-        </p:spPr>
-        <p:style>
-          <a:lnRef idx="2">
-            <a:schemeClr val="accent1"/>
-          </a:lnRef>
-          <a:fillRef idx="0">
-            <a:schemeClr val="accent1"/>
-          </a:fillRef>
-          <a:effectRef idx="1">
-            <a:schemeClr val="accent1"/>
-          </a:effectRef>
-          <a:fontRef idx="minor">
-            <a:schemeClr val="tx1"/>
-          </a:fontRef>
-        </p:style>
-      </p:cxnSp>
-      <p:sp>
-        <p:nvSpPr>
-          <p:cNvPr id="17" name="TextBox 16"/>
-          <p:cNvSpPr txBox="1"/>
-          <p:nvPr/>
-        </p:nvSpPr>
-        <p:spPr>
-          <a:xfrm>
-            <a:off x="6309359" y="2286000"/>
-            <a:ext cx="5029200" cy="3474720"/>
-          </a:xfrm>
-          <a:prstGeom prst="rect">
-            <a:avLst/>
-          </a:prstGeom>
-          <a:noFill/>
-        </p:spPr>
-        <p:txBody>
-          <a:bodyPr wrap="square" anchor="t" lIns="0" rIns="0" tIns="0" bIns="0">
-            <a:spAutoFit/>
-          </a:bodyPr>
-          <a:lstStyle/>
-          <a:p>
-            <a:pPr algn="l">
-              <a:lnSpc>
-                <a:spcPct val="128000"/>
-              </a:lnSpc>
-              <a:spcBef>
-                <a:spcPts val="0"/>
-              </a:spcBef>
-              <a:spcAft>
-                <a:spcPts val="900"/>
-              </a:spcAft>
-            </a:pPr>
-            <a:r>
-              <a:rPr sz="1300" b="0" i="0">
-                <a:solidFill>
-                  <a:srgbClr val="FF2D55"/>
-                </a:solidFill>
-                <a:latin typeface="Space Grotesk"/>
-              </a:rPr>
-              <a:t>— </a:t>
-            </a:r>
-            <a:r>
-              <a:rPr sz="1300" b="0" i="0">
-                <a:solidFill>
-                  <a:srgbClr val="1C1B19"/>
-                </a:solidFill>
-                <a:latin typeface="Space Grotesk"/>
-              </a:rPr>
-              <a:t>Mantel r vs. PCA-2PC ground truth (reproduce the grader exactly).</a:t>
-            </a:r>
-          </a:p>
-          <a:p>
-            <a:pPr algn="l">
-              <a:lnSpc>
-                <a:spcPct val="128000"/>
-              </a:lnSpc>
-              <a:spcBef>
-                <a:spcPts val="0"/>
-              </a:spcBef>
-              <a:spcAft>
-                <a:spcPts val="900"/>
-              </a:spcAft>
-            </a:pPr>
-            <a:r>
-              <a:rPr sz="1300" b="0" i="0">
-                <a:solidFill>
-                  <a:srgbClr val="FF2D55"/>
-                </a:solidFill>
-                <a:latin typeface="Space Grotesk"/>
-              </a:rPr>
-              <a:t>— </a:t>
-            </a:r>
-            <a:r>
-              <a:rPr sz="1300" b="0" i="0">
-                <a:solidFill>
-                  <a:srgbClr val="1C1B19"/>
-                </a:solidFill>
-                <a:latin typeface="Space Grotesk"/>
-              </a:rPr>
-              <a:t>Sweep missing-% = 10/30/50, </a:t>
-            </a:r>
-            <a:r>
-              <a:rPr sz="1300" b="1" i="0">
-                <a:solidFill>
-                  <a:srgbClr val="1C1B19"/>
-                </a:solidFill>
-                <a:latin typeface="Space Grotesk"/>
-              </a:rPr>
-              <a:t>both directions</a:t>
-            </a:r>
-            <a:r>
-              <a:rPr sz="1300" b="0" i="0">
-                <a:solidFill>
-                  <a:srgbClr val="1C1B19"/>
-                </a:solidFill>
-                <a:latin typeface="Space Grotesk"/>
-              </a:rPr>
-              <a:t>.</a:t>
-            </a:r>
-          </a:p>
-          <a:p>
-            <a:pPr algn="l">
-              <a:lnSpc>
-                <a:spcPct val="128000"/>
-              </a:lnSpc>
-              <a:spcBef>
-                <a:spcPts val="0"/>
-              </a:spcBef>
-              <a:spcAft>
-                <a:spcPts val="900"/>
-              </a:spcAft>
-            </a:pPr>
-            <a:r>
-              <a:rPr sz="1300" b="0" i="0">
-                <a:solidFill>
-                  <a:srgbClr val="FF2D55"/>
-                </a:solidFill>
-                <a:latin typeface="Space Grotesk"/>
-              </a:rPr>
-              <a:t>— </a:t>
-            </a:r>
-            <a:r>
-              <a:rPr sz="1300" b="1" i="0">
-                <a:solidFill>
-                  <a:srgbClr val="FF2D55"/>
-                </a:solidFill>
-                <a:latin typeface="Space Grotesk"/>
-              </a:rPr>
-              <a:t>Subject-grouped CV</a:t>
-            </a:r>
-            <a:r>
-              <a:rPr sz="1300" b="0" i="0">
-                <a:solidFill>
-                  <a:srgbClr val="1C1B19"/>
-                </a:solidFill>
-                <a:latin typeface="Space Grotesk"/>
-              </a:rPr>
-              <a:t> — distance pairs are non-iid; no leakage.</a:t>
-            </a:r>
-          </a:p>
-          <a:p>
-            <a:pPr algn="l">
-              <a:lnSpc>
-                <a:spcPct val="128000"/>
-              </a:lnSpc>
-              <a:spcBef>
-                <a:spcPts val="0"/>
-              </a:spcBef>
-              <a:spcAft>
-                <a:spcPts val="900"/>
-              </a:spcAft>
-            </a:pPr>
-            <a:r>
-              <a:rPr sz="1300" b="0" i="0">
-                <a:solidFill>
-                  <a:srgbClr val="FF2D55"/>
-                </a:solidFill>
-                <a:latin typeface="Space Grotesk"/>
-              </a:rPr>
-              <a:t>— </a:t>
-            </a:r>
-            <a:r>
-              <a:rPr sz="1300" b="0" i="0">
-                <a:solidFill>
-                  <a:srgbClr val="1C1B19"/>
-                </a:solidFill>
-                <a:latin typeface="Space Grotesk"/>
-              </a:rPr>
-              <a:t>Report performance and runtime vs. the baseline.</a:t>
+              <a:t>must beat mean/PLS in the missing regime, else reported as a negative result.</a:t>
             </a:r>
           </a:p>
         </p:txBody>
@@ -5817,8 +6626,8 @@
         </p:nvSpPr>
         <p:spPr>
           <a:xfrm>
-            <a:off x="7955279" y="-365760"/>
-            <a:ext cx="5120640" cy="3200400"/>
+            <a:off x="7955279" y="3657600"/>
+            <a:ext cx="5120640" cy="3566160"/>
           </a:xfrm>
           <a:prstGeom prst="rect">
             <a:avLst/>
@@ -5943,9 +6752,54 @@
           </a:p>
         </p:txBody>
       </p:sp>
+      <p:sp>
+        <p:nvSpPr>
+          <p:cNvPr id="5" name="TextBox 4"/>
+          <p:cNvSpPr txBox="1"/>
+          <p:nvPr/>
+        </p:nvSpPr>
+        <p:spPr>
+          <a:xfrm>
+            <a:off x="5928055" y="365760"/>
+            <a:ext cx="5486400" cy="274320"/>
+          </a:xfrm>
+          <a:prstGeom prst="rect">
+            <a:avLst/>
+          </a:prstGeom>
+          <a:noFill/>
+        </p:spPr>
+        <p:txBody>
+          <a:bodyPr wrap="square" anchor="t" lIns="0" rIns="0" tIns="0" bIns="0">
+            <a:spAutoFit/>
+          </a:bodyPr>
+          <a:lstStyle/>
+          <a:p>
+            <a:pPr algn="r">
+              <a:lnSpc>
+                <a:spcPct val="100000"/>
+              </a:lnSpc>
+              <a:spcBef>
+                <a:spcPts val="0"/>
+              </a:spcBef>
+              <a:spcAft>
+                <a:spcPts val="600"/>
+              </a:spcAft>
+            </a:pPr>
+            <a:r>
+              <a:rPr sz="950" b="0" i="0" spc="160">
+                <a:solidFill>
+                  <a:srgbClr val="6B6863"/>
+                </a:solidFill>
+                <a:latin typeface="JetBrains Mono"/>
+              </a:rPr>
+              <a:t>INSPIRING METHOD ②</a:t>
+            </a:r>
+          </a:p>
+        </p:txBody>
+      </p:sp>
       <p:cxnSp>
         <p:nvCxnSpPr>
-          <p:cNvPr id="5" name="Connector 4"/>
+          <p:cNvPr id="6" name="Connector 5"/>
           <p:cNvCxnSpPr/>
           <p:nvPr/>
         </p:nvCxnSpPr>
@@ -5978,16 +6832,51 @@
           </a:fontRef>
         </p:style>
       </p:cxnSp>
-      <p:sp>
-        <p:nvSpPr>
-          <p:cNvPr id="6" name="TextBox 5"/>
-          <p:cNvSpPr txBox="1"/>
-          <p:nvPr/>
-        </p:nvSpPr>
-        <p:spPr>
-          <a:xfrm>
-            <a:off x="777240" y="2011680"/>
-            <a:ext cx="8229600" cy="320040"/>
+      <p:cxnSp>
+        <p:nvCxnSpPr>
+          <p:cNvPr id="7" name="Connector 6"/>
+          <p:cNvCxnSpPr/>
+          <p:nvPr/>
+        </p:nvCxnSpPr>
+        <p:spPr>
+          <a:xfrm>
+            <a:off x="777240" y="6272784"/>
+            <a:ext cx="10637215" cy="0"/>
+          </a:xfrm>
+          <a:prstGeom prst="bentConnector3">
+            <a:avLst/>
+          </a:prstGeom>
+          <a:ln w="12700">
+            <a:solidFill>
+              <a:srgbClr val="DAD7CF"/>
+            </a:solidFill>
+          </a:ln>
+        </p:spPr>
+        <p:style>
+          <a:lnRef idx="2">
+            <a:schemeClr val="accent1"/>
+          </a:lnRef>
+          <a:fillRef idx="0">
+            <a:schemeClr val="accent1"/>
+          </a:fillRef>
+          <a:effectRef idx="1">
+            <a:schemeClr val="accent1"/>
+          </a:effectRef>
+          <a:fontRef idx="minor">
+            <a:schemeClr val="tx1"/>
+          </a:fontRef>
+        </p:style>
+      </p:cxnSp>
+      <p:sp>
+        <p:nvSpPr>
+          <p:cNvPr id="8" name="TextBox 7"/>
+          <p:cNvSpPr txBox="1"/>
+          <p:nvPr/>
+        </p:nvSpPr>
+        <p:spPr>
+          <a:xfrm>
+            <a:off x="777240" y="6355080"/>
+            <a:ext cx="6400800" cy="274320"/>
           </a:xfrm>
           <a:prstGeom prst="rect">
             <a:avLst/>
@@ -6012,27 +6901,117 @@
               </a:spcAft>
             </a:pPr>
             <a:r>
+              <a:rPr sz="900" b="0" i="0" spc="140">
+                <a:solidFill>
+                  <a:srgbClr val="6B6863"/>
+                </a:solidFill>
+                <a:latin typeface="JetBrains Mono"/>
+              </a:rPr>
+              <a:t>COMPUTATIONAL MICROBIOME WORKSHOP</a:t>
+            </a:r>
+          </a:p>
+        </p:txBody>
+      </p:sp>
+      <p:sp>
+        <p:nvSpPr>
+          <p:cNvPr id="9" name="TextBox 8"/>
+          <p:cNvSpPr txBox="1"/>
+          <p:nvPr/>
+        </p:nvSpPr>
+        <p:spPr>
+          <a:xfrm>
+            <a:off x="8671255" y="6355080"/>
+            <a:ext cx="2743200" cy="274320"/>
+          </a:xfrm>
+          <a:prstGeom prst="rect">
+            <a:avLst/>
+          </a:prstGeom>
+          <a:noFill/>
+        </p:spPr>
+        <p:txBody>
+          <a:bodyPr wrap="square" anchor="t" lIns="0" rIns="0" tIns="0" bIns="0">
+            <a:spAutoFit/>
+          </a:bodyPr>
+          <a:lstStyle/>
+          <a:p>
+            <a:pPr algn="r">
+              <a:lnSpc>
+                <a:spcPct val="100000"/>
+              </a:lnSpc>
+              <a:spcBef>
+                <a:spcPts val="0"/>
+              </a:spcBef>
+              <a:spcAft>
+                <a:spcPts val="600"/>
+              </a:spcAft>
+            </a:pPr>
+            <a:r>
+              <a:rPr sz="900" b="0" i="0" spc="140">
+                <a:solidFill>
+                  <a:srgbClr val="6B6863"/>
+                </a:solidFill>
+                <a:latin typeface="JetBrains Mono"/>
+              </a:rPr>
+              <a:t>13 / 16</a:t>
+            </a:r>
+          </a:p>
+        </p:txBody>
+      </p:sp>
+      <p:sp>
+        <p:nvSpPr>
+          <p:cNvPr id="10" name="TextBox 9"/>
+          <p:cNvSpPr txBox="1"/>
+          <p:nvPr/>
+        </p:nvSpPr>
+        <p:spPr>
+          <a:xfrm>
+            <a:off x="777240" y="1325880"/>
+            <a:ext cx="10058400" cy="320040"/>
+          </a:xfrm>
+          <a:prstGeom prst="rect">
+            <a:avLst/>
+          </a:prstGeom>
+          <a:noFill/>
+        </p:spPr>
+        <p:txBody>
+          <a:bodyPr wrap="square" anchor="t" lIns="0" rIns="0" tIns="0" bIns="0">
+            <a:spAutoFit/>
+          </a:bodyPr>
+          <a:lstStyle/>
+          <a:p>
+            <a:pPr algn="l">
+              <a:lnSpc>
+                <a:spcPct val="100000"/>
+              </a:lnSpc>
+              <a:spcBef>
+                <a:spcPts val="0"/>
+              </a:spcBef>
+              <a:spcAft>
+                <a:spcPts val="600"/>
+              </a:spcAft>
+            </a:pPr>
+            <a:r>
               <a:rPr sz="1100" b="0" i="0" spc="180">
                 <a:solidFill>
                   <a:srgbClr val="FF2D55"/>
                 </a:solidFill>
                 <a:latin typeface="JetBrains Mono"/>
               </a:rPr>
-              <a:t>KEY CHALLENGES → NEXT STEPS</a:t>
-            </a:r>
-          </a:p>
-        </p:txBody>
-      </p:sp>
-      <p:sp>
-        <p:nvSpPr>
-          <p:cNvPr id="7" name="TextBox 6"/>
-          <p:cNvSpPr txBox="1"/>
-          <p:nvPr/>
-        </p:nvSpPr>
-        <p:spPr>
-          <a:xfrm>
-            <a:off x="777240" y="2468880"/>
-            <a:ext cx="10058400" cy="1645920"/>
+              <a:t>WAYFINDING · GPS-STYLE TRIANGULATION · OUR SYNTHESIS</a:t>
+            </a:r>
+          </a:p>
+        </p:txBody>
+      </p:sp>
+      <p:sp>
+        <p:nvSpPr>
+          <p:cNvPr id="11" name="TextBox 10"/>
+          <p:cNvSpPr txBox="1"/>
+          <p:nvPr/>
+        </p:nvSpPr>
+        <p:spPr>
+          <a:xfrm>
+            <a:off x="777240" y="1737360"/>
+            <a:ext cx="10424160" cy="914400"/>
           </a:xfrm>
           <a:prstGeom prst="rect">
             <a:avLst/>
@@ -6047,55 +7026,318 @@
           <a:p>
             <a:pPr algn="l">
               <a:lnSpc>
-                <a:spcPct val="105000"/>
-              </a:lnSpc>
-              <a:spcBef>
-                <a:spcPts val="0"/>
-              </a:spcBef>
-              <a:spcAft>
-                <a:spcPts val="600"/>
-              </a:spcAft>
-            </a:pPr>
-            <a:r>
-              <a:rPr sz="3000" b="0" i="0">
+                <a:spcPct val="100000"/>
+              </a:lnSpc>
+              <a:spcBef>
+                <a:spcPts val="0"/>
+              </a:spcBef>
+              <a:spcAft>
+                <a:spcPts val="600"/>
+              </a:spcAft>
+            </a:pPr>
+            <a:r>
+              <a:rPr sz="3000" b="1" i="0">
+                <a:solidFill>
+                  <a:srgbClr val="FF2D55"/>
+                </a:solidFill>
+                <a:latin typeface="Space Grotesk"/>
+              </a:rPr>
+              <a:t>②  </a:t>
+            </a:r>
+            <a:r>
+              <a:rPr sz="3000" b="1" i="0">
                 <a:solidFill>
                   <a:srgbClr val="0A0A0A"/>
                 </a:solidFill>
                 <a:latin typeface="Space Grotesk"/>
               </a:rPr>
-              <a:t>Beat mean imputation by exploiting the </a:t>
-            </a:r>
-            <a:r>
-              <a:rPr sz="3000" b="1" i="0">
+              <a:t>CM-Harmonic-Aniso: triangulate, don't impute</a:t>
+            </a:r>
+          </a:p>
+        </p:txBody>
+      </p:sp>
+      <p:sp>
+        <p:nvSpPr>
+          <p:cNvPr id="12" name="TextBox 11"/>
+          <p:cNvSpPr txBox="1"/>
+          <p:nvPr/>
+        </p:nvSpPr>
+        <p:spPr>
+          <a:xfrm>
+            <a:off x="777240" y="2880360"/>
+            <a:ext cx="10424160" cy="3108960"/>
+          </a:xfrm>
+          <a:prstGeom prst="rect">
+            <a:avLst/>
+          </a:prstGeom>
+          <a:noFill/>
+        </p:spPr>
+        <p:txBody>
+          <a:bodyPr wrap="square" anchor="t" lIns="0" rIns="0" tIns="0" bIns="0">
+            <a:spAutoFit/>
+          </a:bodyPr>
+          <a:lstStyle/>
+          <a:p>
+            <a:pPr algn="l">
+              <a:lnSpc>
+                <a:spcPct val="130000"/>
+              </a:lnSpc>
+              <a:spcBef>
+                <a:spcPts val="0"/>
+              </a:spcBef>
+              <a:spcAft>
+                <a:spcPts val="1100"/>
+              </a:spcAft>
+            </a:pPr>
+            <a:r>
+              <a:rPr sz="1450" b="0" i="0">
                 <a:solidFill>
                   <a:srgbClr val="FF2D55"/>
                 </a:solidFill>
                 <a:latin typeface="Space Grotesk"/>
               </a:rPr>
-              <a:t>predictable cross-modal subset</a:t>
-            </a:r>
-            <a:r>
-              <a:rPr sz="3000" b="0" i="0">
-                <a:solidFill>
-                  <a:srgbClr val="0A0A0A"/>
+              <a:t>— </a:t>
+            </a:r>
+            <a:r>
+              <a:rPr sz="1450" b="0" i="0">
+                <a:solidFill>
+                  <a:srgbClr val="1C1B19"/>
                 </a:solidFill>
                 <a:latin typeface="Space Grotesk"/>
               </a:rPr>
-              <a:t> + the metabolome-only direction.</a:t>
-            </a:r>
-          </a:p>
-        </p:txBody>
-      </p:sp>
-      <p:sp>
-        <p:nvSpPr>
-          <p:cNvPr id="8" name="Rectangle 7"/>
+              <a:t>Pin the 1042 complete patients at their </a:t>
+            </a:r>
+            <a:r>
+              <a:rPr sz="1450" b="1" i="0">
+                <a:solidFill>
+                  <a:srgbClr val="1C1B19"/>
+                </a:solidFill>
+                <a:latin typeface="Space Grotesk"/>
+              </a:rPr>
+              <a:t>true first-two-PC coordinates</a:t>
+            </a:r>
+            <a:r>
+              <a:rPr sz="1450" b="0" i="0">
+                <a:solidFill>
+                  <a:srgbClr val="1C1B19"/>
+                </a:solidFill>
+                <a:latin typeface="Space Grotesk"/>
+              </a:rPr>
+              <a:t> (the exact thing we are graded on) as fixed landmarks. The only method anchored on the grader's own target.</a:t>
+            </a:r>
+          </a:p>
+          <a:p>
+            <a:pPr algn="l">
+              <a:lnSpc>
+                <a:spcPct val="130000"/>
+              </a:lnSpc>
+              <a:spcBef>
+                <a:spcPts val="0"/>
+              </a:spcBef>
+              <a:spcAft>
+                <a:spcPts val="1100"/>
+              </a:spcAft>
+            </a:pPr>
+            <a:r>
+              <a:rPr sz="1450" b="0" i="0">
+                <a:solidFill>
+                  <a:srgbClr val="FF2D55"/>
+                </a:solidFill>
+                <a:latin typeface="Space Grotesk"/>
+              </a:rPr>
+              <a:t>— </a:t>
+            </a:r>
+            <a:r>
+              <a:rPr sz="1450" b="0" i="0">
+                <a:solidFill>
+                  <a:srgbClr val="1C1B19"/>
+                </a:solidFill>
+                <a:latin typeface="Space Grotesk"/>
+              </a:rPr>
+              <a:t>Place each of the 696 single-omics patients by </a:t>
+            </a:r>
+            <a:r>
+              <a:rPr sz="1450" b="1" i="0">
+                <a:solidFill>
+                  <a:srgbClr val="FF2D55"/>
+                </a:solidFill>
+                <a:latin typeface="Space Grotesk"/>
+              </a:rPr>
+              <a:t>triangulating off those landmarks</a:t>
+            </a:r>
+            <a:r>
+              <a:rPr sz="1450" b="0" i="0">
+                <a:solidFill>
+                  <a:srgbClr val="1C1B19"/>
+                </a:solidFill>
+                <a:latin typeface="Space Grotesk"/>
+              </a:rPr>
+              <a:t>: one harmonic solve on a fused graph where a missing omics is no edge, never an invented value.</a:t>
+            </a:r>
+          </a:p>
+          <a:p>
+            <a:pPr algn="l">
+              <a:lnSpc>
+                <a:spcPct val="130000"/>
+              </a:lnSpc>
+              <a:spcBef>
+                <a:spcPts val="0"/>
+              </a:spcBef>
+              <a:spcAft>
+                <a:spcPts val="1100"/>
+              </a:spcAft>
+            </a:pPr>
+            <a:r>
+              <a:rPr sz="1450" b="0" i="0">
+                <a:solidFill>
+                  <a:srgbClr val="FF2D55"/>
+                </a:solidFill>
+                <a:latin typeface="Space Grotesk"/>
+              </a:rPr>
+              <a:t>— </a:t>
+            </a:r>
+            <a:r>
+              <a:rPr sz="1450" b="1" i="0">
+                <a:solidFill>
+                  <a:srgbClr val="1C1B19"/>
+                </a:solidFill>
+                <a:latin typeface="Space Grotesk"/>
+              </a:rPr>
+              <a:t>Honest per-axis split: </a:t>
+            </a:r>
+            <a:r>
+              <a:rPr sz="1450" b="0" i="0">
+                <a:solidFill>
+                  <a:srgbClr val="1C1B19"/>
+                </a:solidFill>
+                <a:latin typeface="Space Grotesk"/>
+              </a:rPr>
+              <a:t>the part carried by the omics you have beats every imputation baseline; the part needing the missing omics falls back to the average, provably never worse than mean-impute.</a:t>
+            </a:r>
+          </a:p>
+          <a:p>
+            <a:pPr algn="l">
+              <a:lnSpc>
+                <a:spcPct val="130000"/>
+              </a:lnSpc>
+              <a:spcBef>
+                <a:spcPts val="0"/>
+              </a:spcBef>
+              <a:spcAft>
+                <a:spcPts val="1100"/>
+              </a:spcAft>
+            </a:pPr>
+            <a:r>
+              <a:rPr sz="1450" b="0" i="0">
+                <a:solidFill>
+                  <a:srgbClr val="FF2D55"/>
+                </a:solidFill>
+                <a:latin typeface="Space Grotesk"/>
+              </a:rPr>
+              <a:t>— </a:t>
+            </a:r>
+            <a:r>
+              <a:rPr sz="1450" b="1" i="0">
+                <a:solidFill>
+                  <a:srgbClr val="1C1B19"/>
+                </a:solidFill>
+                <a:latin typeface="Space Grotesk"/>
+              </a:rPr>
+              <a:t>Gate: </a:t>
+            </a:r>
+            <a:r>
+              <a:rPr sz="1450" b="0" i="0">
+                <a:solidFill>
+                  <a:srgbClr val="1C1B19"/>
+                </a:solidFill>
+                <a:latin typeface="Space Grotesk"/>
+              </a:rPr>
+              <a:t>must beat mean/PLS per-axis on held-out patients, with a fail-closed fallback to PLS on boundary-poor cohorts, else a negative result.</a:t>
+            </a:r>
+          </a:p>
+        </p:txBody>
+      </p:sp>
+    </p:spTree>
+  </p:cSld>
+  <p:clrMapOvr>
+    <a:masterClrMapping/>
+  </p:clrMapOvr>
+</p:sld>
+</file>
+
+<file path=ppt/slides/slide14.xml><?xml version="1.0" encoding="utf-8"?>
+<p:sld xmlns:a="http://schemas.openxmlformats.org/drawingml/2006/main" xmlns:p="http://schemas.openxmlformats.org/presentationml/2006/main" xmlns:r="http://schemas.openxmlformats.org/officeDocument/2006/relationships">
+  <p:cSld>
+    <p:bg>
+      <p:bgPr>
+        <a:solidFill>
+          <a:srgbClr val="FAF9F6"/>
+        </a:solidFill>
+        <a:effectLst/>
+      </p:bgPr>
+    </p:bg>
+    <p:spTree>
+      <p:nvGrpSpPr>
+        <p:cNvPr id="1" name=""/>
+        <p:cNvGrpSpPr/>
+        <p:nvPr/>
+      </p:nvGrpSpPr>
+      <p:grpSpPr/>
+      <p:sp>
+        <p:nvSpPr>
+          <p:cNvPr id="2" name="TextBox 1"/>
+          <p:cNvSpPr txBox="1"/>
+          <p:nvPr/>
+        </p:nvSpPr>
+        <p:spPr>
+          <a:xfrm>
+            <a:off x="7955279" y="3657600"/>
+            <a:ext cx="5120640" cy="3566160"/>
+          </a:xfrm>
+          <a:prstGeom prst="rect">
+            <a:avLst/>
+          </a:prstGeom>
+          <a:noFill/>
+        </p:spPr>
+        <p:txBody>
+          <a:bodyPr wrap="square" anchor="t" lIns="0" rIns="0" tIns="0" bIns="0">
+            <a:spAutoFit/>
+          </a:bodyPr>
+          <a:lstStyle/>
+          <a:p>
+            <a:pPr algn="r">
+              <a:lnSpc>
+                <a:spcPct val="100000"/>
+              </a:lnSpc>
+              <a:spcBef>
+                <a:spcPts val="0"/>
+              </a:spcBef>
+              <a:spcAft>
+                <a:spcPts val="600"/>
+              </a:spcAft>
+            </a:pPr>
+            <a:r>
+              <a:rPr sz="25000" b="1" i="0">
+                <a:solidFill>
+                  <a:srgbClr val="F1C9D2"/>
+                </a:solidFill>
+                <a:latin typeface="Space Grotesk"/>
+              </a:rPr>
+              <a:t>14</a:t>
+            </a:r>
+          </a:p>
+        </p:txBody>
+      </p:sp>
+      <p:sp>
+        <p:nvSpPr>
+          <p:cNvPr id="3" name="Rectangle 2"/>
           <p:cNvSpPr/>
           <p:nvPr/>
         </p:nvSpPr>
         <p:spPr>
           <a:xfrm>
-            <a:off x="777240" y="4480560"/>
-            <a:ext cx="1051560" cy="45720"/>
+            <a:off x="777240" y="420624"/>
+            <a:ext cx="91440" cy="91440"/>
           </a:xfrm>
           <a:prstGeom prst="rect">
             <a:avLst/>
@@ -6132,6 +7374,1823 @@
       </p:sp>
       <p:sp>
         <p:nvSpPr>
+          <p:cNvPr id="4" name="TextBox 3"/>
+          <p:cNvSpPr txBox="1"/>
+          <p:nvPr/>
+        </p:nvSpPr>
+        <p:spPr>
+          <a:xfrm>
+            <a:off x="978408" y="365760"/>
+            <a:ext cx="6400800" cy="274320"/>
+          </a:xfrm>
+          <a:prstGeom prst="rect">
+            <a:avLst/>
+          </a:prstGeom>
+          <a:noFill/>
+        </p:spPr>
+        <p:txBody>
+          <a:bodyPr wrap="square" anchor="t" lIns="0" rIns="0" tIns="0" bIns="0">
+            <a:spAutoFit/>
+          </a:bodyPr>
+          <a:lstStyle/>
+          <a:p>
+            <a:pPr algn="l">
+              <a:lnSpc>
+                <a:spcPct val="100000"/>
+              </a:lnSpc>
+              <a:spcBef>
+                <a:spcPts val="0"/>
+              </a:spcBef>
+              <a:spcAft>
+                <a:spcPts val="600"/>
+              </a:spcAft>
+            </a:pPr>
+            <a:r>
+              <a:rPr sz="950" b="0" i="0" spc="160">
+                <a:solidFill>
+                  <a:srgbClr val="6B6863"/>
+                </a:solidFill>
+                <a:latin typeface="JetBrains Mono"/>
+              </a:rPr>
+              <a:t>METACARDIS · MILESTONE 1</a:t>
+            </a:r>
+          </a:p>
+        </p:txBody>
+      </p:sp>
+      <p:sp>
+        <p:nvSpPr>
+          <p:cNvPr id="5" name="TextBox 4"/>
+          <p:cNvSpPr txBox="1"/>
+          <p:nvPr/>
+        </p:nvSpPr>
+        <p:spPr>
+          <a:xfrm>
+            <a:off x="5928055" y="365760"/>
+            <a:ext cx="5486400" cy="274320"/>
+          </a:xfrm>
+          <a:prstGeom prst="rect">
+            <a:avLst/>
+          </a:prstGeom>
+          <a:noFill/>
+        </p:spPr>
+        <p:txBody>
+          <a:bodyPr wrap="square" anchor="t" lIns="0" rIns="0" tIns="0" bIns="0">
+            <a:spAutoFit/>
+          </a:bodyPr>
+          <a:lstStyle/>
+          <a:p>
+            <a:pPr algn="r">
+              <a:lnSpc>
+                <a:spcPct val="100000"/>
+              </a:lnSpc>
+              <a:spcBef>
+                <a:spcPts val="0"/>
+              </a:spcBef>
+              <a:spcAft>
+                <a:spcPts val="600"/>
+              </a:spcAft>
+            </a:pPr>
+            <a:r>
+              <a:rPr sz="950" b="0" i="0" spc="160">
+                <a:solidFill>
+                  <a:srgbClr val="6B6863"/>
+                </a:solidFill>
+                <a:latin typeface="JetBrains Mono"/>
+              </a:rPr>
+              <a:t>PIPELINE &amp; EVALUATION</a:t>
+            </a:r>
+          </a:p>
+        </p:txBody>
+      </p:sp>
+      <p:cxnSp>
+        <p:nvCxnSpPr>
+          <p:cNvPr id="6" name="Connector 5"/>
+          <p:cNvCxnSpPr/>
+          <p:nvPr/>
+        </p:nvCxnSpPr>
+        <p:spPr>
+          <a:xfrm>
+            <a:off x="777240" y="749808"/>
+            <a:ext cx="10637215" cy="0"/>
+          </a:xfrm>
+          <a:prstGeom prst="bentConnector3">
+            <a:avLst/>
+          </a:prstGeom>
+          <a:ln w="12700">
+            <a:solidFill>
+              <a:srgbClr val="DAD7CF"/>
+            </a:solidFill>
+          </a:ln>
+        </p:spPr>
+        <p:style>
+          <a:lnRef idx="2">
+            <a:schemeClr val="accent1"/>
+          </a:lnRef>
+          <a:fillRef idx="0">
+            <a:schemeClr val="accent1"/>
+          </a:fillRef>
+          <a:effectRef idx="1">
+            <a:schemeClr val="accent1"/>
+          </a:effectRef>
+          <a:fontRef idx="minor">
+            <a:schemeClr val="tx1"/>
+          </a:fontRef>
+        </p:style>
+      </p:cxnSp>
+      <p:cxnSp>
+        <p:nvCxnSpPr>
+          <p:cNvPr id="7" name="Connector 6"/>
+          <p:cNvCxnSpPr/>
+          <p:nvPr/>
+        </p:nvCxnSpPr>
+        <p:spPr>
+          <a:xfrm>
+            <a:off x="777240" y="6272784"/>
+            <a:ext cx="10637215" cy="0"/>
+          </a:xfrm>
+          <a:prstGeom prst="bentConnector3">
+            <a:avLst/>
+          </a:prstGeom>
+          <a:ln w="12700">
+            <a:solidFill>
+              <a:srgbClr val="DAD7CF"/>
+            </a:solidFill>
+          </a:ln>
+        </p:spPr>
+        <p:style>
+          <a:lnRef idx="2">
+            <a:schemeClr val="accent1"/>
+          </a:lnRef>
+          <a:fillRef idx="0">
+            <a:schemeClr val="accent1"/>
+          </a:fillRef>
+          <a:effectRef idx="1">
+            <a:schemeClr val="accent1"/>
+          </a:effectRef>
+          <a:fontRef idx="minor">
+            <a:schemeClr val="tx1"/>
+          </a:fontRef>
+        </p:style>
+      </p:cxnSp>
+      <p:sp>
+        <p:nvSpPr>
+          <p:cNvPr id="8" name="TextBox 7"/>
+          <p:cNvSpPr txBox="1"/>
+          <p:nvPr/>
+        </p:nvSpPr>
+        <p:spPr>
+          <a:xfrm>
+            <a:off x="777240" y="6355080"/>
+            <a:ext cx="6400800" cy="274320"/>
+          </a:xfrm>
+          <a:prstGeom prst="rect">
+            <a:avLst/>
+          </a:prstGeom>
+          <a:noFill/>
+        </p:spPr>
+        <p:txBody>
+          <a:bodyPr wrap="square" anchor="t" lIns="0" rIns="0" tIns="0" bIns="0">
+            <a:spAutoFit/>
+          </a:bodyPr>
+          <a:lstStyle/>
+          <a:p>
+            <a:pPr algn="l">
+              <a:lnSpc>
+                <a:spcPct val="100000"/>
+              </a:lnSpc>
+              <a:spcBef>
+                <a:spcPts val="0"/>
+              </a:spcBef>
+              <a:spcAft>
+                <a:spcPts val="600"/>
+              </a:spcAft>
+            </a:pPr>
+            <a:r>
+              <a:rPr sz="900" b="0" i="0" spc="140">
+                <a:solidFill>
+                  <a:srgbClr val="6B6863"/>
+                </a:solidFill>
+                <a:latin typeface="JetBrains Mono"/>
+              </a:rPr>
+              <a:t>COMPUTATIONAL MICROBIOME WORKSHOP</a:t>
+            </a:r>
+          </a:p>
+        </p:txBody>
+      </p:sp>
+      <p:sp>
+        <p:nvSpPr>
+          <p:cNvPr id="9" name="TextBox 8"/>
+          <p:cNvSpPr txBox="1"/>
+          <p:nvPr/>
+        </p:nvSpPr>
+        <p:spPr>
+          <a:xfrm>
+            <a:off x="8671255" y="6355080"/>
+            <a:ext cx="2743200" cy="274320"/>
+          </a:xfrm>
+          <a:prstGeom prst="rect">
+            <a:avLst/>
+          </a:prstGeom>
+          <a:noFill/>
+        </p:spPr>
+        <p:txBody>
+          <a:bodyPr wrap="square" anchor="t" lIns="0" rIns="0" tIns="0" bIns="0">
+            <a:spAutoFit/>
+          </a:bodyPr>
+          <a:lstStyle/>
+          <a:p>
+            <a:pPr algn="r">
+              <a:lnSpc>
+                <a:spcPct val="100000"/>
+              </a:lnSpc>
+              <a:spcBef>
+                <a:spcPts val="0"/>
+              </a:spcBef>
+              <a:spcAft>
+                <a:spcPts val="600"/>
+              </a:spcAft>
+            </a:pPr>
+            <a:r>
+              <a:rPr sz="900" b="0" i="0" spc="140">
+                <a:solidFill>
+                  <a:srgbClr val="6B6863"/>
+                </a:solidFill>
+                <a:latin typeface="JetBrains Mono"/>
+              </a:rPr>
+              <a:t>14 / 16</a:t>
+            </a:r>
+          </a:p>
+        </p:txBody>
+      </p:sp>
+      <p:sp>
+        <p:nvSpPr>
+          <p:cNvPr id="10" name="TextBox 9"/>
+          <p:cNvSpPr txBox="1"/>
+          <p:nvPr/>
+        </p:nvSpPr>
+        <p:spPr>
+          <a:xfrm>
+            <a:off x="777240" y="1188720"/>
+            <a:ext cx="10058400" cy="320040"/>
+          </a:xfrm>
+          <a:prstGeom prst="rect">
+            <a:avLst/>
+          </a:prstGeom>
+          <a:noFill/>
+        </p:spPr>
+        <p:txBody>
+          <a:bodyPr wrap="square" anchor="t" lIns="0" rIns="0" tIns="0" bIns="0">
+            <a:spAutoFit/>
+          </a:bodyPr>
+          <a:lstStyle/>
+          <a:p>
+            <a:pPr algn="l">
+              <a:lnSpc>
+                <a:spcPct val="100000"/>
+              </a:lnSpc>
+              <a:spcBef>
+                <a:spcPts val="0"/>
+              </a:spcBef>
+              <a:spcAft>
+                <a:spcPts val="600"/>
+              </a:spcAft>
+            </a:pPr>
+            <a:r>
+              <a:rPr sz="1100" b="0" i="0" spc="180">
+                <a:solidFill>
+                  <a:srgbClr val="FF2D55"/>
+                </a:solidFill>
+                <a:latin typeface="JetBrains Mono"/>
+              </a:rPr>
+              <a:t>THE PLAN</a:t>
+            </a:r>
+          </a:p>
+        </p:txBody>
+      </p:sp>
+      <p:cxnSp>
+        <p:nvCxnSpPr>
+          <p:cNvPr id="11" name="Connector 10"/>
+          <p:cNvCxnSpPr/>
+          <p:nvPr/>
+        </p:nvCxnSpPr>
+        <p:spPr>
+          <a:xfrm>
+            <a:off x="5989320" y="1737360"/>
+            <a:ext cx="0" cy="4206240"/>
+          </a:xfrm>
+          <a:prstGeom prst="bentConnector3">
+            <a:avLst/>
+          </a:prstGeom>
+          <a:ln w="12700">
+            <a:solidFill>
+              <a:srgbClr val="DAD7CF"/>
+            </a:solidFill>
+          </a:ln>
+        </p:spPr>
+        <p:style>
+          <a:lnRef idx="2">
+            <a:schemeClr val="accent1"/>
+          </a:lnRef>
+          <a:fillRef idx="0">
+            <a:schemeClr val="accent1"/>
+          </a:fillRef>
+          <a:effectRef idx="1">
+            <a:schemeClr val="accent1"/>
+          </a:effectRef>
+          <a:fontRef idx="minor">
+            <a:schemeClr val="tx1"/>
+          </a:fontRef>
+        </p:style>
+      </p:cxnSp>
+      <p:sp>
+        <p:nvSpPr>
+          <p:cNvPr id="12" name="TextBox 11"/>
+          <p:cNvSpPr txBox="1"/>
+          <p:nvPr/>
+        </p:nvSpPr>
+        <p:spPr>
+          <a:xfrm>
+            <a:off x="777240" y="1737360"/>
+            <a:ext cx="4846320" cy="365760"/>
+          </a:xfrm>
+          <a:prstGeom prst="rect">
+            <a:avLst/>
+          </a:prstGeom>
+          <a:noFill/>
+        </p:spPr>
+        <p:txBody>
+          <a:bodyPr wrap="square" anchor="t" lIns="0" rIns="0" tIns="0" bIns="0">
+            <a:spAutoFit/>
+          </a:bodyPr>
+          <a:lstStyle/>
+          <a:p>
+            <a:pPr algn="l">
+              <a:lnSpc>
+                <a:spcPct val="100000"/>
+              </a:lnSpc>
+              <a:spcBef>
+                <a:spcPts val="0"/>
+              </a:spcBef>
+              <a:spcAft>
+                <a:spcPts val="600"/>
+              </a:spcAft>
+            </a:pPr>
+            <a:r>
+              <a:rPr sz="1100" b="1" i="0" spc="160">
+                <a:solidFill>
+                  <a:srgbClr val="FF2D55"/>
+                </a:solidFill>
+                <a:latin typeface="JetBrains Mono"/>
+              </a:rPr>
+              <a:t>PIPELINE</a:t>
+            </a:r>
+          </a:p>
+        </p:txBody>
+      </p:sp>
+      <p:cxnSp>
+        <p:nvCxnSpPr>
+          <p:cNvPr id="13" name="Connector 12"/>
+          <p:cNvCxnSpPr/>
+          <p:nvPr/>
+        </p:nvCxnSpPr>
+        <p:spPr>
+          <a:xfrm>
+            <a:off x="777240" y="2121408"/>
+            <a:ext cx="4846319" cy="0"/>
+          </a:xfrm>
+          <a:prstGeom prst="bentConnector3">
+            <a:avLst/>
+          </a:prstGeom>
+          <a:ln w="12700">
+            <a:solidFill>
+              <a:srgbClr val="DAD7CF"/>
+            </a:solidFill>
+          </a:ln>
+        </p:spPr>
+        <p:style>
+          <a:lnRef idx="2">
+            <a:schemeClr val="accent1"/>
+          </a:lnRef>
+          <a:fillRef idx="0">
+            <a:schemeClr val="accent1"/>
+          </a:fillRef>
+          <a:effectRef idx="1">
+            <a:schemeClr val="accent1"/>
+          </a:effectRef>
+          <a:fontRef idx="minor">
+            <a:schemeClr val="tx1"/>
+          </a:fontRef>
+        </p:style>
+      </p:cxnSp>
+      <p:sp>
+        <p:nvSpPr>
+          <p:cNvPr id="14" name="TextBox 13"/>
+          <p:cNvSpPr txBox="1"/>
+          <p:nvPr/>
+        </p:nvSpPr>
+        <p:spPr>
+          <a:xfrm>
+            <a:off x="777240" y="2286000"/>
+            <a:ext cx="4846320" cy="3474720"/>
+          </a:xfrm>
+          <a:prstGeom prst="rect">
+            <a:avLst/>
+          </a:prstGeom>
+          <a:noFill/>
+        </p:spPr>
+        <p:txBody>
+          <a:bodyPr wrap="square" anchor="t" lIns="0" rIns="0" tIns="0" bIns="0">
+            <a:spAutoFit/>
+          </a:bodyPr>
+          <a:lstStyle/>
+          <a:p>
+            <a:pPr algn="l">
+              <a:lnSpc>
+                <a:spcPct val="128000"/>
+              </a:lnSpc>
+              <a:spcBef>
+                <a:spcPts val="0"/>
+              </a:spcBef>
+              <a:spcAft>
+                <a:spcPts val="900"/>
+              </a:spcAft>
+            </a:pPr>
+            <a:r>
+              <a:rPr sz="1300" b="0" i="0">
+                <a:solidFill>
+                  <a:srgbClr val="FF2D55"/>
+                </a:solidFill>
+                <a:latin typeface="Space Grotesk"/>
+              </a:rPr>
+              <a:t>— </a:t>
+            </a:r>
+            <a:r>
+              <a:rPr sz="1300" b="0" i="0">
+                <a:solidFill>
+                  <a:srgbClr val="1C1B19"/>
+                </a:solidFill>
+                <a:latin typeface="Space Grotesk"/>
+              </a:rPr>
+              <a:t>CLR(microbiome), log1p+standardise(metabolome); scaler &amp; PCA fit on </a:t>
+            </a:r>
+            <a:r>
+              <a:rPr sz="1300" b="1" i="0">
+                <a:solidFill>
+                  <a:srgbClr val="1C1B19"/>
+                </a:solidFill>
+                <a:latin typeface="Space Grotesk"/>
+              </a:rPr>
+              <a:t>train only</a:t>
+            </a:r>
+            <a:r>
+              <a:rPr sz="1300" b="0" i="0">
+                <a:solidFill>
+                  <a:srgbClr val="1C1B19"/>
+                </a:solidFill>
+                <a:latin typeface="Space Grotesk"/>
+              </a:rPr>
+              <a:t>.</a:t>
+            </a:r>
+          </a:p>
+          <a:p>
+            <a:pPr algn="l">
+              <a:lnSpc>
+                <a:spcPct val="128000"/>
+              </a:lnSpc>
+              <a:spcBef>
+                <a:spcPts val="0"/>
+              </a:spcBef>
+              <a:spcAft>
+                <a:spcPts val="900"/>
+              </a:spcAft>
+            </a:pPr>
+            <a:r>
+              <a:rPr sz="1300" b="0" i="0">
+                <a:solidFill>
+                  <a:srgbClr val="FF2D55"/>
+                </a:solidFill>
+                <a:latin typeface="Space Grotesk"/>
+              </a:rPr>
+              <a:t>— </a:t>
+            </a:r>
+            <a:r>
+              <a:rPr sz="1300" b="0" i="0">
+                <a:solidFill>
+                  <a:srgbClr val="1C1B19"/>
+                </a:solidFill>
+                <a:latin typeface="Space Grotesk"/>
+              </a:rPr>
+              <a:t>Core: AGW-OT and CM-Harmonic-Aniso vs. the baseline ladder.</a:t>
+            </a:r>
+          </a:p>
+          <a:p>
+            <a:pPr algn="l">
+              <a:lnSpc>
+                <a:spcPct val="128000"/>
+              </a:lnSpc>
+              <a:spcBef>
+                <a:spcPts val="0"/>
+              </a:spcBef>
+              <a:spcAft>
+                <a:spcPts val="900"/>
+              </a:spcAft>
+            </a:pPr>
+            <a:r>
+              <a:rPr sz="1300" b="0" i="0">
+                <a:solidFill>
+                  <a:srgbClr val="FF2D55"/>
+                </a:solidFill>
+                <a:latin typeface="Space Grotesk"/>
+              </a:rPr>
+              <a:t>— </a:t>
+            </a:r>
+            <a:r>
+              <a:rPr sz="1300" b="0" i="0">
+                <a:solidFill>
+                  <a:srgbClr val="1C1B19"/>
+                </a:solidFill>
+                <a:latin typeface="Space Grotesk"/>
+              </a:rPr>
+              <a:t>Ablations: ProMA (info-geometry floor) and DLB (diffusion-kernel check) to test what anchoring buys.</a:t>
+            </a:r>
+          </a:p>
+          <a:p>
+            <a:pPr algn="l">
+              <a:lnSpc>
+                <a:spcPct val="128000"/>
+              </a:lnSpc>
+              <a:spcBef>
+                <a:spcPts val="0"/>
+              </a:spcBef>
+              <a:spcAft>
+                <a:spcPts val="900"/>
+              </a:spcAft>
+            </a:pPr>
+            <a:r>
+              <a:rPr sz="1300" b="0" i="0">
+                <a:solidFill>
+                  <a:srgbClr val="FF2D55"/>
+                </a:solidFill>
+                <a:latin typeface="Space Grotesk"/>
+              </a:rPr>
+              <a:t>— </a:t>
+            </a:r>
+            <a:r>
+              <a:rPr sz="1300" b="0" i="0">
+                <a:solidFill>
+                  <a:srgbClr val="1C1B19"/>
+                </a:solidFill>
+                <a:latin typeface="Space Grotesk"/>
+              </a:rPr>
+              <a:t>Baseline ladder: mean / KNN / RF / PLS→frozen-PCA.</a:t>
+            </a:r>
+          </a:p>
+        </p:txBody>
+      </p:sp>
+      <p:sp>
+        <p:nvSpPr>
+          <p:cNvPr id="15" name="TextBox 14"/>
+          <p:cNvSpPr txBox="1"/>
+          <p:nvPr/>
+        </p:nvSpPr>
+        <p:spPr>
+          <a:xfrm>
+            <a:off x="6309360" y="1737360"/>
+            <a:ext cx="4937760" cy="365760"/>
+          </a:xfrm>
+          <a:prstGeom prst="rect">
+            <a:avLst/>
+          </a:prstGeom>
+          <a:noFill/>
+        </p:spPr>
+        <p:txBody>
+          <a:bodyPr wrap="square" anchor="t" lIns="0" rIns="0" tIns="0" bIns="0">
+            <a:spAutoFit/>
+          </a:bodyPr>
+          <a:lstStyle/>
+          <a:p>
+            <a:pPr algn="l">
+              <a:lnSpc>
+                <a:spcPct val="100000"/>
+              </a:lnSpc>
+              <a:spcBef>
+                <a:spcPts val="0"/>
+              </a:spcBef>
+              <a:spcAft>
+                <a:spcPts val="600"/>
+              </a:spcAft>
+            </a:pPr>
+            <a:r>
+              <a:rPr sz="1100" b="1" i="0" spc="160">
+                <a:solidFill>
+                  <a:srgbClr val="FF2D55"/>
+                </a:solidFill>
+                <a:latin typeface="JetBrains Mono"/>
+              </a:rPr>
+              <a:t>EVALUATION</a:t>
+            </a:r>
+          </a:p>
+        </p:txBody>
+      </p:sp>
+      <p:cxnSp>
+        <p:nvCxnSpPr>
+          <p:cNvPr id="16" name="Connector 15"/>
+          <p:cNvCxnSpPr/>
+          <p:nvPr/>
+        </p:nvCxnSpPr>
+        <p:spPr>
+          <a:xfrm>
+            <a:off x="6309360" y="2121408"/>
+            <a:ext cx="4846320" cy="0"/>
+          </a:xfrm>
+          <a:prstGeom prst="bentConnector3">
+            <a:avLst/>
+          </a:prstGeom>
+          <a:ln w="12700">
+            <a:solidFill>
+              <a:srgbClr val="DAD7CF"/>
+            </a:solidFill>
+          </a:ln>
+        </p:spPr>
+        <p:style>
+          <a:lnRef idx="2">
+            <a:schemeClr val="accent1"/>
+          </a:lnRef>
+          <a:fillRef idx="0">
+            <a:schemeClr val="accent1"/>
+          </a:fillRef>
+          <a:effectRef idx="1">
+            <a:schemeClr val="accent1"/>
+          </a:effectRef>
+          <a:fontRef idx="minor">
+            <a:schemeClr val="tx1"/>
+          </a:fontRef>
+        </p:style>
+      </p:cxnSp>
+      <p:sp>
+        <p:nvSpPr>
+          <p:cNvPr id="17" name="TextBox 16"/>
+          <p:cNvSpPr txBox="1"/>
+          <p:nvPr/>
+        </p:nvSpPr>
+        <p:spPr>
+          <a:xfrm>
+            <a:off x="6309360" y="2286000"/>
+            <a:ext cx="5029200" cy="3474720"/>
+          </a:xfrm>
+          <a:prstGeom prst="rect">
+            <a:avLst/>
+          </a:prstGeom>
+          <a:noFill/>
+        </p:spPr>
+        <p:txBody>
+          <a:bodyPr wrap="square" anchor="t" lIns="0" rIns="0" tIns="0" bIns="0">
+            <a:spAutoFit/>
+          </a:bodyPr>
+          <a:lstStyle/>
+          <a:p>
+            <a:pPr algn="l">
+              <a:lnSpc>
+                <a:spcPct val="128000"/>
+              </a:lnSpc>
+              <a:spcBef>
+                <a:spcPts val="0"/>
+              </a:spcBef>
+              <a:spcAft>
+                <a:spcPts val="900"/>
+              </a:spcAft>
+            </a:pPr>
+            <a:r>
+              <a:rPr sz="1300" b="0" i="0">
+                <a:solidFill>
+                  <a:srgbClr val="FF2D55"/>
+                </a:solidFill>
+                <a:latin typeface="Space Grotesk"/>
+              </a:rPr>
+              <a:t>— </a:t>
+            </a:r>
+            <a:r>
+              <a:rPr sz="1300" b="0" i="0">
+                <a:solidFill>
+                  <a:srgbClr val="1C1B19"/>
+                </a:solidFill>
+                <a:latin typeface="Space Grotesk"/>
+              </a:rPr>
+              <a:t>Mantel r vs. PCA-2PC ground truth (reproduce the grader exactly).</a:t>
+            </a:r>
+          </a:p>
+          <a:p>
+            <a:pPr algn="l">
+              <a:lnSpc>
+                <a:spcPct val="128000"/>
+              </a:lnSpc>
+              <a:spcBef>
+                <a:spcPts val="0"/>
+              </a:spcBef>
+              <a:spcAft>
+                <a:spcPts val="900"/>
+              </a:spcAft>
+            </a:pPr>
+            <a:r>
+              <a:rPr sz="1300" b="0" i="0">
+                <a:solidFill>
+                  <a:srgbClr val="FF2D55"/>
+                </a:solidFill>
+                <a:latin typeface="Space Grotesk"/>
+              </a:rPr>
+              <a:t>— </a:t>
+            </a:r>
+            <a:r>
+              <a:rPr sz="1300" b="0" i="0">
+                <a:solidFill>
+                  <a:srgbClr val="1C1B19"/>
+                </a:solidFill>
+                <a:latin typeface="Space Grotesk"/>
+              </a:rPr>
+              <a:t>Sweep missing-% = 10/30/50, </a:t>
+            </a:r>
+            <a:r>
+              <a:rPr sz="1300" b="1" i="0">
+                <a:solidFill>
+                  <a:srgbClr val="1C1B19"/>
+                </a:solidFill>
+                <a:latin typeface="Space Grotesk"/>
+              </a:rPr>
+              <a:t>both directions</a:t>
+            </a:r>
+            <a:r>
+              <a:rPr sz="1300" b="0" i="0">
+                <a:solidFill>
+                  <a:srgbClr val="1C1B19"/>
+                </a:solidFill>
+                <a:latin typeface="Space Grotesk"/>
+              </a:rPr>
+              <a:t>.</a:t>
+            </a:r>
+          </a:p>
+          <a:p>
+            <a:pPr algn="l">
+              <a:lnSpc>
+                <a:spcPct val="128000"/>
+              </a:lnSpc>
+              <a:spcBef>
+                <a:spcPts val="0"/>
+              </a:spcBef>
+              <a:spcAft>
+                <a:spcPts val="900"/>
+              </a:spcAft>
+            </a:pPr>
+            <a:r>
+              <a:rPr sz="1300" b="0" i="0">
+                <a:solidFill>
+                  <a:srgbClr val="FF2D55"/>
+                </a:solidFill>
+                <a:latin typeface="Space Grotesk"/>
+              </a:rPr>
+              <a:t>— </a:t>
+            </a:r>
+            <a:r>
+              <a:rPr sz="1300" b="1" i="0">
+                <a:solidFill>
+                  <a:srgbClr val="FF2D55"/>
+                </a:solidFill>
+                <a:latin typeface="Space Grotesk"/>
+              </a:rPr>
+              <a:t>Subject-grouped CV</a:t>
+            </a:r>
+            <a:r>
+              <a:rPr sz="1300" b="0" i="0">
+                <a:solidFill>
+                  <a:srgbClr val="1C1B19"/>
+                </a:solidFill>
+                <a:latin typeface="Space Grotesk"/>
+              </a:rPr>
+              <a:t> — distance pairs are non-iid; no leakage.</a:t>
+            </a:r>
+          </a:p>
+          <a:p>
+            <a:pPr algn="l">
+              <a:lnSpc>
+                <a:spcPct val="128000"/>
+              </a:lnSpc>
+              <a:spcBef>
+                <a:spcPts val="0"/>
+              </a:spcBef>
+              <a:spcAft>
+                <a:spcPts val="900"/>
+              </a:spcAft>
+            </a:pPr>
+            <a:r>
+              <a:rPr sz="1300" b="0" i="0">
+                <a:solidFill>
+                  <a:srgbClr val="FF2D55"/>
+                </a:solidFill>
+                <a:latin typeface="Space Grotesk"/>
+              </a:rPr>
+              <a:t>— </a:t>
+            </a:r>
+            <a:r>
+              <a:rPr sz="1300" b="0" i="0">
+                <a:solidFill>
+                  <a:srgbClr val="1C1B19"/>
+                </a:solidFill>
+                <a:latin typeface="Space Grotesk"/>
+              </a:rPr>
+              <a:t>Report performance and runtime vs. the baseline.</a:t>
+            </a:r>
+          </a:p>
+        </p:txBody>
+      </p:sp>
+    </p:spTree>
+  </p:cSld>
+  <p:clrMapOvr>
+    <a:masterClrMapping/>
+  </p:clrMapOvr>
+</p:sld>
+</file>
+
+<file path=ppt/slides/slide15.xml><?xml version="1.0" encoding="utf-8"?>
+<p:sld xmlns:a="http://schemas.openxmlformats.org/drawingml/2006/main" xmlns:p="http://schemas.openxmlformats.org/presentationml/2006/main" xmlns:r="http://schemas.openxmlformats.org/officeDocument/2006/relationships">
+  <p:cSld>
+    <p:bg>
+      <p:bgPr>
+        <a:solidFill>
+          <a:srgbClr val="FAF9F6"/>
+        </a:solidFill>
+        <a:effectLst/>
+      </p:bgPr>
+    </p:bg>
+    <p:spTree>
+      <p:nvGrpSpPr>
+        <p:cNvPr id="1" name=""/>
+        <p:cNvGrpSpPr/>
+        <p:nvPr/>
+      </p:nvGrpSpPr>
+      <p:grpSpPr/>
+      <p:sp>
+        <p:nvSpPr>
+          <p:cNvPr id="2" name="Rectangle 1"/>
+          <p:cNvSpPr/>
+          <p:nvPr/>
+        </p:nvSpPr>
+        <p:spPr>
+          <a:xfrm>
+            <a:off x="777240" y="420624"/>
+            <a:ext cx="91440" cy="91440"/>
+          </a:xfrm>
+          <a:prstGeom prst="rect">
+            <a:avLst/>
+          </a:prstGeom>
+          <a:solidFill>
+            <a:srgbClr val="FF2D55"/>
+          </a:solidFill>
+          <a:ln>
+            <a:noFill/>
+          </a:ln>
+          <a:effectLst/>
+        </p:spPr>
+        <p:style>
+          <a:lnRef idx="1">
+            <a:schemeClr val="accent1"/>
+          </a:lnRef>
+          <a:fillRef idx="3">
+            <a:schemeClr val="accent1"/>
+          </a:fillRef>
+          <a:effectRef idx="2">
+            <a:schemeClr val="accent1"/>
+          </a:effectRef>
+          <a:fontRef idx="minor">
+            <a:schemeClr val="lt1"/>
+          </a:fontRef>
+        </p:style>
+        <p:txBody>
+          <a:bodyPr rtlCol="0" anchor="ctr"/>
+          <a:lstStyle/>
+          <a:p>
+            <a:pPr algn="ctr"/>
+          </a:p>
+        </p:txBody>
+      </p:sp>
+      <p:sp>
+        <p:nvSpPr>
+          <p:cNvPr id="3" name="TextBox 2"/>
+          <p:cNvSpPr txBox="1"/>
+          <p:nvPr/>
+        </p:nvSpPr>
+        <p:spPr>
+          <a:xfrm>
+            <a:off x="978408" y="365760"/>
+            <a:ext cx="6400800" cy="274320"/>
+          </a:xfrm>
+          <a:prstGeom prst="rect">
+            <a:avLst/>
+          </a:prstGeom>
+          <a:noFill/>
+        </p:spPr>
+        <p:txBody>
+          <a:bodyPr wrap="square" anchor="t" lIns="0" rIns="0" tIns="0" bIns="0">
+            <a:spAutoFit/>
+          </a:bodyPr>
+          <a:lstStyle/>
+          <a:p>
+            <a:pPr algn="l">
+              <a:lnSpc>
+                <a:spcPct val="100000"/>
+              </a:lnSpc>
+              <a:spcBef>
+                <a:spcPts val="0"/>
+              </a:spcBef>
+              <a:spcAft>
+                <a:spcPts val="600"/>
+              </a:spcAft>
+            </a:pPr>
+            <a:r>
+              <a:rPr sz="950" b="0" i="0" spc="160">
+                <a:solidFill>
+                  <a:srgbClr val="6B6863"/>
+                </a:solidFill>
+                <a:latin typeface="JetBrains Mono"/>
+              </a:rPr>
+              <a:t>METACARDIS · MILESTONE 1</a:t>
+            </a:r>
+          </a:p>
+        </p:txBody>
+      </p:sp>
+      <p:sp>
+        <p:nvSpPr>
+          <p:cNvPr id="4" name="TextBox 3"/>
+          <p:cNvSpPr txBox="1"/>
+          <p:nvPr/>
+        </p:nvSpPr>
+        <p:spPr>
+          <a:xfrm>
+            <a:off x="5928055" y="365760"/>
+            <a:ext cx="5486400" cy="274320"/>
+          </a:xfrm>
+          <a:prstGeom prst="rect">
+            <a:avLst/>
+          </a:prstGeom>
+          <a:noFill/>
+        </p:spPr>
+        <p:txBody>
+          <a:bodyPr wrap="square" anchor="t" lIns="0" rIns="0" tIns="0" bIns="0">
+            <a:spAutoFit/>
+          </a:bodyPr>
+          <a:lstStyle/>
+          <a:p>
+            <a:pPr algn="r">
+              <a:lnSpc>
+                <a:spcPct val="100000"/>
+              </a:lnSpc>
+              <a:spcBef>
+                <a:spcPts val="0"/>
+              </a:spcBef>
+              <a:spcAft>
+                <a:spcPts val="600"/>
+              </a:spcAft>
+            </a:pPr>
+            <a:r>
+              <a:rPr sz="950" b="0" i="0" spc="160">
+                <a:solidFill>
+                  <a:srgbClr val="6B6863"/>
+                </a:solidFill>
+                <a:latin typeface="JetBrains Mono"/>
+              </a:rPr>
+              <a:t>APPENDIX</a:t>
+            </a:r>
+          </a:p>
+        </p:txBody>
+      </p:sp>
+      <p:cxnSp>
+        <p:nvCxnSpPr>
+          <p:cNvPr id="5" name="Connector 4"/>
+          <p:cNvCxnSpPr/>
+          <p:nvPr/>
+        </p:nvCxnSpPr>
+        <p:spPr>
+          <a:xfrm>
+            <a:off x="777240" y="749808"/>
+            <a:ext cx="10637215" cy="0"/>
+          </a:xfrm>
+          <a:prstGeom prst="bentConnector3">
+            <a:avLst/>
+          </a:prstGeom>
+          <a:ln w="12700">
+            <a:solidFill>
+              <a:srgbClr val="DAD7CF"/>
+            </a:solidFill>
+          </a:ln>
+        </p:spPr>
+        <p:style>
+          <a:lnRef idx="2">
+            <a:schemeClr val="accent1"/>
+          </a:lnRef>
+          <a:fillRef idx="0">
+            <a:schemeClr val="accent1"/>
+          </a:fillRef>
+          <a:effectRef idx="1">
+            <a:schemeClr val="accent1"/>
+          </a:effectRef>
+          <a:fontRef idx="minor">
+            <a:schemeClr val="tx1"/>
+          </a:fontRef>
+        </p:style>
+      </p:cxnSp>
+      <p:cxnSp>
+        <p:nvCxnSpPr>
+          <p:cNvPr id="6" name="Connector 5"/>
+          <p:cNvCxnSpPr/>
+          <p:nvPr/>
+        </p:nvCxnSpPr>
+        <p:spPr>
+          <a:xfrm>
+            <a:off x="777240" y="6272784"/>
+            <a:ext cx="10637215" cy="0"/>
+          </a:xfrm>
+          <a:prstGeom prst="bentConnector3">
+            <a:avLst/>
+          </a:prstGeom>
+          <a:ln w="12700">
+            <a:solidFill>
+              <a:srgbClr val="DAD7CF"/>
+            </a:solidFill>
+          </a:ln>
+        </p:spPr>
+        <p:style>
+          <a:lnRef idx="2">
+            <a:schemeClr val="accent1"/>
+          </a:lnRef>
+          <a:fillRef idx="0">
+            <a:schemeClr val="accent1"/>
+          </a:fillRef>
+          <a:effectRef idx="1">
+            <a:schemeClr val="accent1"/>
+          </a:effectRef>
+          <a:fontRef idx="minor">
+            <a:schemeClr val="tx1"/>
+          </a:fontRef>
+        </p:style>
+      </p:cxnSp>
+      <p:sp>
+        <p:nvSpPr>
+          <p:cNvPr id="7" name="TextBox 6"/>
+          <p:cNvSpPr txBox="1"/>
+          <p:nvPr/>
+        </p:nvSpPr>
+        <p:spPr>
+          <a:xfrm>
+            <a:off x="777240" y="6355080"/>
+            <a:ext cx="6400800" cy="274320"/>
+          </a:xfrm>
+          <a:prstGeom prst="rect">
+            <a:avLst/>
+          </a:prstGeom>
+          <a:noFill/>
+        </p:spPr>
+        <p:txBody>
+          <a:bodyPr wrap="square" anchor="t" lIns="0" rIns="0" tIns="0" bIns="0">
+            <a:spAutoFit/>
+          </a:bodyPr>
+          <a:lstStyle/>
+          <a:p>
+            <a:pPr algn="l">
+              <a:lnSpc>
+                <a:spcPct val="100000"/>
+              </a:lnSpc>
+              <a:spcBef>
+                <a:spcPts val="0"/>
+              </a:spcBef>
+              <a:spcAft>
+                <a:spcPts val="600"/>
+              </a:spcAft>
+            </a:pPr>
+            <a:r>
+              <a:rPr sz="900" b="0" i="0" spc="140">
+                <a:solidFill>
+                  <a:srgbClr val="6B6863"/>
+                </a:solidFill>
+                <a:latin typeface="JetBrains Mono"/>
+              </a:rPr>
+              <a:t>COMPUTATIONAL MICROBIOME WORKSHOP</a:t>
+            </a:r>
+          </a:p>
+        </p:txBody>
+      </p:sp>
+      <p:sp>
+        <p:nvSpPr>
+          <p:cNvPr id="8" name="TextBox 7"/>
+          <p:cNvSpPr txBox="1"/>
+          <p:nvPr/>
+        </p:nvSpPr>
+        <p:spPr>
+          <a:xfrm>
+            <a:off x="8671255" y="6355080"/>
+            <a:ext cx="2743200" cy="274320"/>
+          </a:xfrm>
+          <a:prstGeom prst="rect">
+            <a:avLst/>
+          </a:prstGeom>
+          <a:noFill/>
+        </p:spPr>
+        <p:txBody>
+          <a:bodyPr wrap="square" anchor="t" lIns="0" rIns="0" tIns="0" bIns="0">
+            <a:spAutoFit/>
+          </a:bodyPr>
+          <a:lstStyle/>
+          <a:p>
+            <a:pPr algn="r">
+              <a:lnSpc>
+                <a:spcPct val="100000"/>
+              </a:lnSpc>
+              <a:spcBef>
+                <a:spcPts val="0"/>
+              </a:spcBef>
+              <a:spcAft>
+                <a:spcPts val="600"/>
+              </a:spcAft>
+            </a:pPr>
+            <a:r>
+              <a:rPr sz="900" b="0" i="0" spc="140">
+                <a:solidFill>
+                  <a:srgbClr val="6B6863"/>
+                </a:solidFill>
+                <a:latin typeface="JetBrains Mono"/>
+              </a:rPr>
+              <a:t>15 / 16</a:t>
+            </a:r>
+          </a:p>
+        </p:txBody>
+      </p:sp>
+      <p:sp>
+        <p:nvSpPr>
+          <p:cNvPr id="9" name="TextBox 8"/>
+          <p:cNvSpPr txBox="1"/>
+          <p:nvPr/>
+        </p:nvSpPr>
+        <p:spPr>
+          <a:xfrm>
+            <a:off x="777240" y="960120"/>
+            <a:ext cx="10058400" cy="320040"/>
+          </a:xfrm>
+          <a:prstGeom prst="rect">
+            <a:avLst/>
+          </a:prstGeom>
+          <a:noFill/>
+        </p:spPr>
+        <p:txBody>
+          <a:bodyPr wrap="square" anchor="t" lIns="0" rIns="0" tIns="0" bIns="0">
+            <a:spAutoFit/>
+          </a:bodyPr>
+          <a:lstStyle/>
+          <a:p>
+            <a:pPr algn="l">
+              <a:lnSpc>
+                <a:spcPct val="100000"/>
+              </a:lnSpc>
+              <a:spcBef>
+                <a:spcPts val="0"/>
+              </a:spcBef>
+              <a:spcAft>
+                <a:spcPts val="600"/>
+              </a:spcAft>
+            </a:pPr>
+            <a:r>
+              <a:rPr sz="1100" b="0" i="0" spc="180">
+                <a:solidFill>
+                  <a:srgbClr val="FF2D55"/>
+                </a:solidFill>
+                <a:latin typeface="JetBrains Mono"/>
+              </a:rPr>
+              <a:t>APPENDIX · SUPPORTING EXPLORATION</a:t>
+            </a:r>
+          </a:p>
+        </p:txBody>
+      </p:sp>
+      <p:pic>
+        <p:nvPicPr>
+          <p:cNvPr id="10" name="Picture 9" descr="06_between_group_distance.png"/>
+          <p:cNvPicPr>
+            <a:picLocks noChangeAspect="1"/>
+          </p:cNvPicPr>
+          <p:nvPr/>
+        </p:nvPicPr>
+        <p:blipFill>
+          <a:blip r:embed="rId2"/>
+          <a:stretch>
+            <a:fillRect/>
+          </a:stretch>
+        </p:blipFill>
+        <p:spPr>
+          <a:xfrm>
+            <a:off x="777240" y="1463040"/>
+            <a:ext cx="2987040" cy="2240280"/>
+          </a:xfrm>
+          <a:prstGeom prst="rect">
+            <a:avLst/>
+          </a:prstGeom>
+        </p:spPr>
+      </p:pic>
+      <p:pic>
+        <p:nvPicPr>
+          <p:cNvPr id="11" name="Picture 10" descr="08_metabolome_trends.png"/>
+          <p:cNvPicPr>
+            <a:picLocks noChangeAspect="1"/>
+          </p:cNvPicPr>
+          <p:nvPr/>
+        </p:nvPicPr>
+        <p:blipFill>
+          <a:blip r:embed="rId3"/>
+          <a:stretch>
+            <a:fillRect/>
+          </a:stretch>
+        </p:blipFill>
+        <p:spPr>
+          <a:xfrm>
+            <a:off x="6400800" y="1463040"/>
+            <a:ext cx="3360420" cy="2240280"/>
+          </a:xfrm>
+          <a:prstGeom prst="rect">
+            <a:avLst/>
+          </a:prstGeom>
+        </p:spPr>
+      </p:pic>
+      <p:pic>
+        <p:nvPicPr>
+          <p:cNvPr id="12" name="Picture 11" descr="03_alpha_diversity.png"/>
+          <p:cNvPicPr>
+            <a:picLocks noChangeAspect="1"/>
+          </p:cNvPicPr>
+          <p:nvPr/>
+        </p:nvPicPr>
+        <p:blipFill>
+          <a:blip r:embed="rId4"/>
+          <a:stretch>
+            <a:fillRect/>
+          </a:stretch>
+        </p:blipFill>
+        <p:spPr>
+          <a:xfrm>
+            <a:off x="777240" y="3977639"/>
+            <a:ext cx="4023360" cy="2011680"/>
+          </a:xfrm>
+          <a:prstGeom prst="rect">
+            <a:avLst/>
+          </a:prstGeom>
+        </p:spPr>
+      </p:pic>
+      <p:pic>
+        <p:nvPicPr>
+          <p:cNvPr id="13" name="Picture 12" descr="13_gender_by_group.png"/>
+          <p:cNvPicPr>
+            <a:picLocks noChangeAspect="1"/>
+          </p:cNvPicPr>
+          <p:nvPr/>
+        </p:nvPicPr>
+        <p:blipFill>
+          <a:blip r:embed="rId5"/>
+          <a:stretch>
+            <a:fillRect/>
+          </a:stretch>
+        </p:blipFill>
+        <p:spPr>
+          <a:xfrm>
+            <a:off x="6400800" y="3977639"/>
+            <a:ext cx="3868615" cy="2011680"/>
+          </a:xfrm>
+          <a:prstGeom prst="rect">
+            <a:avLst/>
+          </a:prstGeom>
+        </p:spPr>
+      </p:pic>
+      <p:sp>
+        <p:nvSpPr>
+          <p:cNvPr id="14" name="TextBox 13"/>
+          <p:cNvSpPr txBox="1"/>
+          <p:nvPr/>
+        </p:nvSpPr>
+        <p:spPr>
+          <a:xfrm>
+            <a:off x="777240" y="3767328"/>
+            <a:ext cx="5120640" cy="274320"/>
+          </a:xfrm>
+          <a:prstGeom prst="rect">
+            <a:avLst/>
+          </a:prstGeom>
+          <a:noFill/>
+        </p:spPr>
+        <p:txBody>
+          <a:bodyPr wrap="square" anchor="t" lIns="0" rIns="0" tIns="0" bIns="0">
+            <a:spAutoFit/>
+          </a:bodyPr>
+          <a:lstStyle/>
+          <a:p>
+            <a:pPr algn="l">
+              <a:lnSpc>
+                <a:spcPct val="100000"/>
+              </a:lnSpc>
+              <a:spcBef>
+                <a:spcPts val="0"/>
+              </a:spcBef>
+              <a:spcAft>
+                <a:spcPts val="600"/>
+              </a:spcAft>
+            </a:pPr>
+            <a:r>
+              <a:rPr sz="800" b="0" i="0" spc="60">
+                <a:solidFill>
+                  <a:srgbClr val="6B6863"/>
+                </a:solidFill>
+                <a:latin typeface="JetBrains Mono"/>
+              </a:rPr>
+              <a:t>AVG MICROBIOME DISTANCE BETWEEN GROUPS</a:t>
+            </a:r>
+          </a:p>
+        </p:txBody>
+      </p:sp>
+      <p:sp>
+        <p:nvSpPr>
+          <p:cNvPr id="15" name="TextBox 14"/>
+          <p:cNvSpPr txBox="1"/>
+          <p:nvPr/>
+        </p:nvSpPr>
+        <p:spPr>
+          <a:xfrm>
+            <a:off x="6400800" y="3767328"/>
+            <a:ext cx="5120640" cy="274320"/>
+          </a:xfrm>
+          <a:prstGeom prst="rect">
+            <a:avLst/>
+          </a:prstGeom>
+          <a:noFill/>
+        </p:spPr>
+        <p:txBody>
+          <a:bodyPr wrap="square" anchor="t" lIns="0" rIns="0" tIns="0" bIns="0">
+            <a:spAutoFit/>
+          </a:bodyPr>
+          <a:lstStyle/>
+          <a:p>
+            <a:pPr algn="l">
+              <a:lnSpc>
+                <a:spcPct val="100000"/>
+              </a:lnSpc>
+              <a:spcBef>
+                <a:spcPts val="0"/>
+              </a:spcBef>
+              <a:spcAft>
+                <a:spcPts val="600"/>
+              </a:spcAft>
+            </a:pPr>
+            <a:r>
+              <a:rPr sz="800" b="0" i="0" spc="60">
+                <a:solidFill>
+                  <a:srgbClr val="6B6863"/>
+                </a:solidFill>
+                <a:latin typeface="JetBrains Mono"/>
+              </a:rPr>
+              <a:t>METABOLITES ELEVATED / REDUCED BY GROUP</a:t>
+            </a:r>
+          </a:p>
+        </p:txBody>
+      </p:sp>
+      <p:sp>
+        <p:nvSpPr>
+          <p:cNvPr id="16" name="TextBox 15"/>
+          <p:cNvSpPr txBox="1"/>
+          <p:nvPr/>
+        </p:nvSpPr>
+        <p:spPr>
+          <a:xfrm>
+            <a:off x="777240" y="6053328"/>
+            <a:ext cx="5120640" cy="274320"/>
+          </a:xfrm>
+          <a:prstGeom prst="rect">
+            <a:avLst/>
+          </a:prstGeom>
+          <a:noFill/>
+        </p:spPr>
+        <p:txBody>
+          <a:bodyPr wrap="square" anchor="t" lIns="0" rIns="0" tIns="0" bIns="0">
+            <a:spAutoFit/>
+          </a:bodyPr>
+          <a:lstStyle/>
+          <a:p>
+            <a:pPr algn="l">
+              <a:lnSpc>
+                <a:spcPct val="100000"/>
+              </a:lnSpc>
+              <a:spcBef>
+                <a:spcPts val="0"/>
+              </a:spcBef>
+              <a:spcAft>
+                <a:spcPts val="600"/>
+              </a:spcAft>
+            </a:pPr>
+            <a:r>
+              <a:rPr sz="800" b="0" i="0" spc="60">
+                <a:solidFill>
+                  <a:srgbClr val="6B6863"/>
+                </a:solidFill>
+                <a:latin typeface="JetBrains Mono"/>
+              </a:rPr>
+              <a:t>SHANNON DIVERSITY BY GROUP</a:t>
+            </a:r>
+          </a:p>
+        </p:txBody>
+      </p:sp>
+      <p:sp>
+        <p:nvSpPr>
+          <p:cNvPr id="17" name="TextBox 16"/>
+          <p:cNvSpPr txBox="1"/>
+          <p:nvPr/>
+        </p:nvSpPr>
+        <p:spPr>
+          <a:xfrm>
+            <a:off x="6400800" y="6053328"/>
+            <a:ext cx="5120640" cy="274320"/>
+          </a:xfrm>
+          <a:prstGeom prst="rect">
+            <a:avLst/>
+          </a:prstGeom>
+          <a:noFill/>
+        </p:spPr>
+        <p:txBody>
+          <a:bodyPr wrap="square" anchor="t" lIns="0" rIns="0" tIns="0" bIns="0">
+            <a:spAutoFit/>
+          </a:bodyPr>
+          <a:lstStyle/>
+          <a:p>
+            <a:pPr algn="l">
+              <a:lnSpc>
+                <a:spcPct val="100000"/>
+              </a:lnSpc>
+              <a:spcBef>
+                <a:spcPts val="0"/>
+              </a:spcBef>
+              <a:spcAft>
+                <a:spcPts val="600"/>
+              </a:spcAft>
+            </a:pPr>
+            <a:r>
+              <a:rPr sz="800" b="0" i="0" spc="60">
+                <a:solidFill>
+                  <a:srgbClr val="6B6863"/>
+                </a:solidFill>
+                <a:latin typeface="JetBrains Mono"/>
+              </a:rPr>
+              <a:t>GENDER COMPOSITION BY GROUP</a:t>
+            </a:r>
+          </a:p>
+        </p:txBody>
+      </p:sp>
+    </p:spTree>
+  </p:cSld>
+  <p:clrMapOvr>
+    <a:masterClrMapping/>
+  </p:clrMapOvr>
+</p:sld>
+</file>
+
+<file path=ppt/slides/slide16.xml><?xml version="1.0" encoding="utf-8"?>
+<p:sld xmlns:a="http://schemas.openxmlformats.org/drawingml/2006/main" xmlns:p="http://schemas.openxmlformats.org/presentationml/2006/main" xmlns:r="http://schemas.openxmlformats.org/officeDocument/2006/relationships">
+  <p:cSld>
+    <p:bg>
+      <p:bgPr>
+        <a:solidFill>
+          <a:srgbClr val="FAF9F6"/>
+        </a:solidFill>
+        <a:effectLst/>
+      </p:bgPr>
+    </p:bg>
+    <p:spTree>
+      <p:nvGrpSpPr>
+        <p:cNvPr id="1" name=""/>
+        <p:cNvGrpSpPr/>
+        <p:nvPr/>
+      </p:nvGrpSpPr>
+      <p:grpSpPr/>
+      <p:sp>
+        <p:nvSpPr>
+          <p:cNvPr id="2" name="TextBox 1"/>
+          <p:cNvSpPr txBox="1"/>
+          <p:nvPr/>
+        </p:nvSpPr>
+        <p:spPr>
+          <a:xfrm>
+            <a:off x="7955279" y="-365760"/>
+            <a:ext cx="5120640" cy="3200400"/>
+          </a:xfrm>
+          <a:prstGeom prst="rect">
+            <a:avLst/>
+          </a:prstGeom>
+          <a:noFill/>
+        </p:spPr>
+        <p:txBody>
+          <a:bodyPr wrap="square" anchor="t" lIns="0" rIns="0" tIns="0" bIns="0">
+            <a:spAutoFit/>
+          </a:bodyPr>
+          <a:lstStyle/>
+          <a:p>
+            <a:pPr algn="r">
+              <a:lnSpc>
+                <a:spcPct val="100000"/>
+              </a:lnSpc>
+              <a:spcBef>
+                <a:spcPts val="0"/>
+              </a:spcBef>
+              <a:spcAft>
+                <a:spcPts val="600"/>
+              </a:spcAft>
+            </a:pPr>
+            <a:r>
+              <a:rPr sz="25000" b="1" i="0">
+                <a:solidFill>
+                  <a:srgbClr val="F1C9D2"/>
+                </a:solidFill>
+                <a:latin typeface="Space Grotesk"/>
+              </a:rPr>
+              <a:t>16</a:t>
+            </a:r>
+          </a:p>
+        </p:txBody>
+      </p:sp>
+      <p:sp>
+        <p:nvSpPr>
+          <p:cNvPr id="3" name="Rectangle 2"/>
+          <p:cNvSpPr/>
+          <p:nvPr/>
+        </p:nvSpPr>
+        <p:spPr>
+          <a:xfrm>
+            <a:off x="777240" y="420624"/>
+            <a:ext cx="91440" cy="91440"/>
+          </a:xfrm>
+          <a:prstGeom prst="rect">
+            <a:avLst/>
+          </a:prstGeom>
+          <a:solidFill>
+            <a:srgbClr val="FF2D55"/>
+          </a:solidFill>
+          <a:ln>
+            <a:noFill/>
+          </a:ln>
+          <a:effectLst/>
+        </p:spPr>
+        <p:style>
+          <a:lnRef idx="1">
+            <a:schemeClr val="accent1"/>
+          </a:lnRef>
+          <a:fillRef idx="3">
+            <a:schemeClr val="accent1"/>
+          </a:fillRef>
+          <a:effectRef idx="2">
+            <a:schemeClr val="accent1"/>
+          </a:effectRef>
+          <a:fontRef idx="minor">
+            <a:schemeClr val="lt1"/>
+          </a:fontRef>
+        </p:style>
+        <p:txBody>
+          <a:bodyPr rtlCol="0" anchor="ctr"/>
+          <a:lstStyle/>
+          <a:p>
+            <a:pPr algn="ctr"/>
+          </a:p>
+        </p:txBody>
+      </p:sp>
+      <p:sp>
+        <p:nvSpPr>
+          <p:cNvPr id="4" name="TextBox 3"/>
+          <p:cNvSpPr txBox="1"/>
+          <p:nvPr/>
+        </p:nvSpPr>
+        <p:spPr>
+          <a:xfrm>
+            <a:off x="978408" y="365760"/>
+            <a:ext cx="6400800" cy="274320"/>
+          </a:xfrm>
+          <a:prstGeom prst="rect">
+            <a:avLst/>
+          </a:prstGeom>
+          <a:noFill/>
+        </p:spPr>
+        <p:txBody>
+          <a:bodyPr wrap="square" anchor="t" lIns="0" rIns="0" tIns="0" bIns="0">
+            <a:spAutoFit/>
+          </a:bodyPr>
+          <a:lstStyle/>
+          <a:p>
+            <a:pPr algn="l">
+              <a:lnSpc>
+                <a:spcPct val="100000"/>
+              </a:lnSpc>
+              <a:spcBef>
+                <a:spcPts val="0"/>
+              </a:spcBef>
+              <a:spcAft>
+                <a:spcPts val="600"/>
+              </a:spcAft>
+            </a:pPr>
+            <a:r>
+              <a:rPr sz="950" b="0" i="0" spc="160">
+                <a:solidFill>
+                  <a:srgbClr val="6B6863"/>
+                </a:solidFill>
+                <a:latin typeface="JetBrains Mono"/>
+              </a:rPr>
+              <a:t>METACARDIS · MILESTONE 1</a:t>
+            </a:r>
+          </a:p>
+        </p:txBody>
+      </p:sp>
+      <p:cxnSp>
+        <p:nvCxnSpPr>
+          <p:cNvPr id="5" name="Connector 4"/>
+          <p:cNvCxnSpPr/>
+          <p:nvPr/>
+        </p:nvCxnSpPr>
+        <p:spPr>
+          <a:xfrm>
+            <a:off x="777240" y="749808"/>
+            <a:ext cx="10637215" cy="0"/>
+          </a:xfrm>
+          <a:prstGeom prst="bentConnector3">
+            <a:avLst/>
+          </a:prstGeom>
+          <a:ln w="12700">
+            <a:solidFill>
+              <a:srgbClr val="DAD7CF"/>
+            </a:solidFill>
+          </a:ln>
+        </p:spPr>
+        <p:style>
+          <a:lnRef idx="2">
+            <a:schemeClr val="accent1"/>
+          </a:lnRef>
+          <a:fillRef idx="0">
+            <a:schemeClr val="accent1"/>
+          </a:fillRef>
+          <a:effectRef idx="1">
+            <a:schemeClr val="accent1"/>
+          </a:effectRef>
+          <a:fontRef idx="minor">
+            <a:schemeClr val="tx1"/>
+          </a:fontRef>
+        </p:style>
+      </p:cxnSp>
+      <p:sp>
+        <p:nvSpPr>
+          <p:cNvPr id="6" name="TextBox 5"/>
+          <p:cNvSpPr txBox="1"/>
+          <p:nvPr/>
+        </p:nvSpPr>
+        <p:spPr>
+          <a:xfrm>
+            <a:off x="777240" y="2011680"/>
+            <a:ext cx="10058400" cy="320040"/>
+          </a:xfrm>
+          <a:prstGeom prst="rect">
+            <a:avLst/>
+          </a:prstGeom>
+          <a:noFill/>
+        </p:spPr>
+        <p:txBody>
+          <a:bodyPr wrap="square" anchor="t" lIns="0" rIns="0" tIns="0" bIns="0">
+            <a:spAutoFit/>
+          </a:bodyPr>
+          <a:lstStyle/>
+          <a:p>
+            <a:pPr algn="l">
+              <a:lnSpc>
+                <a:spcPct val="100000"/>
+              </a:lnSpc>
+              <a:spcBef>
+                <a:spcPts val="0"/>
+              </a:spcBef>
+              <a:spcAft>
+                <a:spcPts val="600"/>
+              </a:spcAft>
+            </a:pPr>
+            <a:r>
+              <a:rPr sz="1100" b="0" i="0" spc="180">
+                <a:solidFill>
+                  <a:srgbClr val="FF2D55"/>
+                </a:solidFill>
+                <a:latin typeface="JetBrains Mono"/>
+              </a:rPr>
+              <a:t>KEY CHALLENGES → NEXT STEPS</a:t>
+            </a:r>
+          </a:p>
+        </p:txBody>
+      </p:sp>
+      <p:sp>
+        <p:nvSpPr>
+          <p:cNvPr id="7" name="TextBox 6"/>
+          <p:cNvSpPr txBox="1"/>
+          <p:nvPr/>
+        </p:nvSpPr>
+        <p:spPr>
+          <a:xfrm>
+            <a:off x="777240" y="2468880"/>
+            <a:ext cx="10058400" cy="1645920"/>
+          </a:xfrm>
+          <a:prstGeom prst="rect">
+            <a:avLst/>
+          </a:prstGeom>
+          <a:noFill/>
+        </p:spPr>
+        <p:txBody>
+          <a:bodyPr wrap="square" anchor="t" lIns="0" rIns="0" tIns="0" bIns="0">
+            <a:spAutoFit/>
+          </a:bodyPr>
+          <a:lstStyle/>
+          <a:p>
+            <a:pPr algn="l">
+              <a:lnSpc>
+                <a:spcPct val="105000"/>
+              </a:lnSpc>
+              <a:spcBef>
+                <a:spcPts val="0"/>
+              </a:spcBef>
+              <a:spcAft>
+                <a:spcPts val="600"/>
+              </a:spcAft>
+            </a:pPr>
+            <a:r>
+              <a:rPr sz="3000" b="0" i="0">
+                <a:solidFill>
+                  <a:srgbClr val="0A0A0A"/>
+                </a:solidFill>
+                <a:latin typeface="Space Grotesk"/>
+              </a:rPr>
+              <a:t>Beat mean imputation by exploiting the </a:t>
+            </a:r>
+            <a:r>
+              <a:rPr sz="3000" b="1" i="0">
+                <a:solidFill>
+                  <a:srgbClr val="FF2D55"/>
+                </a:solidFill>
+                <a:latin typeface="Space Grotesk"/>
+              </a:rPr>
+              <a:t>predictable cross-modal subset</a:t>
+            </a:r>
+            <a:r>
+              <a:rPr sz="3000" b="0" i="0">
+                <a:solidFill>
+                  <a:srgbClr val="0A0A0A"/>
+                </a:solidFill>
+                <a:latin typeface="Space Grotesk"/>
+              </a:rPr>
+              <a:t> + the metabolome-only direction.</a:t>
+            </a:r>
+          </a:p>
+        </p:txBody>
+      </p:sp>
+      <p:sp>
+        <p:nvSpPr>
+          <p:cNvPr id="8" name="Rectangle 7"/>
+          <p:cNvSpPr/>
+          <p:nvPr/>
+        </p:nvSpPr>
+        <p:spPr>
+          <a:xfrm>
+            <a:off x="777240" y="4480560"/>
+            <a:ext cx="1051560" cy="45720"/>
+          </a:xfrm>
+          <a:prstGeom prst="rect">
+            <a:avLst/>
+          </a:prstGeom>
+          <a:solidFill>
+            <a:srgbClr val="FF2D55"/>
+          </a:solidFill>
+          <a:ln>
+            <a:noFill/>
+          </a:ln>
+          <a:effectLst/>
+        </p:spPr>
+        <p:style>
+          <a:lnRef idx="1">
+            <a:schemeClr val="accent1"/>
+          </a:lnRef>
+          <a:fillRef idx="3">
+            <a:schemeClr val="accent1"/>
+          </a:fillRef>
+          <a:effectRef idx="2">
+            <a:schemeClr val="accent1"/>
+          </a:effectRef>
+          <a:fontRef idx="minor">
+            <a:schemeClr val="lt1"/>
+          </a:fontRef>
+        </p:style>
+        <p:txBody>
+          <a:bodyPr rtlCol="0" anchor="ctr"/>
+          <a:lstStyle/>
+          <a:p>
+            <a:pPr algn="ctr"/>
+          </a:p>
+        </p:txBody>
+      </p:sp>
+      <p:sp>
+        <p:nvSpPr>
           <p:cNvPr id="9" name="TextBox 8"/>
           <p:cNvSpPr txBox="1"/>
           <p:nvPr/>
@@ -6170,7 +9229,7 @@
                 </a:solidFill>
                 <a:latin typeface="JetBrains Mono"/>
               </a:rPr>
-              <a:t>Next: implement AGW-OT + miss-SNF · full Mantel-vs-missing% sweep vs. the baseline ladder.</a:t>
+              <a:t>Next: implement AGW-OT + CM-Harmonic-Aniso · per-axis Mantel-vs-missing% sweep vs. the baseline ladder.</a:t>
             </a:r>
           </a:p>
         </p:txBody>
@@ -6535,7 +9594,7 @@
                 </a:solidFill>
                 <a:latin typeface="JetBrains Mono"/>
               </a:rPr>
-              <a:t>02 / 13</a:t>
+              <a:t>02 / 16</a:t>
             </a:r>
           </a:p>
         </p:txBody>
@@ -6549,7 +9608,7 @@
         <p:spPr>
           <a:xfrm>
             <a:off x="777240" y="1463040"/>
-            <a:ext cx="8229600" cy="320040"/>
+            <a:ext cx="10058400" cy="320040"/>
           </a:xfrm>
           <a:prstGeom prst="rect">
             <a:avLst/>
@@ -6797,52 +9856,7 @@
       <p:grpSpPr/>
       <p:sp>
         <p:nvSpPr>
-          <p:cNvPr id="2" name="TextBox 1"/>
-          <p:cNvSpPr txBox="1"/>
-          <p:nvPr/>
-        </p:nvSpPr>
-        <p:spPr>
-          <a:xfrm>
-            <a:off x="7955279" y="3657600"/>
-            <a:ext cx="5120640" cy="3566160"/>
-          </a:xfrm>
-          <a:prstGeom prst="rect">
-            <a:avLst/>
-          </a:prstGeom>
-          <a:noFill/>
-        </p:spPr>
-        <p:txBody>
-          <a:bodyPr wrap="square" anchor="t" lIns="0" rIns="0" tIns="0" bIns="0">
-            <a:spAutoFit/>
-          </a:bodyPr>
-          <a:lstStyle/>
-          <a:p>
-            <a:pPr algn="r">
-              <a:lnSpc>
-                <a:spcPct val="100000"/>
-              </a:lnSpc>
-              <a:spcBef>
-                <a:spcPts val="0"/>
-              </a:spcBef>
-              <a:spcAft>
-                <a:spcPts val="600"/>
-              </a:spcAft>
-            </a:pPr>
-            <a:r>
-              <a:rPr sz="25000" b="1" i="0">
-                <a:solidFill>
-                  <a:srgbClr val="F1C9D2"/>
-                </a:solidFill>
-                <a:latin typeface="Space Grotesk"/>
-              </a:rPr>
-              <a:t>03</a:t>
-            </a:r>
-          </a:p>
-        </p:txBody>
-      </p:sp>
-      <p:sp>
-        <p:nvSpPr>
-          <p:cNvPr id="3" name="Rectangle 2"/>
+          <p:cNvPr id="2" name="Rectangle 1"/>
           <p:cNvSpPr/>
           <p:nvPr/>
         </p:nvSpPr>
@@ -6886,7 +9900,7 @@
       </p:sp>
       <p:sp>
         <p:nvSpPr>
-          <p:cNvPr id="4" name="TextBox 3"/>
+          <p:cNvPr id="3" name="TextBox 2"/>
           <p:cNvSpPr txBox="1"/>
           <p:nvPr/>
         </p:nvSpPr>
@@ -6931,7 +9945,7 @@
       </p:sp>
       <p:sp>
         <p:nvSpPr>
-          <p:cNvPr id="5" name="TextBox 4"/>
+          <p:cNvPr id="4" name="TextBox 3"/>
           <p:cNvSpPr txBox="1"/>
           <p:nvPr/>
         </p:nvSpPr>
@@ -6976,7 +9990,7 @@
       </p:sp>
       <p:cxnSp>
         <p:nvCxnSpPr>
-          <p:cNvPr id="6" name="Connector 5"/>
+          <p:cNvPr id="5" name="Connector 4"/>
           <p:cNvCxnSpPr/>
           <p:nvPr/>
         </p:nvCxnSpPr>
@@ -7011,7 +10025,7 @@
       </p:cxnSp>
       <p:cxnSp>
         <p:nvCxnSpPr>
-          <p:cNvPr id="7" name="Connector 6"/>
+          <p:cNvPr id="6" name="Connector 5"/>
           <p:cNvCxnSpPr/>
           <p:nvPr/>
         </p:nvCxnSpPr>
@@ -7046,7 +10060,7 @@
       </p:cxnSp>
       <p:sp>
         <p:nvSpPr>
-          <p:cNvPr id="8" name="TextBox 7"/>
+          <p:cNvPr id="7" name="TextBox 6"/>
           <p:cNvSpPr txBox="1"/>
           <p:nvPr/>
         </p:nvSpPr>
@@ -7091,7 +10105,7 @@
       </p:sp>
       <p:sp>
         <p:nvSpPr>
-          <p:cNvPr id="9" name="TextBox 8"/>
+          <p:cNvPr id="8" name="TextBox 7"/>
           <p:cNvSpPr txBox="1"/>
           <p:nvPr/>
         </p:nvSpPr>
@@ -7129,7 +10143,52 @@
                 </a:solidFill>
                 <a:latin typeface="JetBrains Mono"/>
               </a:rPr>
-              <a:t>03 / 13</a:t>
+              <a:t>03 / 16</a:t>
+            </a:r>
+          </a:p>
+        </p:txBody>
+      </p:sp>
+      <p:sp>
+        <p:nvSpPr>
+          <p:cNvPr id="9" name="TextBox 8"/>
+          <p:cNvSpPr txBox="1"/>
+          <p:nvPr/>
+        </p:nvSpPr>
+        <p:spPr>
+          <a:xfrm>
+            <a:off x="777240" y="1005840"/>
+            <a:ext cx="10058400" cy="320040"/>
+          </a:xfrm>
+          <a:prstGeom prst="rect">
+            <a:avLst/>
+          </a:prstGeom>
+          <a:noFill/>
+        </p:spPr>
+        <p:txBody>
+          <a:bodyPr wrap="square" anchor="t" lIns="0" rIns="0" tIns="0" bIns="0">
+            <a:spAutoFit/>
+          </a:bodyPr>
+          <a:lstStyle/>
+          <a:p>
+            <a:pPr algn="l">
+              <a:lnSpc>
+                <a:spcPct val="100000"/>
+              </a:lnSpc>
+              <a:spcBef>
+                <a:spcPts val="0"/>
+              </a:spcBef>
+              <a:spcAft>
+                <a:spcPts val="600"/>
+              </a:spcAft>
+            </a:pPr>
+            <a:r>
+              <a:rPr sz="1100" b="0" i="0" spc="180">
+                <a:solidFill>
+                  <a:srgbClr val="FF2D55"/>
+                </a:solidFill>
+                <a:latin typeface="JetBrains Mono"/>
+              </a:rPr>
+              <a:t>THE DATA ALREADY CONTAINS THE CHALLENGE</a:t>
             </a:r>
           </a:p>
         </p:txBody>
@@ -7137,51 +10196,6 @@
       <p:sp>
         <p:nvSpPr>
           <p:cNvPr id="10" name="TextBox 9"/>
-          <p:cNvSpPr txBox="1"/>
-          <p:nvPr/>
-        </p:nvSpPr>
-        <p:spPr>
-          <a:xfrm>
-            <a:off x="777240" y="1005840"/>
-            <a:ext cx="8229600" cy="320040"/>
-          </a:xfrm>
-          <a:prstGeom prst="rect">
-            <a:avLst/>
-          </a:prstGeom>
-          <a:noFill/>
-        </p:spPr>
-        <p:txBody>
-          <a:bodyPr wrap="square" anchor="t" lIns="0" rIns="0" tIns="0" bIns="0">
-            <a:spAutoFit/>
-          </a:bodyPr>
-          <a:lstStyle/>
-          <a:p>
-            <a:pPr algn="l">
-              <a:lnSpc>
-                <a:spcPct val="100000"/>
-              </a:lnSpc>
-              <a:spcBef>
-                <a:spcPts val="0"/>
-              </a:spcBef>
-              <a:spcAft>
-                <a:spcPts val="600"/>
-              </a:spcAft>
-            </a:pPr>
-            <a:r>
-              <a:rPr sz="1100" b="0" i="0" spc="180">
-                <a:solidFill>
-                  <a:srgbClr val="FF2D55"/>
-                </a:solidFill>
-                <a:latin typeface="JetBrains Mono"/>
-              </a:rPr>
-              <a:t>THE DATA ALREADY CONTAINS THE CHALLENGE</a:t>
-            </a:r>
-          </a:p>
-        </p:txBody>
-      </p:sp>
-      <p:sp>
-        <p:nvSpPr>
-          <p:cNvPr id="11" name="TextBox 10"/>
           <p:cNvSpPr txBox="1"/>
           <p:nvPr/>
         </p:nvSpPr>
@@ -7226,7 +10240,7 @@
       </p:sp>
       <p:pic>
         <p:nvPicPr>
-          <p:cNvPr id="12" name="Picture 11" descr="01_overview.png"/>
+          <p:cNvPr id="11" name="Picture 10" descr="01_overview.png"/>
           <p:cNvPicPr>
             <a:picLocks noChangeAspect="1"/>
           </p:cNvPicPr>
@@ -7250,7 +10264,7 @@
       </p:pic>
       <p:cxnSp>
         <p:nvCxnSpPr>
-          <p:cNvPr id="13" name="Connector 12"/>
+          <p:cNvPr id="12" name="Connector 11"/>
           <p:cNvCxnSpPr/>
           <p:nvPr/>
         </p:nvCxnSpPr>
@@ -7285,7 +10299,7 @@
       </p:cxnSp>
       <p:sp>
         <p:nvSpPr>
-          <p:cNvPr id="14" name="TextBox 13"/>
+          <p:cNvPr id="13" name="TextBox 12"/>
           <p:cNvSpPr txBox="1"/>
           <p:nvPr/>
         </p:nvSpPr>
@@ -7330,7 +10344,7 @@
       </p:sp>
       <p:sp>
         <p:nvSpPr>
-          <p:cNvPr id="15" name="TextBox 14"/>
+          <p:cNvPr id="14" name="TextBox 13"/>
           <p:cNvSpPr txBox="1"/>
           <p:nvPr/>
         </p:nvSpPr>
@@ -7375,7 +10389,7 @@
       </p:sp>
       <p:sp>
         <p:nvSpPr>
-          <p:cNvPr id="16" name="TextBox 15"/>
+          <p:cNvPr id="15" name="TextBox 14"/>
           <p:cNvSpPr txBox="1"/>
           <p:nvPr/>
         </p:nvSpPr>
@@ -7420,7 +10434,7 @@
       </p:sp>
       <p:sp>
         <p:nvSpPr>
-          <p:cNvPr id="17" name="TextBox 16"/>
+          <p:cNvPr id="16" name="TextBox 15"/>
           <p:cNvSpPr txBox="1"/>
           <p:nvPr/>
         </p:nvSpPr>
@@ -7465,7 +10479,7 @@
       </p:sp>
       <p:sp>
         <p:nvSpPr>
-          <p:cNvPr id="18" name="TextBox 17"/>
+          <p:cNvPr id="17" name="TextBox 16"/>
           <p:cNvSpPr txBox="1"/>
           <p:nvPr/>
         </p:nvSpPr>
@@ -7510,7 +10524,7 @@
       </p:sp>
       <p:sp>
         <p:nvSpPr>
-          <p:cNvPr id="19" name="TextBox 18"/>
+          <p:cNvPr id="18" name="TextBox 17"/>
           <p:cNvSpPr txBox="1"/>
           <p:nvPr/>
         </p:nvSpPr>
@@ -7555,7 +10569,7 @@
       </p:sp>
       <p:sp>
         <p:nvSpPr>
-          <p:cNvPr id="20" name="TextBox 19"/>
+          <p:cNvPr id="19" name="TextBox 18"/>
           <p:cNvSpPr txBox="1"/>
           <p:nvPr/>
         </p:nvSpPr>
@@ -7618,7 +10632,7 @@
       </p:sp>
       <p:sp>
         <p:nvSpPr>
-          <p:cNvPr id="21" name="TextBox 20"/>
+          <p:cNvPr id="20" name="TextBox 19"/>
           <p:cNvSpPr txBox="1"/>
           <p:nvPr/>
         </p:nvSpPr>
@@ -7689,52 +10703,7 @@
       <p:grpSpPr/>
       <p:sp>
         <p:nvSpPr>
-          <p:cNvPr id="2" name="TextBox 1"/>
-          <p:cNvSpPr txBox="1"/>
-          <p:nvPr/>
-        </p:nvSpPr>
-        <p:spPr>
-          <a:xfrm>
-            <a:off x="7955279" y="3657600"/>
-            <a:ext cx="5120640" cy="3566160"/>
-          </a:xfrm>
-          <a:prstGeom prst="rect">
-            <a:avLst/>
-          </a:prstGeom>
-          <a:noFill/>
-        </p:spPr>
-        <p:txBody>
-          <a:bodyPr wrap="square" anchor="t" lIns="0" rIns="0" tIns="0" bIns="0">
-            <a:spAutoFit/>
-          </a:bodyPr>
-          <a:lstStyle/>
-          <a:p>
-            <a:pPr algn="r">
-              <a:lnSpc>
-                <a:spcPct val="100000"/>
-              </a:lnSpc>
-              <a:spcBef>
-                <a:spcPts val="0"/>
-              </a:spcBef>
-              <a:spcAft>
-                <a:spcPts val="600"/>
-              </a:spcAft>
-            </a:pPr>
-            <a:r>
-              <a:rPr sz="25000" b="1" i="0">
-                <a:solidFill>
-                  <a:srgbClr val="F1C9D2"/>
-                </a:solidFill>
-                <a:latin typeface="Space Grotesk"/>
-              </a:rPr>
-              <a:t>04</a:t>
-            </a:r>
-          </a:p>
-        </p:txBody>
-      </p:sp>
-      <p:sp>
-        <p:nvSpPr>
-          <p:cNvPr id="3" name="Rectangle 2"/>
+          <p:cNvPr id="2" name="Rectangle 1"/>
           <p:cNvSpPr/>
           <p:nvPr/>
         </p:nvSpPr>
@@ -7778,7 +10747,7 @@
       </p:sp>
       <p:sp>
         <p:nvSpPr>
-          <p:cNvPr id="4" name="TextBox 3"/>
+          <p:cNvPr id="3" name="TextBox 2"/>
           <p:cNvSpPr txBox="1"/>
           <p:nvPr/>
         </p:nvSpPr>
@@ -7823,7 +10792,7 @@
       </p:sp>
       <p:sp>
         <p:nvSpPr>
-          <p:cNvPr id="5" name="TextBox 4"/>
+          <p:cNvPr id="4" name="TextBox 3"/>
           <p:cNvSpPr txBox="1"/>
           <p:nvPr/>
         </p:nvSpPr>
@@ -7861,14 +10830,14 @@
                 </a:solidFill>
                 <a:latin typeface="JetBrains Mono"/>
               </a:rPr>
-              <a:t>EXPLORATION / MISSINGNESS</a:t>
+              <a:t>EXPLORATION / CONFOUNDERS</a:t>
             </a:r>
           </a:p>
         </p:txBody>
       </p:sp>
       <p:cxnSp>
         <p:nvCxnSpPr>
-          <p:cNvPr id="6" name="Connector 5"/>
+          <p:cNvPr id="5" name="Connector 4"/>
           <p:cNvCxnSpPr/>
           <p:nvPr/>
         </p:nvCxnSpPr>
@@ -7903,7 +10872,7 @@
       </p:cxnSp>
       <p:cxnSp>
         <p:nvCxnSpPr>
-          <p:cNvPr id="7" name="Connector 6"/>
+          <p:cNvPr id="6" name="Connector 5"/>
           <p:cNvCxnSpPr/>
           <p:nvPr/>
         </p:nvCxnSpPr>
@@ -7938,7 +10907,7 @@
       </p:cxnSp>
       <p:sp>
         <p:nvSpPr>
-          <p:cNvPr id="8" name="TextBox 7"/>
+          <p:cNvPr id="7" name="TextBox 6"/>
           <p:cNvSpPr txBox="1"/>
           <p:nvPr/>
         </p:nvSpPr>
@@ -7983,7 +10952,7 @@
       </p:sp>
       <p:sp>
         <p:nvSpPr>
-          <p:cNvPr id="9" name="TextBox 8"/>
+          <p:cNvPr id="8" name="TextBox 7"/>
           <p:cNvSpPr txBox="1"/>
           <p:nvPr/>
         </p:nvSpPr>
@@ -8021,21 +10990,21 @@
                 </a:solidFill>
                 <a:latin typeface="JetBrains Mono"/>
               </a:rPr>
-              <a:t>04 / 13</a:t>
-            </a:r>
-          </a:p>
-        </p:txBody>
-      </p:sp>
-      <p:sp>
-        <p:nvSpPr>
-          <p:cNvPr id="10" name="TextBox 9"/>
+              <a:t>04 / 16</a:t>
+            </a:r>
+          </a:p>
+        </p:txBody>
+      </p:sp>
+      <p:sp>
+        <p:nvSpPr>
+          <p:cNvPr id="9" name="TextBox 8"/>
           <p:cNvSpPr txBox="1"/>
           <p:nvPr/>
         </p:nvSpPr>
         <p:spPr>
           <a:xfrm>
             <a:off x="777240" y="1051560"/>
-            <a:ext cx="8229600" cy="320040"/>
+            <a:ext cx="10058400" cy="320040"/>
           </a:xfrm>
           <a:prstGeom prst="rect">
             <a:avLst/>
@@ -8066,14 +11035,14 @@
                 </a:solidFill>
                 <a:latin typeface="JetBrains Mono"/>
               </a:rPr>
-              <a:t>MISSINGNESS IS STRUCTURED, NOT RANDOM</a:t>
+              <a:t>DEMOGRAPHICS DIFFER SHARPLY BETWEEN DISEASE GROUPS</a:t>
             </a:r>
           </a:p>
         </p:txBody>
       </p:sp>
       <p:pic>
         <p:nvPicPr>
-          <p:cNvPr id="11" name="Picture 10" descr="02_missing_by_center.png"/>
+          <p:cNvPr id="10" name="Picture 9" descr="10_age_bmi_by_group.png"/>
           <p:cNvPicPr>
             <a:picLocks noChangeAspect="1"/>
           </p:cNvPicPr>
@@ -8087,8 +11056,8 @@
         </p:blipFill>
         <p:spPr>
           <a:xfrm>
-            <a:off x="777240" y="1737360"/>
-            <a:ext cx="6035040" cy="3448594"/>
+            <a:off x="777240" y="1600200"/>
+            <a:ext cx="10634472" cy="3686617"/>
           </a:xfrm>
           <a:prstGeom prst="rect">
             <a:avLst/>
@@ -8097,14 +11066,14 @@
       </p:pic>
       <p:sp>
         <p:nvSpPr>
-          <p:cNvPr id="12" name="TextBox 11"/>
-          <p:cNvSpPr txBox="1"/>
-          <p:nvPr/>
-        </p:nvSpPr>
-        <p:spPr>
-          <a:xfrm>
-            <a:off x="7498079" y="1828800"/>
-            <a:ext cx="3931920" cy="4023360"/>
+          <p:cNvPr id="11" name="TextBox 10"/>
+          <p:cNvSpPr txBox="1"/>
+          <p:nvPr/>
+        </p:nvSpPr>
+        <p:spPr>
+          <a:xfrm>
+            <a:off x="777240" y="5715000"/>
+            <a:ext cx="10607040" cy="365760"/>
           </a:xfrm>
           <a:prstGeom prst="rect">
             <a:avLst/>
@@ -8119,152 +11088,23 @@
           <a:p>
             <a:pPr algn="l">
               <a:lnSpc>
-                <a:spcPct val="132000"/>
-              </a:lnSpc>
-              <a:spcBef>
-                <a:spcPts val="0"/>
-              </a:spcBef>
-              <a:spcAft>
-                <a:spcPts val="1200"/>
-              </a:spcAft>
-            </a:pPr>
-            <a:r>
-              <a:rPr sz="1400" b="0" i="0">
-                <a:solidFill>
-                  <a:srgbClr val="1C1B19"/>
-                </a:solidFill>
-                <a:latin typeface="Space Grotesk"/>
-              </a:rPr>
-              <a:t>Metadata is </a:t>
-            </a:r>
-            <a:r>
-              <a:rPr sz="1400" b="1" i="0">
-                <a:solidFill>
-                  <a:srgbClr val="FF2D55"/>
-                </a:solidFill>
-                <a:latin typeface="Space Grotesk"/>
-              </a:rPr>
-              <a:t>MNAR by country</a:t>
-            </a:r>
-            <a:r>
-              <a:rPr sz="1400" b="0" i="0">
-                <a:solidFill>
-                  <a:srgbClr val="1C1B19"/>
-                </a:solidFill>
-                <a:latin typeface="Space Grotesk"/>
-              </a:rPr>
-              <a:t> — Denmark 100% missing BMI / age / sex (privacy law), France ~2%, Germany 0%.</a:t>
-            </a:r>
-          </a:p>
-          <a:p>
-            <a:pPr algn="l">
-              <a:lnSpc>
-                <a:spcPct val="132000"/>
-              </a:lnSpc>
-              <a:spcBef>
-                <a:spcPts val="0"/>
-              </a:spcBef>
-              <a:spcAft>
-                <a:spcPts val="1400"/>
-              </a:spcAft>
-            </a:pPr>
-            <a:r>
-              <a:rPr sz="1400" b="0" i="0">
-                <a:solidFill>
-                  <a:srgbClr val="1C1B19"/>
-                </a:solidFill>
-                <a:latin typeface="Space Grotesk"/>
-              </a:rPr>
-              <a:t>Omics missingness (the 348 / 348) is spread evenly across center and disease group — a different mechanism.</a:t>
-            </a:r>
-          </a:p>
-        </p:txBody>
-      </p:sp>
-      <p:sp>
-        <p:nvSpPr>
-          <p:cNvPr id="13" name="Rectangle 12"/>
-          <p:cNvSpPr/>
-          <p:nvPr/>
-        </p:nvSpPr>
-        <p:spPr>
-          <a:xfrm>
-            <a:off x="7498079" y="4572000"/>
-            <a:ext cx="36576" cy="868680"/>
-          </a:xfrm>
-          <a:prstGeom prst="rect">
-            <a:avLst/>
-          </a:prstGeom>
-          <a:solidFill>
-            <a:srgbClr val="FF2D55"/>
-          </a:solidFill>
-          <a:ln>
-            <a:noFill/>
-          </a:ln>
-          <a:effectLst/>
-        </p:spPr>
-        <p:style>
-          <a:lnRef idx="1">
-            <a:schemeClr val="accent1"/>
-          </a:lnRef>
-          <a:fillRef idx="3">
-            <a:schemeClr val="accent1"/>
-          </a:fillRef>
-          <a:effectRef idx="2">
-            <a:schemeClr val="accent1"/>
-          </a:effectRef>
-          <a:fontRef idx="minor">
-            <a:schemeClr val="lt1"/>
-          </a:fontRef>
-        </p:style>
-        <p:txBody>
-          <a:bodyPr rtlCol="0" anchor="ctr"/>
-          <a:lstStyle/>
-          <a:p>
-            <a:pPr algn="ctr"/>
-          </a:p>
-        </p:txBody>
-      </p:sp>
-      <p:sp>
-        <p:nvSpPr>
-          <p:cNvPr id="14" name="TextBox 13"/>
-          <p:cNvSpPr txBox="1"/>
-          <p:nvPr/>
-        </p:nvSpPr>
-        <p:spPr>
-          <a:xfrm>
-            <a:off x="7726679" y="4572000"/>
-            <a:ext cx="3657600" cy="914400"/>
-          </a:xfrm>
-          <a:prstGeom prst="rect">
-            <a:avLst/>
-          </a:prstGeom>
-          <a:noFill/>
-        </p:spPr>
-        <p:txBody>
-          <a:bodyPr wrap="square" anchor="t" lIns="0" rIns="0" tIns="0" bIns="0">
-            <a:spAutoFit/>
-          </a:bodyPr>
-          <a:lstStyle/>
-          <a:p>
-            <a:pPr algn="l">
-              <a:lnSpc>
-                <a:spcPct val="130000"/>
-              </a:lnSpc>
-              <a:spcBef>
-                <a:spcPts val="0"/>
-              </a:spcBef>
-              <a:spcAft>
-                <a:spcPts val="600"/>
-              </a:spcAft>
-            </a:pPr>
-            <a:r>
-              <a:rPr sz="1400" b="1" i="0">
-                <a:solidFill>
-                  <a:srgbClr val="0A0A0A"/>
-                </a:solidFill>
-                <a:latin typeface="Space Grotesk"/>
-              </a:rPr>
-              <a:t>Two missingness types → handled separately in the pipeline.</a:t>
+                <a:spcPct val="100000"/>
+              </a:lnSpc>
+              <a:spcBef>
+                <a:spcPts val="0"/>
+              </a:spcBef>
+              <a:spcAft>
+                <a:spcPts val="600"/>
+              </a:spcAft>
+            </a:pPr>
+            <a:r>
+              <a:rPr sz="900" b="0" i="0" spc="60">
+                <a:solidFill>
+                  <a:srgbClr val="6B6863"/>
+                </a:solidFill>
+                <a:latin typeface="JetBrains Mono"/>
+              </a:rPr>
+              <a:t>OBESITY 2A/2B — YOUNGEST, BMI &gt; 40 · DIABETES/CVD 3–6 — OLDER (~60) · AGE &amp; BMI ARE PRIME CONFOUNDERS</a:t>
             </a:r>
           </a:p>
         </p:txBody>
@@ -8469,7 +11309,7 @@
                 </a:solidFill>
                 <a:latin typeface="JetBrains Mono"/>
               </a:rPr>
-              <a:t>EXPLORATION / STRUCTURE</a:t>
+              <a:t>EXPLORATION / BATCH</a:t>
             </a:r>
           </a:p>
         </p:txBody>
@@ -8629,7 +11469,7 @@
                 </a:solidFill>
                 <a:latin typeface="JetBrains Mono"/>
               </a:rPr>
-              <a:t>05 / 13</a:t>
+              <a:t>05 / 16</a:t>
             </a:r>
           </a:p>
         </p:txBody>
@@ -8643,7 +11483,7 @@
         <p:spPr>
           <a:xfrm>
             <a:off x="777240" y="1051560"/>
-            <a:ext cx="8229600" cy="320040"/>
+            <a:ext cx="10058400" cy="320040"/>
           </a:xfrm>
           <a:prstGeom prst="rect">
             <a:avLst/>
@@ -8674,14 +11514,14 @@
                 </a:solidFill>
                 <a:latin typeface="JetBrains Mono"/>
               </a:rPr>
-              <a:t>CENTER STRUCTURES THE MICROBIOME MORE THAN DISEASE</a:t>
+              <a:t>RECRUITMENT CENTER IS A CONFOUNDER, NOT NOISE</a:t>
             </a:r>
           </a:p>
         </p:txBody>
       </p:sp>
       <p:pic>
         <p:nvPicPr>
-          <p:cNvPr id="11" name="Picture 10" descr="04_microbiome_pcoa.png"/>
+          <p:cNvPr id="11" name="Picture 10" descr="12_country_by_group.png"/>
           <p:cNvPicPr>
             <a:picLocks noChangeAspect="1"/>
           </p:cNvPicPr>
@@ -8695,8 +11535,8 @@
         </p:blipFill>
         <p:spPr>
           <a:xfrm>
-            <a:off x="777240" y="1691640"/>
-            <a:ext cx="6766560" cy="2537460"/>
+            <a:off x="777240" y="1737360"/>
+            <a:ext cx="6126480" cy="3185770"/>
           </a:xfrm>
           <a:prstGeom prst="rect">
             <a:avLst/>
@@ -8711,8 +11551,8 @@
         </p:nvSpPr>
         <p:spPr>
           <a:xfrm>
-            <a:off x="8138160" y="1783080"/>
-            <a:ext cx="3291840" cy="365760"/>
+            <a:off x="7406640" y="1828800"/>
+            <a:ext cx="4023360" cy="914400"/>
           </a:xfrm>
           <a:prstGeom prst="rect">
             <a:avLst/>
@@ -8727,23 +11567,23 @@
           <a:p>
             <a:pPr algn="l">
               <a:lnSpc>
-                <a:spcPct val="100000"/>
-              </a:lnSpc>
-              <a:spcBef>
-                <a:spcPts val="0"/>
-              </a:spcBef>
-              <a:spcAft>
-                <a:spcPts val="600"/>
-              </a:spcAft>
-            </a:pPr>
-            <a:r>
-              <a:rPr sz="900" b="0" i="0" spc="80">
-                <a:solidFill>
-                  <a:srgbClr val="6B6863"/>
-                </a:solidFill>
-                <a:latin typeface="JetBrains Mono"/>
-              </a:rPr>
-              <a:t>PCoA (AITCHISON) · PC1 25% · PC2 14%</a:t>
+                <a:spcPct val="95000"/>
+              </a:lnSpc>
+              <a:spcBef>
+                <a:spcPts val="0"/>
+              </a:spcBef>
+              <a:spcAft>
+                <a:spcPts val="600"/>
+              </a:spcAft>
+            </a:pPr>
+            <a:r>
+              <a:rPr sz="4600" b="1" i="0">
+                <a:solidFill>
+                  <a:srgbClr val="FF2D55"/>
+                </a:solidFill>
+                <a:latin typeface="Space Grotesk"/>
+              </a:rPr>
+              <a:t>8.84</a:t>
             </a:r>
           </a:p>
         </p:txBody>
@@ -8756,53 +11596,8 @@
         </p:nvSpPr>
         <p:spPr>
           <a:xfrm>
-            <a:off x="8138160" y="2286000"/>
-            <a:ext cx="3291840" cy="914400"/>
-          </a:xfrm>
-          <a:prstGeom prst="rect">
-            <a:avLst/>
-          </a:prstGeom>
-          <a:noFill/>
-        </p:spPr>
-        <p:txBody>
-          <a:bodyPr wrap="square" anchor="t" lIns="0" rIns="0" tIns="0" bIns="0">
-            <a:spAutoFit/>
-          </a:bodyPr>
-          <a:lstStyle/>
-          <a:p>
-            <a:pPr algn="l">
-              <a:lnSpc>
-                <a:spcPct val="95000"/>
-              </a:lnSpc>
-              <a:spcBef>
-                <a:spcPts val="0"/>
-              </a:spcBef>
-              <a:spcAft>
-                <a:spcPts val="600"/>
-              </a:spcAft>
-            </a:pPr>
-            <a:r>
-              <a:rPr sz="4600" b="1" i="0">
-                <a:solidFill>
-                  <a:srgbClr val="FF2D55"/>
-                </a:solidFill>
-                <a:latin typeface="Space Grotesk"/>
-              </a:rPr>
-              <a:t>8.84</a:t>
-            </a:r>
-          </a:p>
-        </p:txBody>
-      </p:sp>
-      <p:sp>
-        <p:nvSpPr>
-          <p:cNvPr id="14" name="TextBox 13"/>
-          <p:cNvSpPr txBox="1"/>
-          <p:nvPr/>
-        </p:nvSpPr>
-        <p:spPr>
-          <a:xfrm>
-            <a:off x="8138160" y="2999232"/>
-            <a:ext cx="3291840" cy="457200"/>
+            <a:off x="7406640" y="2542032"/>
+            <a:ext cx="4023360" cy="457200"/>
           </a:xfrm>
           <a:prstGeom prst="rect">
             <a:avLst/>
@@ -8840,14 +11635,14 @@
       </p:sp>
       <p:cxnSp>
         <p:nvCxnSpPr>
-          <p:cNvPr id="15" name="Connector 14"/>
+          <p:cNvPr id="14" name="Connector 13"/>
           <p:cNvCxnSpPr/>
           <p:nvPr/>
         </p:nvCxnSpPr>
         <p:spPr>
           <a:xfrm>
-            <a:off x="8138160" y="3337560"/>
-            <a:ext cx="3200400" cy="0"/>
+            <a:off x="7406640" y="2880360"/>
+            <a:ext cx="3291840" cy="0"/>
           </a:xfrm>
           <a:prstGeom prst="bentConnector3">
             <a:avLst/>
@@ -8875,14 +11670,59 @@
       </p:cxnSp>
       <p:sp>
         <p:nvSpPr>
+          <p:cNvPr id="15" name="TextBox 14"/>
+          <p:cNvSpPr txBox="1"/>
+          <p:nvPr/>
+        </p:nvSpPr>
+        <p:spPr>
+          <a:xfrm>
+            <a:off x="7406640" y="3017520"/>
+            <a:ext cx="4023360" cy="914400"/>
+          </a:xfrm>
+          <a:prstGeom prst="rect">
+            <a:avLst/>
+          </a:prstGeom>
+          <a:noFill/>
+        </p:spPr>
+        <p:txBody>
+          <a:bodyPr wrap="square" anchor="t" lIns="0" rIns="0" tIns="0" bIns="0">
+            <a:spAutoFit/>
+          </a:bodyPr>
+          <a:lstStyle/>
+          <a:p>
+            <a:pPr algn="l">
+              <a:lnSpc>
+                <a:spcPct val="95000"/>
+              </a:lnSpc>
+              <a:spcBef>
+                <a:spcPts val="0"/>
+              </a:spcBef>
+              <a:spcAft>
+                <a:spcPts val="600"/>
+              </a:spcAft>
+            </a:pPr>
+            <a:r>
+              <a:rPr sz="4600" b="1" i="0">
+                <a:solidFill>
+                  <a:srgbClr val="FF2D55"/>
+                </a:solidFill>
+                <a:latin typeface="Space Grotesk"/>
+              </a:rPr>
+              <a:t>3.72</a:t>
+            </a:r>
+          </a:p>
+        </p:txBody>
+      </p:sp>
+      <p:sp>
+        <p:nvSpPr>
           <p:cNvPr id="16" name="TextBox 15"/>
           <p:cNvSpPr txBox="1"/>
           <p:nvPr/>
         </p:nvSpPr>
         <p:spPr>
           <a:xfrm>
-            <a:off x="8138160" y="3474720"/>
-            <a:ext cx="3291840" cy="914400"/>
+            <a:off x="7406640" y="3730752"/>
+            <a:ext cx="4023360" cy="457200"/>
           </a:xfrm>
           <a:prstGeom prst="rect">
             <a:avLst/>
@@ -8897,131 +11737,86 @@
           <a:p>
             <a:pPr algn="l">
               <a:lnSpc>
-                <a:spcPct val="95000"/>
-              </a:lnSpc>
-              <a:spcBef>
-                <a:spcPts val="0"/>
-              </a:spcBef>
-              <a:spcAft>
-                <a:spcPts val="600"/>
-              </a:spcAft>
-            </a:pPr>
-            <a:r>
-              <a:rPr sz="4600" b="1" i="0">
+                <a:spcPct val="100000"/>
+              </a:lnSpc>
+              <a:spcBef>
+                <a:spcPts val="0"/>
+              </a:spcBef>
+              <a:spcAft>
+                <a:spcPts val="600"/>
+              </a:spcAft>
+            </a:pPr>
+            <a:r>
+              <a:rPr sz="900" b="0" i="0" spc="120">
+                <a:solidFill>
+                  <a:srgbClr val="6B6863"/>
+                </a:solidFill>
+                <a:latin typeface="JetBrains Mono"/>
+              </a:rPr>
+              <a:t>PERMANOVA F · DISEASE GROUP</a:t>
+            </a:r>
+          </a:p>
+        </p:txBody>
+      </p:sp>
+      <p:sp>
+        <p:nvSpPr>
+          <p:cNvPr id="17" name="TextBox 16"/>
+          <p:cNvSpPr txBox="1"/>
+          <p:nvPr/>
+        </p:nvSpPr>
+        <p:spPr>
+          <a:xfrm>
+            <a:off x="7406640" y="4160520"/>
+            <a:ext cx="4114800" cy="1828800"/>
+          </a:xfrm>
+          <a:prstGeom prst="rect">
+            <a:avLst/>
+          </a:prstGeom>
+          <a:noFill/>
+        </p:spPr>
+        <p:txBody>
+          <a:bodyPr wrap="square" anchor="t" lIns="0" rIns="0" tIns="0" bIns="0">
+            <a:spAutoFit/>
+          </a:bodyPr>
+          <a:lstStyle/>
+          <a:p>
+            <a:pPr algn="l">
+              <a:lnSpc>
+                <a:spcPct val="130000"/>
+              </a:lnSpc>
+              <a:spcBef>
+                <a:spcPts val="0"/>
+              </a:spcBef>
+              <a:spcAft>
+                <a:spcPts val="600"/>
+              </a:spcAft>
+            </a:pPr>
+            <a:r>
+              <a:rPr sz="1300" b="0" i="0">
+                <a:solidFill>
+                  <a:srgbClr val="1C1B19"/>
+                </a:solidFill>
+                <a:latin typeface="Space Grotesk"/>
+              </a:rPr>
+              <a:t>Groups are country-skewed (2b≈German, 7≈French, 4 no-Germany) and </a:t>
+            </a:r>
+            <a:r>
+              <a:rPr sz="1300" b="1" i="0">
                 <a:solidFill>
                   <a:srgbClr val="FF2D55"/>
                 </a:solidFill>
                 <a:latin typeface="Space Grotesk"/>
               </a:rPr>
-              <a:t>3.72</a:t>
-            </a:r>
-          </a:p>
-        </p:txBody>
-      </p:sp>
-      <p:sp>
-        <p:nvSpPr>
-          <p:cNvPr id="17" name="TextBox 16"/>
-          <p:cNvSpPr txBox="1"/>
-          <p:nvPr/>
-        </p:nvSpPr>
-        <p:spPr>
-          <a:xfrm>
-            <a:off x="8138160" y="4187952"/>
-            <a:ext cx="3291840" cy="457200"/>
-          </a:xfrm>
-          <a:prstGeom prst="rect">
-            <a:avLst/>
-          </a:prstGeom>
-          <a:noFill/>
-        </p:spPr>
-        <p:txBody>
-          <a:bodyPr wrap="square" anchor="t" lIns="0" rIns="0" tIns="0" bIns="0">
-            <a:spAutoFit/>
-          </a:bodyPr>
-          <a:lstStyle/>
-          <a:p>
-            <a:pPr algn="l">
-              <a:lnSpc>
-                <a:spcPct val="100000"/>
-              </a:lnSpc>
-              <a:spcBef>
-                <a:spcPts val="0"/>
-              </a:spcBef>
-              <a:spcAft>
-                <a:spcPts val="600"/>
-              </a:spcAft>
-            </a:pPr>
-            <a:r>
-              <a:rPr sz="900" b="0" i="0" spc="120">
-                <a:solidFill>
-                  <a:srgbClr val="6B6863"/>
-                </a:solidFill>
-                <a:latin typeface="JetBrains Mono"/>
-              </a:rPr>
-              <a:t>PERMANOVA F · DISEASE GROUP</a:t>
-            </a:r>
-          </a:p>
-        </p:txBody>
-      </p:sp>
-      <p:sp>
-        <p:nvSpPr>
-          <p:cNvPr id="18" name="TextBox 17"/>
-          <p:cNvSpPr txBox="1"/>
-          <p:nvPr/>
-        </p:nvSpPr>
-        <p:spPr>
-          <a:xfrm>
-            <a:off x="8138160" y="4572000"/>
-            <a:ext cx="3291840" cy="1463040"/>
-          </a:xfrm>
-          <a:prstGeom prst="rect">
-            <a:avLst/>
-          </a:prstGeom>
-          <a:noFill/>
-        </p:spPr>
-        <p:txBody>
-          <a:bodyPr wrap="square" anchor="t" lIns="0" rIns="0" tIns="0" bIns="0">
-            <a:spAutoFit/>
-          </a:bodyPr>
-          <a:lstStyle/>
-          <a:p>
-            <a:pPr algn="l">
-              <a:lnSpc>
-                <a:spcPct val="130000"/>
-              </a:lnSpc>
-              <a:spcBef>
-                <a:spcPts val="0"/>
-              </a:spcBef>
-              <a:spcAft>
-                <a:spcPts val="600"/>
-              </a:spcAft>
-            </a:pPr>
-            <a:r>
-              <a:rPr sz="1250" b="0" i="0">
+              <a:t>CENTER structures the microbiome more than disease</a:t>
+            </a:r>
+            <a:r>
+              <a:rPr sz="1300" b="0" i="0">
                 <a:solidFill>
                   <a:srgbClr val="1C1B19"/>
                 </a:solidFill>
                 <a:latin typeface="Space Grotesk"/>
               </a:rPr>
-              <a:t>Both p≈0.005 → </a:t>
-            </a:r>
-            <a:r>
-              <a:rPr sz="1250" b="1" i="0">
-                <a:solidFill>
-                  <a:srgbClr val="FF2D55"/>
-                </a:solidFill>
-                <a:latin typeface="Space Grotesk"/>
-              </a:rPr>
-              <a:t>batch/geography dominates</a:t>
-            </a:r>
-            <a:r>
-              <a:rPr sz="1250" b="0" i="0">
-                <a:solidFill>
-                  <a:srgbClr val="1C1B19"/>
-                </a:solidFill>
-                <a:latin typeface="Space Grotesk"/>
-              </a:rPr>
-              <a:t>. The grader's truth keeps it, so de-batching may hurt Mantel.</a:t>
+              <a:t>. Denmark is 100% missing demographics (MNAR).</a:t>
             </a:r>
           </a:p>
         </p:txBody>
@@ -9226,7 +12021,7 @@
                 </a:solidFill>
                 <a:latin typeface="JetBrains Mono"/>
               </a:rPr>
-              <a:t>EXPLORATION / PER-OMICS SIGNAL</a:t>
+              <a:t>EXPLORATION / WHAT PREDICTS DISEASE</a:t>
             </a:r>
           </a:p>
         </p:txBody>
@@ -9386,7 +12181,7 @@
                 </a:solidFill>
                 <a:latin typeface="JetBrains Mono"/>
               </a:rPr>
-              <a:t>06 / 13</a:t>
+              <a:t>06 / 16</a:t>
             </a:r>
           </a:p>
         </p:txBody>
@@ -9400,7 +12195,7 @@
         <p:spPr>
           <a:xfrm>
             <a:off x="777240" y="1051560"/>
-            <a:ext cx="8229600" cy="320040"/>
+            <a:ext cx="10058400" cy="320040"/>
           </a:xfrm>
           <a:prstGeom prst="rect">
             <a:avLst/>
@@ -9431,14 +12226,14 @@
                 </a:solidFill>
                 <a:latin typeface="JetBrains Mono"/>
               </a:rPr>
-              <a:t>STRONG SIGNAL EXISTS WITHIN EACH OMICS</a:t>
+              <a:t>BASIC DEMOGRAPHICS PREDICT THE DISEASE BETTER THAN THE OMICS</a:t>
             </a:r>
           </a:p>
         </p:txBody>
       </p:sp>
       <p:pic>
         <p:nvPicPr>
-          <p:cNvPr id="11" name="Picture 10" descr="07_diff_abundance.png"/>
+          <p:cNvPr id="11" name="Picture 10" descr="14_feature_importance.png"/>
           <p:cNvPicPr>
             <a:picLocks noChangeAspect="1"/>
           </p:cNvPicPr>
@@ -9452,8 +12247,8 @@
         </p:blipFill>
         <p:spPr>
           <a:xfrm>
-            <a:off x="777240" y="1691640"/>
-            <a:ext cx="4937760" cy="3840480"/>
+            <a:off x="777240" y="1737360"/>
+            <a:ext cx="6035040" cy="3352800"/>
           </a:xfrm>
           <a:prstGeom prst="rect">
             <a:avLst/>
@@ -9468,8 +12263,8 @@
         </p:nvSpPr>
         <p:spPr>
           <a:xfrm>
-            <a:off x="777240" y="5623560"/>
-            <a:ext cx="5486400" cy="365760"/>
+            <a:off x="7315200" y="1828800"/>
+            <a:ext cx="4114800" cy="914400"/>
           </a:xfrm>
           <a:prstGeom prst="rect">
             <a:avLst/>
@@ -9484,6 +12279,51 @@
           <a:p>
             <a:pPr algn="l">
               <a:lnSpc>
+                <a:spcPct val="95000"/>
+              </a:lnSpc>
+              <a:spcBef>
+                <a:spcPts val="0"/>
+              </a:spcBef>
+              <a:spcAft>
+                <a:spcPts val="600"/>
+              </a:spcAft>
+            </a:pPr>
+            <a:r>
+              <a:rPr sz="5200" b="1" i="0">
+                <a:solidFill>
+                  <a:srgbClr val="FF2D55"/>
+                </a:solidFill>
+                <a:latin typeface="Space Grotesk"/>
+              </a:rPr>
+              <a:t>0.34</a:t>
+            </a:r>
+          </a:p>
+        </p:txBody>
+      </p:sp>
+      <p:sp>
+        <p:nvSpPr>
+          <p:cNvPr id="13" name="TextBox 12"/>
+          <p:cNvSpPr txBox="1"/>
+          <p:nvPr/>
+        </p:nvSpPr>
+        <p:spPr>
+          <a:xfrm>
+            <a:off x="7315200" y="2542032"/>
+            <a:ext cx="4114800" cy="457200"/>
+          </a:xfrm>
+          <a:prstGeom prst="rect">
+            <a:avLst/>
+          </a:prstGeom>
+          <a:noFill/>
+        </p:spPr>
+        <p:txBody>
+          <a:bodyPr wrap="square" anchor="t" lIns="0" rIns="0" tIns="0" bIns="0">
+            <a:spAutoFit/>
+          </a:bodyPr>
+          <a:lstStyle/>
+          <a:p>
+            <a:pPr algn="l">
+              <a:lnSpc>
                 <a:spcPct val="100000"/>
               </a:lnSpc>
               <a:spcBef>
@@ -9494,41 +12334,17 @@
               </a:spcAft>
             </a:pPr>
             <a:r>
-              <a:rPr sz="900" b="0" i="0" spc="60">
+              <a:rPr sz="900" b="0" i="0" spc="120">
                 <a:solidFill>
                   <a:srgbClr val="6B6863"/>
                 </a:solidFill>
                 <a:latin typeface="JetBrains Mono"/>
               </a:rPr>
-              <a:t>107/170 SPECIES DIFFER T2D VS CONTROL (BONFERRONI)</a:t>
-            </a:r>
-          </a:p>
-        </p:txBody>
-      </p:sp>
-      <p:pic>
-        <p:nvPicPr>
-          <p:cNvPr id="13" name="Picture 12" descr="08_metabolome_trends.png"/>
-          <p:cNvPicPr>
-            <a:picLocks noChangeAspect="1"/>
-          </p:cNvPicPr>
-          <p:nvPr/>
-        </p:nvPicPr>
-        <p:blipFill>
-          <a:blip r:embed="rId3"/>
-          <a:stretch>
-            <a:fillRect/>
-          </a:stretch>
-        </p:blipFill>
-        <p:spPr>
-          <a:xfrm>
-            <a:off x="6400800" y="2057400"/>
-            <a:ext cx="5486400" cy="3657600"/>
-          </a:xfrm>
-          <a:prstGeom prst="rect">
-            <a:avLst/>
-          </a:prstGeom>
-        </p:spPr>
-      </p:pic>
+              <a:t>METADATA-ONLY RF · 5-FOLD CV · BAL-ACC</a:t>
+            </a:r>
+          </a:p>
+        </p:txBody>
+      </p:sp>
       <p:sp>
         <p:nvSpPr>
           <p:cNvPr id="14" name="TextBox 13"/>
@@ -9537,8 +12353,8 @@
         </p:nvSpPr>
         <p:spPr>
           <a:xfrm>
-            <a:off x="6400800" y="5806440"/>
-            <a:ext cx="4937760" cy="365760"/>
+            <a:off x="7315200" y="3108960"/>
+            <a:ext cx="4206240" cy="2651760"/>
           </a:xfrm>
           <a:prstGeom prst="rect">
             <a:avLst/>
@@ -9553,23 +12369,139 @@
           <a:p>
             <a:pPr algn="l">
               <a:lnSpc>
-                <a:spcPct val="100000"/>
-              </a:lnSpc>
-              <a:spcBef>
-                <a:spcPts val="0"/>
-              </a:spcBef>
-              <a:spcAft>
-                <a:spcPts val="600"/>
-              </a:spcAft>
-            </a:pPr>
-            <a:r>
-              <a:rPr sz="900" b="0" i="0" spc="60">
+                <a:spcPct val="130000"/>
+              </a:lnSpc>
+              <a:spcBef>
+                <a:spcPts val="0"/>
+              </a:spcBef>
+              <a:spcAft>
+                <a:spcPts val="1000"/>
+              </a:spcAft>
+            </a:pPr>
+            <a:r>
+              <a:rPr sz="1350" b="0" i="0">
+                <a:solidFill>
+                  <a:srgbClr val="1C1B19"/>
+                </a:solidFill>
+                <a:latin typeface="Space Grotesk"/>
+              </a:rPr>
+              <a:t>Random Forest, 5-fold cross-validation, guessing the disease group (1 of 9). Same model, three inputs: metadata-only </a:t>
+            </a:r>
+            <a:r>
+              <a:rPr sz="1350" b="1" i="0">
+                <a:solidFill>
+                  <a:srgbClr val="1C1B19"/>
+                </a:solidFill>
+                <a:latin typeface="Space Grotesk"/>
+              </a:rPr>
+              <a:t>0.34</a:t>
+            </a:r>
+            <a:r>
+              <a:rPr sz="1350" b="0" i="0">
+                <a:solidFill>
+                  <a:srgbClr val="1C1B19"/>
+                </a:solidFill>
+                <a:latin typeface="Space Grotesk"/>
+              </a:rPr>
+              <a:t> · both-omics </a:t>
+            </a:r>
+            <a:r>
+              <a:rPr sz="1350" b="1" i="0">
+                <a:solidFill>
+                  <a:srgbClr val="1C1B19"/>
+                </a:solidFill>
+                <a:latin typeface="Space Grotesk"/>
+              </a:rPr>
+              <a:t>0.26</a:t>
+            </a:r>
+            <a:r>
+              <a:rPr sz="1350" b="0" i="0">
+                <a:solidFill>
+                  <a:srgbClr val="1C1B19"/>
+                </a:solidFill>
+                <a:latin typeface="Space Grotesk"/>
+              </a:rPr>
+              <a:t> · microbiome-only </a:t>
+            </a:r>
+            <a:r>
+              <a:rPr sz="1350" b="1" i="0">
+                <a:solidFill>
+                  <a:srgbClr val="1C1B19"/>
+                </a:solidFill>
+                <a:latin typeface="Space Grotesk"/>
+              </a:rPr>
+              <a:t>0.191</a:t>
+            </a:r>
+            <a:r>
+              <a:rPr sz="1350" b="0" i="0">
+                <a:solidFill>
+                  <a:srgbClr val="1C1B19"/>
+                </a:solidFill>
+                <a:latin typeface="Space Grotesk"/>
+              </a:rPr>
+              <a:t> (chance≈0.11).</a:t>
+            </a:r>
+          </a:p>
+          <a:p>
+            <a:pPr algn="l">
+              <a:lnSpc>
+                <a:spcPct val="130000"/>
+              </a:lnSpc>
+              <a:spcBef>
+                <a:spcPts val="0"/>
+              </a:spcBef>
+              <a:spcAft>
+                <a:spcPts val="1000"/>
+              </a:spcAft>
+            </a:pPr>
+            <a:r>
+              <a:rPr sz="1350" b="1" i="0">
+                <a:solidFill>
+                  <a:srgbClr val="FF2D55"/>
+                </a:solidFill>
+                <a:latin typeface="Space Grotesk"/>
+              </a:rPr>
+              <a:t>BMI (0.653) and age (0.287) dominate</a:t>
+            </a:r>
+            <a:r>
+              <a:rPr sz="1350" b="0" i="0">
+                <a:solidFill>
+                  <a:srgbClr val="1C1B19"/>
+                </a:solidFill>
+                <a:latin typeface="Space Grotesk"/>
+              </a:rPr>
+              <a:t> — the disease signal in the omics is weak and distributed, so distances (not labels) are the right target.</a:t>
+            </a:r>
+          </a:p>
+          <a:p>
+            <a:pPr algn="l">
+              <a:lnSpc>
+                <a:spcPct val="125000"/>
+              </a:lnSpc>
+              <a:spcBef>
+                <a:spcPts val="0"/>
+              </a:spcBef>
+              <a:spcAft>
+                <a:spcPts val="600"/>
+              </a:spcAft>
+            </a:pPr>
+            <a:r>
+              <a:rPr sz="1200" b="1" i="0">
                 <a:solidFill>
                   <a:srgbClr val="6B6863"/>
                 </a:solidFill>
-                <a:latin typeface="JetBrains Mono"/>
-              </a:rPr>
-              <a:t>METABOLITE GRADIENTS TRACK DISEASE STATE</a:t>
+                <a:latin typeface="Space Grotesk"/>
+              </a:rPr>
+              <a:t>Spec check — does imputing a missing omics help prediction? </a:t>
+            </a:r>
+            <a:r>
+              <a:rPr sz="1200" b="0" i="0">
+                <a:solidFill>
+                  <a:srgbClr val="6B6863"/>
+                </a:solidFill>
+                <a:latin typeface="Space Grotesk"/>
+              </a:rPr>
+              <a:t>No: microbiome alone 0.191, + an imputed metabolome 0.183, + the real metabolome 0.26.</a:t>
             </a:r>
           </a:p>
         </p:txBody>
@@ -9774,7 +12706,7 @@
                 </a:solidFill>
                 <a:latin typeface="JetBrains Mono"/>
               </a:rPr>
-              <a:t>EXPLORATION / COUPLING</a:t>
+              <a:t>EXPLORATION / MICROBIOME MAP</a:t>
             </a:r>
           </a:p>
         </p:txBody>
@@ -9934,7 +12866,7 @@
                 </a:solidFill>
                 <a:latin typeface="JetBrains Mono"/>
               </a:rPr>
-              <a:t>07 / 13</a:t>
+              <a:t>07 / 16</a:t>
             </a:r>
           </a:p>
         </p:txBody>
@@ -9948,7 +12880,7 @@
         <p:spPr>
           <a:xfrm>
             <a:off x="777240" y="1051560"/>
-            <a:ext cx="8229600" cy="320040"/>
+            <a:ext cx="10058400" cy="320040"/>
           </a:xfrm>
           <a:prstGeom prst="rect">
             <a:avLst/>
@@ -9979,14 +12911,14 @@
                 </a:solidFill>
                 <a:latin typeface="JetBrains Mono"/>
               </a:rPr>
-              <a:t>CROSS-OMICS COUPLING IS WEAK — THIS CAPS IMPUTATION</a:t>
+              <a:t>DISEASE GROUPS DON'T FORM CLEAN CLUSTERS ON THE MICROBIOME MAP</a:t>
             </a:r>
           </a:p>
         </p:txBody>
       </p:sp>
       <p:pic>
         <p:nvPicPr>
-          <p:cNvPr id="11" name="Picture 10" descr="09_cross_omics_corr.png"/>
+          <p:cNvPr id="11" name="Picture 10" descr="04b_microbiome_pcoa_disease.png"/>
           <p:cNvPicPr>
             <a:picLocks noChangeAspect="1"/>
           </p:cNvPicPr>
@@ -10001,7 +12933,7 @@
         <p:spPr>
           <a:xfrm>
             <a:off x="777240" y="1691640"/>
-            <a:ext cx="5730240" cy="4297680"/>
+            <a:ext cx="5525589" cy="4297680"/>
           </a:xfrm>
           <a:prstGeom prst="rect">
             <a:avLst/>
@@ -10016,8 +12948,8 @@
         </p:nvSpPr>
         <p:spPr>
           <a:xfrm>
-            <a:off x="7132320" y="1920240"/>
-            <a:ext cx="4206240" cy="914400"/>
+            <a:off x="7680960" y="1783080"/>
+            <a:ext cx="3749039" cy="914400"/>
           </a:xfrm>
           <a:prstGeom prst="rect">
             <a:avLst/>
@@ -10042,13 +12974,13 @@
               </a:spcAft>
             </a:pPr>
             <a:r>
-              <a:rPr sz="5200" b="1" i="0">
+              <a:rPr sz="4600" b="1" i="0">
                 <a:solidFill>
                   <a:srgbClr val="FF2D55"/>
                 </a:solidFill>
                 <a:latin typeface="Space Grotesk"/>
               </a:rPr>
-              <a:t>0.382</a:t>
+              <a:t>38%</a:t>
             </a:r>
           </a:p>
         </p:txBody>
@@ -10061,8 +12993,8 @@
         </p:nvSpPr>
         <p:spPr>
           <a:xfrm>
-            <a:off x="7132320" y="2633472"/>
-            <a:ext cx="4206240" cy="457200"/>
+            <a:off x="7680960" y="2496312"/>
+            <a:ext cx="3749039" cy="457200"/>
           </a:xfrm>
           <a:prstGeom prst="rect">
             <a:avLst/>
@@ -10093,7 +13025,7 @@
                 </a:solidFill>
                 <a:latin typeface="JetBrains Mono"/>
               </a:rPr>
-              <a:t>MAX |SPEARMAN| TAXA ↔ METABOLITE</a:t>
+              <a:t>OF PATIENT DIFFERENCES VISIBLE IN THIS FLAT MAP · REST HIDDEN</a:t>
             </a:r>
           </a:p>
         </p:txBody>
@@ -10106,8 +13038,8 @@
         </p:nvSpPr>
         <p:spPr>
           <a:xfrm>
-            <a:off x="7132320" y="3200400"/>
-            <a:ext cx="4206240" cy="2560320"/>
+            <a:off x="7680960" y="2880360"/>
+            <a:ext cx="3749039" cy="365760"/>
           </a:xfrm>
           <a:prstGeom prst="rect">
             <a:avLst/>
@@ -10122,41 +13054,86 @@
           <a:p>
             <a:pPr algn="l">
               <a:lnSpc>
+                <a:spcPct val="100000"/>
+              </a:lnSpc>
+              <a:spcBef>
+                <a:spcPts val="0"/>
+              </a:spcBef>
+              <a:spcAft>
+                <a:spcPts val="600"/>
+              </a:spcAft>
+            </a:pPr>
+            <a:r>
+              <a:rPr sz="900" b="0" i="0" spc="80">
+                <a:solidFill>
+                  <a:srgbClr val="6B6863"/>
+                </a:solidFill>
+                <a:latin typeface="JetBrains Mono"/>
+              </a:rPr>
+              <a:t>PCOA (AITCHISON) · PC1 25% · PC2 14%</a:t>
+            </a:r>
+          </a:p>
+        </p:txBody>
+      </p:sp>
+      <p:sp>
+        <p:nvSpPr>
+          <p:cNvPr id="15" name="TextBox 14"/>
+          <p:cNvSpPr txBox="1"/>
+          <p:nvPr/>
+        </p:nvSpPr>
+        <p:spPr>
+          <a:xfrm>
+            <a:off x="7680960" y="3291840"/>
+            <a:ext cx="3749039" cy="2651760"/>
+          </a:xfrm>
+          <a:prstGeom prst="rect">
+            <a:avLst/>
+          </a:prstGeom>
+          <a:noFill/>
+        </p:spPr>
+        <p:txBody>
+          <a:bodyPr wrap="square" anchor="t" lIns="0" rIns="0" tIns="0" bIns="0">
+            <a:spAutoFit/>
+          </a:bodyPr>
+          <a:lstStyle/>
+          <a:p>
+            <a:pPr algn="l">
+              <a:lnSpc>
                 <a:spcPct val="130000"/>
               </a:lnSpc>
               <a:spcBef>
                 <a:spcPts val="0"/>
               </a:spcBef>
               <a:spcAft>
-                <a:spcPts val="1200"/>
-              </a:spcAft>
-            </a:pPr>
-            <a:r>
-              <a:rPr sz="1400" b="0" i="0">
+                <a:spcPts val="1000"/>
+              </a:spcAft>
+            </a:pPr>
+            <a:r>
+              <a:rPr sz="1350" b="0" i="0">
                 <a:solidFill>
                   <a:srgbClr val="1C1B19"/>
                 </a:solidFill>
                 <a:latin typeface="Space Grotesk"/>
               </a:rPr>
-              <a:t>Only a metabolite-specific subset is predictable from microbiome → any cross-modal imputation has a </a:t>
-            </a:r>
-            <a:r>
-              <a:rPr sz="1400" b="1" i="0">
+              <a:t>Disease colours are mixed everywhere — </a:t>
+            </a:r>
+            <a:r>
+              <a:rPr sz="1350" b="1" i="0">
                 <a:solidFill>
                   <a:srgbClr val="FF2D55"/>
                 </a:solidFill>
                 <a:latin typeface="Space Grotesk"/>
               </a:rPr>
-              <a:t>low ceiling</a:t>
-            </a:r>
-            <a:r>
-              <a:rPr sz="1400" b="0" i="0">
+              <a:t>no clean clusters</a:t>
+            </a:r>
+            <a:r>
+              <a:rPr sz="1350" b="0" i="0">
                 <a:solidFill>
                   <a:srgbClr val="1C1B19"/>
                 </a:solidFill>
                 <a:latin typeface="Space Grotesk"/>
               </a:rPr>
-              <a:t>.</a:t>
+              <a:t>, so we place patients by distance, not predict a label. The 2 axes capture only 25%/14%; structure is high-dimensional.</a:t>
             </a:r>
           </a:p>
           <a:p>
@@ -10172,49 +13149,13 @@
               </a:spcAft>
             </a:pPr>
             <a:r>
-              <a:rPr sz="1300" b="0" i="0">
-                <a:solidFill>
-                  <a:srgbClr val="1C1B19"/>
+              <a:rPr sz="1200" b="0" i="0">
+                <a:solidFill>
+                  <a:srgbClr val="6B6863"/>
                 </a:solidFill>
                 <a:latin typeface="Space Grotesk"/>
               </a:rPr>
-              <a:t>Disease prediction (RF, balanced acc, 9-class, chance≈0.11): both omics </a:t>
-            </a:r>
-            <a:r>
-              <a:rPr sz="1300" b="1" i="0">
-                <a:solidFill>
-                  <a:srgbClr val="1C1B19"/>
-                </a:solidFill>
-                <a:latin typeface="Space Grotesk"/>
-              </a:rPr>
-              <a:t>0.26</a:t>
-            </a:r>
-            <a:r>
-              <a:rPr sz="1300" b="0" i="0">
-                <a:solidFill>
-                  <a:srgbClr val="1C1B19"/>
-                </a:solidFill>
-                <a:latin typeface="Space Grotesk"/>
-              </a:rPr>
-              <a:t> · microbiome-only </a:t>
-            </a:r>
-            <a:r>
-              <a:rPr sz="1300" b="1" i="0">
-                <a:solidFill>
-                  <a:srgbClr val="1C1B19"/>
-                </a:solidFill>
-                <a:latin typeface="Space Grotesk"/>
-              </a:rPr>
-              <a:t>0.191</a:t>
-            </a:r>
-            <a:r>
-              <a:rPr sz="1300" b="0" i="0">
-                <a:solidFill>
-                  <a:srgbClr val="1C1B19"/>
-                </a:solidFill>
-                <a:latin typeface="Space Grotesk"/>
-              </a:rPr>
-              <a:t>.</a:t>
+              <a:t>Country also shapes this map; we judge that with the df-adjusted PERMANOVA on slide 05, not by eye.</a:t>
             </a:r>
           </a:p>
         </p:txBody>
@@ -10247,52 +13188,7 @@
       <p:grpSpPr/>
       <p:sp>
         <p:nvSpPr>
-          <p:cNvPr id="2" name="TextBox 1"/>
-          <p:cNvSpPr txBox="1"/>
-          <p:nvPr/>
-        </p:nvSpPr>
-        <p:spPr>
-          <a:xfrm>
-            <a:off x="7955279" y="3657600"/>
-            <a:ext cx="5120640" cy="3566160"/>
-          </a:xfrm>
-          <a:prstGeom prst="rect">
-            <a:avLst/>
-          </a:prstGeom>
-          <a:noFill/>
-        </p:spPr>
-        <p:txBody>
-          <a:bodyPr wrap="square" anchor="t" lIns="0" rIns="0" tIns="0" bIns="0">
-            <a:spAutoFit/>
-          </a:bodyPr>
-          <a:lstStyle/>
-          <a:p>
-            <a:pPr algn="r">
-              <a:lnSpc>
-                <a:spcPct val="100000"/>
-              </a:lnSpc>
-              <a:spcBef>
-                <a:spcPts val="0"/>
-              </a:spcBef>
-              <a:spcAft>
-                <a:spcPts val="600"/>
-              </a:spcAft>
-            </a:pPr>
-            <a:r>
-              <a:rPr sz="25000" b="1" i="0">
-                <a:solidFill>
-                  <a:srgbClr val="F1C9D2"/>
-                </a:solidFill>
-                <a:latin typeface="Space Grotesk"/>
-              </a:rPr>
-              <a:t>08</a:t>
-            </a:r>
-          </a:p>
-        </p:txBody>
-      </p:sp>
-      <p:sp>
-        <p:nvSpPr>
-          <p:cNvPr id="3" name="Rectangle 2"/>
+          <p:cNvPr id="2" name="Rectangle 1"/>
           <p:cNvSpPr/>
           <p:nvPr/>
         </p:nvSpPr>
@@ -10336,7 +13232,7 @@
       </p:sp>
       <p:sp>
         <p:nvSpPr>
-          <p:cNvPr id="4" name="TextBox 3"/>
+          <p:cNvPr id="3" name="TextBox 2"/>
           <p:cNvSpPr txBox="1"/>
           <p:nvPr/>
         </p:nvSpPr>
@@ -10381,7 +13277,7 @@
       </p:sp>
       <p:sp>
         <p:nvSpPr>
-          <p:cNvPr id="5" name="TextBox 4"/>
+          <p:cNvPr id="4" name="TextBox 3"/>
           <p:cNvSpPr txBox="1"/>
           <p:nvPr/>
         </p:nvSpPr>
@@ -10419,14 +13315,14 @@
                 </a:solidFill>
                 <a:latin typeface="JetBrains Mono"/>
               </a:rPr>
-              <a:t>NAÏVE BASELINE</a:t>
+              <a:t>EXPLORATION / DIFFERENTIAL</a:t>
             </a:r>
           </a:p>
         </p:txBody>
       </p:sp>
       <p:cxnSp>
         <p:nvCxnSpPr>
-          <p:cNvPr id="6" name="Connector 5"/>
+          <p:cNvPr id="5" name="Connector 4"/>
           <p:cNvCxnSpPr/>
           <p:nvPr/>
         </p:nvCxnSpPr>
@@ -10461,7 +13357,7 @@
       </p:cxnSp>
       <p:cxnSp>
         <p:nvCxnSpPr>
-          <p:cNvPr id="7" name="Connector 6"/>
+          <p:cNvPr id="6" name="Connector 5"/>
           <p:cNvCxnSpPr/>
           <p:nvPr/>
         </p:nvCxnSpPr>
@@ -10496,7 +13392,7 @@
       </p:cxnSp>
       <p:sp>
         <p:nvSpPr>
-          <p:cNvPr id="8" name="TextBox 7"/>
+          <p:cNvPr id="7" name="TextBox 6"/>
           <p:cNvSpPr txBox="1"/>
           <p:nvPr/>
         </p:nvSpPr>
@@ -10541,7 +13437,7 @@
       </p:sp>
       <p:sp>
         <p:nvSpPr>
-          <p:cNvPr id="9" name="TextBox 8"/>
+          <p:cNvPr id="8" name="TextBox 7"/>
           <p:cNvSpPr txBox="1"/>
           <p:nvPr/>
         </p:nvSpPr>
@@ -10579,21 +13475,21 @@
                 </a:solidFill>
                 <a:latin typeface="JetBrains Mono"/>
               </a:rPr>
-              <a:t>08 / 13</a:t>
-            </a:r>
-          </a:p>
-        </p:txBody>
-      </p:sp>
-      <p:sp>
-        <p:nvSpPr>
-          <p:cNvPr id="10" name="TextBox 9"/>
-          <p:cNvSpPr txBox="1"/>
-          <p:nvPr/>
-        </p:nvSpPr>
-        <p:spPr>
-          <a:xfrm>
-            <a:off x="777240" y="1097280"/>
-            <a:ext cx="8229600" cy="320040"/>
+              <a:t>08 / 16</a:t>
+            </a:r>
+          </a:p>
+        </p:txBody>
+      </p:sp>
+      <p:sp>
+        <p:nvSpPr>
+          <p:cNvPr id="9" name="TextBox 8"/>
+          <p:cNvSpPr txBox="1"/>
+          <p:nvPr/>
+        </p:nvSpPr>
+        <p:spPr>
+          <a:xfrm>
+            <a:off x="777240" y="1051560"/>
+            <a:ext cx="10058400" cy="320040"/>
           </a:xfrm>
           <a:prstGeom prst="rect">
             <a:avLst/>
@@ -10624,11 +13520,35 @@
                 </a:solidFill>
                 <a:latin typeface="JetBrains Mono"/>
               </a:rPr>
-              <a:t>MANDATORY BASELINE — AND A RESULT THAT SHAPES EVERYTHING</a:t>
-            </a:r>
-          </a:p>
-        </p:txBody>
-      </p:sp>
+              <a:t>BOTH OMICS CARRY DISEASE SIGNAL — AT DIFFERENT SCALES</a:t>
+            </a:r>
+          </a:p>
+        </p:txBody>
+      </p:sp>
+      <p:pic>
+        <p:nvPicPr>
+          <p:cNvPr id="10" name="Picture 9" descr="15_diff_per_group.png"/>
+          <p:cNvPicPr>
+            <a:picLocks noChangeAspect="1"/>
+          </p:cNvPicPr>
+          <p:nvPr/>
+        </p:nvPicPr>
+        <p:blipFill>
+          <a:blip r:embed="rId2"/>
+          <a:stretch>
+            <a:fillRect/>
+          </a:stretch>
+        </p:blipFill>
+        <p:spPr>
+          <a:xfrm>
+            <a:off x="777240" y="1600200"/>
+            <a:ext cx="10634472" cy="3686617"/>
+          </a:xfrm>
+          <a:prstGeom prst="rect">
+            <a:avLst/>
+          </a:prstGeom>
+        </p:spPr>
+      </p:pic>
       <p:sp>
         <p:nvSpPr>
           <p:cNvPr id="11" name="TextBox 10"/>
@@ -10637,8 +13557,8 @@
         </p:nvSpPr>
         <p:spPr>
           <a:xfrm>
-            <a:off x="777240" y="1554480"/>
-            <a:ext cx="4937760" cy="1097280"/>
+            <a:off x="777240" y="5715000"/>
+            <a:ext cx="10607040" cy="365760"/>
           </a:xfrm>
           <a:prstGeom prst="rect">
             <a:avLst/>
@@ -10663,1098 +13583,13 @@
               </a:spcAft>
             </a:pPr>
             <a:r>
-              <a:rPr sz="2600" b="1" i="0">
-                <a:solidFill>
-                  <a:srgbClr val="0A0A0A"/>
-                </a:solidFill>
-                <a:latin typeface="Space Grotesk"/>
-              </a:rPr>
-              <a:t>Mean imputation </a:t>
-            </a:r>
-            <a:r>
-              <a:rPr sz="2600" b="1" i="0">
-                <a:solidFill>
-                  <a:srgbClr val="FF2D55"/>
-                </a:solidFill>
-                <a:latin typeface="Space Grotesk"/>
-              </a:rPr>
-              <a:t>ties or beats</a:t>
-            </a:r>
-            <a:r>
-              <a:rPr sz="2600" b="1" i="0">
-                <a:solidFill>
-                  <a:srgbClr val="0A0A0A"/>
-                </a:solidFill>
-                <a:latin typeface="Space Grotesk"/>
-              </a:rPr>
-              <a:t> KNN and PLS.</a:t>
-            </a:r>
-          </a:p>
-        </p:txBody>
-      </p:sp>
-      <p:sp>
-        <p:nvSpPr>
-          <p:cNvPr id="12" name="TextBox 11"/>
-          <p:cNvSpPr txBox="1"/>
-          <p:nvPr/>
-        </p:nvSpPr>
-        <p:spPr>
-          <a:xfrm>
-            <a:off x="777240" y="2926080"/>
-            <a:ext cx="5120640" cy="2926080"/>
-          </a:xfrm>
-          <a:prstGeom prst="rect">
-            <a:avLst/>
-          </a:prstGeom>
-          <a:noFill/>
-        </p:spPr>
-        <p:txBody>
-          <a:bodyPr wrap="square" anchor="t" lIns="0" rIns="0" tIns="0" bIns="0">
-            <a:spAutoFit/>
-          </a:bodyPr>
-          <a:lstStyle/>
-          <a:p>
-            <a:pPr algn="l">
-              <a:lnSpc>
-                <a:spcPct val="130000"/>
-              </a:lnSpc>
-              <a:spcBef>
-                <a:spcPts val="0"/>
-              </a:spcBef>
-              <a:spcAft>
-                <a:spcPts val="1000"/>
-              </a:spcAft>
-            </a:pPr>
-            <a:r>
-              <a:rPr sz="1250" b="0" i="0">
+              <a:rPr sz="900" b="0" i="0" spc="60">
                 <a:solidFill>
                   <a:srgbClr val="6B6863"/>
                 </a:solidFill>
-                <a:latin typeface="Space Grotesk"/>
-              </a:rPr>
-              <a:t>Drop metabolome for x% of complete samples, impute, recompute distances, Mantel vs. full-data truth.</a:t>
-            </a:r>
-          </a:p>
-          <a:p>
-            <a:pPr algn="l">
-              <a:lnSpc>
-                <a:spcPct val="125000"/>
-              </a:lnSpc>
-              <a:spcBef>
-                <a:spcPts val="0"/>
-              </a:spcBef>
-              <a:spcAft>
-                <a:spcPts val="800"/>
-              </a:spcAft>
-            </a:pPr>
-            <a:r>
-              <a:rPr sz="1250" b="0" i="0">
-                <a:solidFill>
-                  <a:srgbClr val="FF2D55"/>
-                </a:solidFill>
-                <a:latin typeface="Space Grotesk"/>
-              </a:rPr>
-              <a:t>— </a:t>
-            </a:r>
-            <a:r>
-              <a:rPr sz="1250" b="0" i="0">
-                <a:solidFill>
-                  <a:srgbClr val="1C1B19"/>
-                </a:solidFill>
-                <a:latin typeface="Space Grotesk"/>
-              </a:rPr>
-              <a:t>Linear PCA target → a mean-imputed block ≈ 0 after standardising, so it stops contributing.</a:t>
-            </a:r>
-          </a:p>
-          <a:p>
-            <a:pPr algn="l">
-              <a:lnSpc>
-                <a:spcPct val="125000"/>
-              </a:lnSpc>
-              <a:spcBef>
-                <a:spcPts val="0"/>
-              </a:spcBef>
-              <a:spcAft>
-                <a:spcPts val="800"/>
-              </a:spcAft>
-            </a:pPr>
-            <a:r>
-              <a:rPr sz="1250" b="0" i="0">
-                <a:solidFill>
-                  <a:srgbClr val="FF2D55"/>
-                </a:solidFill>
-                <a:latin typeface="Space Grotesk"/>
-              </a:rPr>
-              <a:t>— </a:t>
-            </a:r>
-            <a:r>
-              <a:rPr sz="1250" b="0" i="0">
-                <a:solidFill>
-                  <a:srgbClr val="1C1B19"/>
-                </a:solidFill>
-                <a:latin typeface="Space Grotesk"/>
-              </a:rPr>
-              <a:t>Cross-modal r≤0.38 is too weak for regression to beat that.</a:t>
-            </a:r>
-          </a:p>
-          <a:p>
-            <a:pPr algn="l">
-              <a:lnSpc>
-                <a:spcPct val="125000"/>
-              </a:lnSpc>
-              <a:spcBef>
-                <a:spcPts val="0"/>
-              </a:spcBef>
-              <a:spcAft>
-                <a:spcPts val="800"/>
-              </a:spcAft>
-            </a:pPr>
-            <a:r>
-              <a:rPr sz="1250" b="0" i="0">
-                <a:solidFill>
-                  <a:srgbClr val="FF2D55"/>
-                </a:solidFill>
-                <a:latin typeface="Space Grotesk"/>
-              </a:rPr>
-              <a:t>— </a:t>
-            </a:r>
-            <a:r>
-              <a:rPr sz="1250" b="0" i="0">
-                <a:solidFill>
-                  <a:srgbClr val="1C1B19"/>
-                </a:solidFill>
-                <a:latin typeface="Space Grotesk"/>
-              </a:rPr>
-              <a:t>Bar at 50% missing ≈ 0.77, already cleared trivially.</a:t>
-            </a:r>
-          </a:p>
-        </p:txBody>
-      </p:sp>
-      <p:sp>
-        <p:nvSpPr>
-          <p:cNvPr id="13" name="TextBox 12"/>
-          <p:cNvSpPr txBox="1"/>
-          <p:nvPr/>
-        </p:nvSpPr>
-        <p:spPr>
-          <a:xfrm>
-            <a:off x="6400800" y="1737360"/>
-            <a:ext cx="4937760" cy="365760"/>
-          </a:xfrm>
-          <a:prstGeom prst="rect">
-            <a:avLst/>
-          </a:prstGeom>
-          <a:noFill/>
-        </p:spPr>
-        <p:txBody>
-          <a:bodyPr wrap="square" anchor="t" lIns="0" rIns="0" tIns="0" bIns="0">
-            <a:spAutoFit/>
-          </a:bodyPr>
-          <a:lstStyle/>
-          <a:p/>
-        </p:txBody>
-      </p:sp>
-      <p:sp>
-        <p:nvSpPr>
-          <p:cNvPr id="14" name="TextBox 13"/>
-          <p:cNvSpPr txBox="1"/>
-          <p:nvPr/>
-        </p:nvSpPr>
-        <p:spPr>
-          <a:xfrm>
-            <a:off x="6400800" y="1737360"/>
-            <a:ext cx="1143000" cy="320040"/>
-          </a:xfrm>
-          <a:prstGeom prst="rect">
-            <a:avLst/>
-          </a:prstGeom>
-          <a:noFill/>
-        </p:spPr>
-        <p:txBody>
-          <a:bodyPr wrap="square" anchor="t" lIns="0" rIns="0" tIns="0" bIns="0">
-            <a:spAutoFit/>
-          </a:bodyPr>
-          <a:lstStyle/>
-          <a:p>
-            <a:pPr algn="l">
-              <a:lnSpc>
-                <a:spcPct val="100000"/>
-              </a:lnSpc>
-              <a:spcBef>
-                <a:spcPts val="0"/>
-              </a:spcBef>
-              <a:spcAft>
-                <a:spcPts val="600"/>
-              </a:spcAft>
-            </a:pPr>
-            <a:r>
-              <a:rPr sz="1000" b="0" i="0" spc="120">
-                <a:solidFill>
-                  <a:srgbClr val="6B6863"/>
-                </a:solidFill>
                 <a:latin typeface="JetBrains Mono"/>
               </a:rPr>
-              <a:t>DROPPED</a:t>
-            </a:r>
-          </a:p>
-        </p:txBody>
-      </p:sp>
-      <p:sp>
-        <p:nvSpPr>
-          <p:cNvPr id="15" name="TextBox 14"/>
-          <p:cNvSpPr txBox="1"/>
-          <p:nvPr/>
-        </p:nvSpPr>
-        <p:spPr>
-          <a:xfrm>
-            <a:off x="7955279" y="1737360"/>
-            <a:ext cx="1143000" cy="320040"/>
-          </a:xfrm>
-          <a:prstGeom prst="rect">
-            <a:avLst/>
-          </a:prstGeom>
-          <a:noFill/>
-        </p:spPr>
-        <p:txBody>
-          <a:bodyPr wrap="square" anchor="t" lIns="0" rIns="0" tIns="0" bIns="0">
-            <a:spAutoFit/>
-          </a:bodyPr>
-          <a:lstStyle/>
-          <a:p>
-            <a:pPr algn="r">
-              <a:lnSpc>
-                <a:spcPct val="100000"/>
-              </a:lnSpc>
-              <a:spcBef>
-                <a:spcPts val="0"/>
-              </a:spcBef>
-              <a:spcAft>
-                <a:spcPts val="600"/>
-              </a:spcAft>
-            </a:pPr>
-            <a:r>
-              <a:rPr sz="1000" b="0" i="0" spc="120">
-                <a:solidFill>
-                  <a:srgbClr val="6B6863"/>
-                </a:solidFill>
-                <a:latin typeface="JetBrains Mono"/>
-              </a:rPr>
-              <a:t>MEAN</a:t>
-            </a:r>
-          </a:p>
-        </p:txBody>
-      </p:sp>
-      <p:sp>
-        <p:nvSpPr>
-          <p:cNvPr id="16" name="TextBox 15"/>
-          <p:cNvSpPr txBox="1"/>
-          <p:nvPr/>
-        </p:nvSpPr>
-        <p:spPr>
-          <a:xfrm>
-            <a:off x="9098280" y="1737360"/>
-            <a:ext cx="1143000" cy="320040"/>
-          </a:xfrm>
-          <a:prstGeom prst="rect">
-            <a:avLst/>
-          </a:prstGeom>
-          <a:noFill/>
-        </p:spPr>
-        <p:txBody>
-          <a:bodyPr wrap="square" anchor="t" lIns="0" rIns="0" tIns="0" bIns="0">
-            <a:spAutoFit/>
-          </a:bodyPr>
-          <a:lstStyle/>
-          <a:p>
-            <a:pPr algn="r">
-              <a:lnSpc>
-                <a:spcPct val="100000"/>
-              </a:lnSpc>
-              <a:spcBef>
-                <a:spcPts val="0"/>
-              </a:spcBef>
-              <a:spcAft>
-                <a:spcPts val="600"/>
-              </a:spcAft>
-            </a:pPr>
-            <a:r>
-              <a:rPr sz="1000" b="0" i="0" spc="120">
-                <a:solidFill>
-                  <a:srgbClr val="6B6863"/>
-                </a:solidFill>
-                <a:latin typeface="JetBrains Mono"/>
-              </a:rPr>
-              <a:t>KNN</a:t>
-            </a:r>
-          </a:p>
-        </p:txBody>
-      </p:sp>
-      <p:sp>
-        <p:nvSpPr>
-          <p:cNvPr id="17" name="TextBox 16"/>
-          <p:cNvSpPr txBox="1"/>
-          <p:nvPr/>
-        </p:nvSpPr>
-        <p:spPr>
-          <a:xfrm>
-            <a:off x="10241280" y="1737360"/>
-            <a:ext cx="1143000" cy="320040"/>
-          </a:xfrm>
-          <a:prstGeom prst="rect">
-            <a:avLst/>
-          </a:prstGeom>
-          <a:noFill/>
-        </p:spPr>
-        <p:txBody>
-          <a:bodyPr wrap="square" anchor="t" lIns="0" rIns="0" tIns="0" bIns="0">
-            <a:spAutoFit/>
-          </a:bodyPr>
-          <a:lstStyle/>
-          <a:p>
-            <a:pPr algn="r">
-              <a:lnSpc>
-                <a:spcPct val="100000"/>
-              </a:lnSpc>
-              <a:spcBef>
-                <a:spcPts val="0"/>
-              </a:spcBef>
-              <a:spcAft>
-                <a:spcPts val="600"/>
-              </a:spcAft>
-            </a:pPr>
-            <a:r>
-              <a:rPr sz="1000" b="0" i="0" spc="120">
-                <a:solidFill>
-                  <a:srgbClr val="6B6863"/>
-                </a:solidFill>
-                <a:latin typeface="JetBrains Mono"/>
-              </a:rPr>
-              <a:t>PLS</a:t>
-            </a:r>
-          </a:p>
-        </p:txBody>
-      </p:sp>
-      <p:cxnSp>
-        <p:nvCxnSpPr>
-          <p:cNvPr id="18" name="Connector 17"/>
-          <p:cNvCxnSpPr/>
-          <p:nvPr/>
-        </p:nvCxnSpPr>
-        <p:spPr>
-          <a:xfrm>
-            <a:off x="6400800" y="2121408"/>
-            <a:ext cx="4937760" cy="0"/>
-          </a:xfrm>
-          <a:prstGeom prst="bentConnector3">
-            <a:avLst/>
-          </a:prstGeom>
-          <a:ln w="25400">
-            <a:solidFill>
-              <a:srgbClr val="0A0A0A"/>
-            </a:solidFill>
-          </a:ln>
-        </p:spPr>
-        <p:style>
-          <a:lnRef idx="2">
-            <a:schemeClr val="accent1"/>
-          </a:lnRef>
-          <a:fillRef idx="0">
-            <a:schemeClr val="accent1"/>
-          </a:fillRef>
-          <a:effectRef idx="1">
-            <a:schemeClr val="accent1"/>
-          </a:effectRef>
-          <a:fontRef idx="minor">
-            <a:schemeClr val="tx1"/>
-          </a:fontRef>
-        </p:style>
-      </p:cxnSp>
-      <p:sp>
-        <p:nvSpPr>
-          <p:cNvPr id="19" name="TextBox 18"/>
-          <p:cNvSpPr txBox="1"/>
-          <p:nvPr/>
-        </p:nvSpPr>
-        <p:spPr>
-          <a:xfrm>
-            <a:off x="6400800" y="2304288"/>
-            <a:ext cx="1143000" cy="457200"/>
-          </a:xfrm>
-          <a:prstGeom prst="rect">
-            <a:avLst/>
-          </a:prstGeom>
-          <a:noFill/>
-        </p:spPr>
-        <p:txBody>
-          <a:bodyPr wrap="square" anchor="t" lIns="0" rIns="0" tIns="0" bIns="0">
-            <a:spAutoFit/>
-          </a:bodyPr>
-          <a:lstStyle/>
-          <a:p>
-            <a:pPr algn="l">
-              <a:lnSpc>
-                <a:spcPct val="100000"/>
-              </a:lnSpc>
-              <a:spcBef>
-                <a:spcPts val="0"/>
-              </a:spcBef>
-              <a:spcAft>
-                <a:spcPts val="600"/>
-              </a:spcAft>
-            </a:pPr>
-            <a:r>
-              <a:rPr sz="1300" b="0" i="0">
-                <a:solidFill>
-                  <a:srgbClr val="6B6863"/>
-                </a:solidFill>
-                <a:latin typeface="JetBrains Mono"/>
-              </a:rPr>
-              <a:t>10%</a:t>
-            </a:r>
-          </a:p>
-        </p:txBody>
-      </p:sp>
-      <p:sp>
-        <p:nvSpPr>
-          <p:cNvPr id="20" name="TextBox 19"/>
-          <p:cNvSpPr txBox="1"/>
-          <p:nvPr/>
-        </p:nvSpPr>
-        <p:spPr>
-          <a:xfrm>
-            <a:off x="7955279" y="2258568"/>
-            <a:ext cx="1143000" cy="457200"/>
-          </a:xfrm>
-          <a:prstGeom prst="rect">
-            <a:avLst/>
-          </a:prstGeom>
-          <a:noFill/>
-        </p:spPr>
-        <p:txBody>
-          <a:bodyPr wrap="square" anchor="t" lIns="0" rIns="0" tIns="0" bIns="0">
-            <a:spAutoFit/>
-          </a:bodyPr>
-          <a:lstStyle/>
-          <a:p>
-            <a:pPr algn="r">
-              <a:lnSpc>
-                <a:spcPct val="100000"/>
-              </a:lnSpc>
-              <a:spcBef>
-                <a:spcPts val="0"/>
-              </a:spcBef>
-              <a:spcAft>
-                <a:spcPts val="600"/>
-              </a:spcAft>
-            </a:pPr>
-            <a:r>
-              <a:rPr sz="2200" b="1" i="0">
-                <a:solidFill>
-                  <a:srgbClr val="FF2D55"/>
-                </a:solidFill>
-                <a:latin typeface="JetBrains Mono"/>
-              </a:rPr>
-              <a:t>0.957</a:t>
-            </a:r>
-          </a:p>
-        </p:txBody>
-      </p:sp>
-      <p:sp>
-        <p:nvSpPr>
-          <p:cNvPr id="21" name="TextBox 20"/>
-          <p:cNvSpPr txBox="1"/>
-          <p:nvPr/>
-        </p:nvSpPr>
-        <p:spPr>
-          <a:xfrm>
-            <a:off x="9098280" y="2258568"/>
-            <a:ext cx="1143000" cy="457200"/>
-          </a:xfrm>
-          <a:prstGeom prst="rect">
-            <a:avLst/>
-          </a:prstGeom>
-          <a:noFill/>
-        </p:spPr>
-        <p:txBody>
-          <a:bodyPr wrap="square" anchor="t" lIns="0" rIns="0" tIns="0" bIns="0">
-            <a:spAutoFit/>
-          </a:bodyPr>
-          <a:lstStyle/>
-          <a:p>
-            <a:pPr algn="r">
-              <a:lnSpc>
-                <a:spcPct val="100000"/>
-              </a:lnSpc>
-              <a:spcBef>
-                <a:spcPts val="0"/>
-              </a:spcBef>
-              <a:spcAft>
-                <a:spcPts val="600"/>
-              </a:spcAft>
-            </a:pPr>
-            <a:r>
-              <a:rPr sz="2200" b="0" i="0">
-                <a:solidFill>
-                  <a:srgbClr val="0A0A0A"/>
-                </a:solidFill>
-                <a:latin typeface="JetBrains Mono"/>
-              </a:rPr>
-              <a:t>0.956</a:t>
-            </a:r>
-          </a:p>
-        </p:txBody>
-      </p:sp>
-      <p:sp>
-        <p:nvSpPr>
-          <p:cNvPr id="22" name="TextBox 21"/>
-          <p:cNvSpPr txBox="1"/>
-          <p:nvPr/>
-        </p:nvSpPr>
-        <p:spPr>
-          <a:xfrm>
-            <a:off x="10241280" y="2258568"/>
-            <a:ext cx="1143000" cy="457200"/>
-          </a:xfrm>
-          <a:prstGeom prst="rect">
-            <a:avLst/>
-          </a:prstGeom>
-          <a:noFill/>
-        </p:spPr>
-        <p:txBody>
-          <a:bodyPr wrap="square" anchor="t" lIns="0" rIns="0" tIns="0" bIns="0">
-            <a:spAutoFit/>
-          </a:bodyPr>
-          <a:lstStyle/>
-          <a:p>
-            <a:pPr algn="r">
-              <a:lnSpc>
-                <a:spcPct val="100000"/>
-              </a:lnSpc>
-              <a:spcBef>
-                <a:spcPts val="0"/>
-              </a:spcBef>
-              <a:spcAft>
-                <a:spcPts val="600"/>
-              </a:spcAft>
-            </a:pPr>
-            <a:r>
-              <a:rPr sz="2200" b="0" i="0">
-                <a:solidFill>
-                  <a:srgbClr val="0A0A0A"/>
-                </a:solidFill>
-                <a:latin typeface="JetBrains Mono"/>
-              </a:rPr>
-              <a:t>0.955</a:t>
-            </a:r>
-          </a:p>
-        </p:txBody>
-      </p:sp>
-      <p:cxnSp>
-        <p:nvCxnSpPr>
-          <p:cNvPr id="23" name="Connector 22"/>
-          <p:cNvCxnSpPr/>
-          <p:nvPr/>
-        </p:nvCxnSpPr>
-        <p:spPr>
-          <a:xfrm>
-            <a:off x="6400800" y="2871216"/>
-            <a:ext cx="4937760" cy="0"/>
-          </a:xfrm>
-          <a:prstGeom prst="bentConnector3">
-            <a:avLst/>
-          </a:prstGeom>
-          <a:ln w="12700">
-            <a:solidFill>
-              <a:srgbClr val="DAD7CF"/>
-            </a:solidFill>
-          </a:ln>
-        </p:spPr>
-        <p:style>
-          <a:lnRef idx="2">
-            <a:schemeClr val="accent1"/>
-          </a:lnRef>
-          <a:fillRef idx="0">
-            <a:schemeClr val="accent1"/>
-          </a:fillRef>
-          <a:effectRef idx="1">
-            <a:schemeClr val="accent1"/>
-          </a:effectRef>
-          <a:fontRef idx="minor">
-            <a:schemeClr val="tx1"/>
-          </a:fontRef>
-        </p:style>
-      </p:cxnSp>
-      <p:sp>
-        <p:nvSpPr>
-          <p:cNvPr id="24" name="TextBox 23"/>
-          <p:cNvSpPr txBox="1"/>
-          <p:nvPr/>
-        </p:nvSpPr>
-        <p:spPr>
-          <a:xfrm>
-            <a:off x="6400800" y="3017520"/>
-            <a:ext cx="1143000" cy="457200"/>
-          </a:xfrm>
-          <a:prstGeom prst="rect">
-            <a:avLst/>
-          </a:prstGeom>
-          <a:noFill/>
-        </p:spPr>
-        <p:txBody>
-          <a:bodyPr wrap="square" anchor="t" lIns="0" rIns="0" tIns="0" bIns="0">
-            <a:spAutoFit/>
-          </a:bodyPr>
-          <a:lstStyle/>
-          <a:p>
-            <a:pPr algn="l">
-              <a:lnSpc>
-                <a:spcPct val="100000"/>
-              </a:lnSpc>
-              <a:spcBef>
-                <a:spcPts val="0"/>
-              </a:spcBef>
-              <a:spcAft>
-                <a:spcPts val="600"/>
-              </a:spcAft>
-            </a:pPr>
-            <a:r>
-              <a:rPr sz="1300" b="0" i="0">
-                <a:solidFill>
-                  <a:srgbClr val="6B6863"/>
-                </a:solidFill>
-                <a:latin typeface="JetBrains Mono"/>
-              </a:rPr>
-              <a:t>30%</a:t>
-            </a:r>
-          </a:p>
-        </p:txBody>
-      </p:sp>
-      <p:sp>
-        <p:nvSpPr>
-          <p:cNvPr id="25" name="TextBox 24"/>
-          <p:cNvSpPr txBox="1"/>
-          <p:nvPr/>
-        </p:nvSpPr>
-        <p:spPr>
-          <a:xfrm>
-            <a:off x="7955279" y="2971800"/>
-            <a:ext cx="1143000" cy="457200"/>
-          </a:xfrm>
-          <a:prstGeom prst="rect">
-            <a:avLst/>
-          </a:prstGeom>
-          <a:noFill/>
-        </p:spPr>
-        <p:txBody>
-          <a:bodyPr wrap="square" anchor="t" lIns="0" rIns="0" tIns="0" bIns="0">
-            <a:spAutoFit/>
-          </a:bodyPr>
-          <a:lstStyle/>
-          <a:p>
-            <a:pPr algn="r">
-              <a:lnSpc>
-                <a:spcPct val="100000"/>
-              </a:lnSpc>
-              <a:spcBef>
-                <a:spcPts val="0"/>
-              </a:spcBef>
-              <a:spcAft>
-                <a:spcPts val="600"/>
-              </a:spcAft>
-            </a:pPr>
-            <a:r>
-              <a:rPr sz="2200" b="1" i="0">
-                <a:solidFill>
-                  <a:srgbClr val="FF2D55"/>
-                </a:solidFill>
-                <a:latin typeface="JetBrains Mono"/>
-              </a:rPr>
-              <a:t>0.888</a:t>
-            </a:r>
-          </a:p>
-        </p:txBody>
-      </p:sp>
-      <p:sp>
-        <p:nvSpPr>
-          <p:cNvPr id="26" name="TextBox 25"/>
-          <p:cNvSpPr txBox="1"/>
-          <p:nvPr/>
-        </p:nvSpPr>
-        <p:spPr>
-          <a:xfrm>
-            <a:off x="9098280" y="2971800"/>
-            <a:ext cx="1143000" cy="457200"/>
-          </a:xfrm>
-          <a:prstGeom prst="rect">
-            <a:avLst/>
-          </a:prstGeom>
-          <a:noFill/>
-        </p:spPr>
-        <p:txBody>
-          <a:bodyPr wrap="square" anchor="t" lIns="0" rIns="0" tIns="0" bIns="0">
-            <a:spAutoFit/>
-          </a:bodyPr>
-          <a:lstStyle/>
-          <a:p>
-            <a:pPr algn="r">
-              <a:lnSpc>
-                <a:spcPct val="100000"/>
-              </a:lnSpc>
-              <a:spcBef>
-                <a:spcPts val="0"/>
-              </a:spcBef>
-              <a:spcAft>
-                <a:spcPts val="600"/>
-              </a:spcAft>
-            </a:pPr>
-            <a:r>
-              <a:rPr sz="2200" b="0" i="0">
-                <a:solidFill>
-                  <a:srgbClr val="0A0A0A"/>
-                </a:solidFill>
-                <a:latin typeface="JetBrains Mono"/>
-              </a:rPr>
-              <a:t>0.876</a:t>
-            </a:r>
-          </a:p>
-        </p:txBody>
-      </p:sp>
-      <p:sp>
-        <p:nvSpPr>
-          <p:cNvPr id="27" name="TextBox 26"/>
-          <p:cNvSpPr txBox="1"/>
-          <p:nvPr/>
-        </p:nvSpPr>
-        <p:spPr>
-          <a:xfrm>
-            <a:off x="10241280" y="2971800"/>
-            <a:ext cx="1143000" cy="457200"/>
-          </a:xfrm>
-          <a:prstGeom prst="rect">
-            <a:avLst/>
-          </a:prstGeom>
-          <a:noFill/>
-        </p:spPr>
-        <p:txBody>
-          <a:bodyPr wrap="square" anchor="t" lIns="0" rIns="0" tIns="0" bIns="0">
-            <a:spAutoFit/>
-          </a:bodyPr>
-          <a:lstStyle/>
-          <a:p>
-            <a:pPr algn="r">
-              <a:lnSpc>
-                <a:spcPct val="100000"/>
-              </a:lnSpc>
-              <a:spcBef>
-                <a:spcPts val="0"/>
-              </a:spcBef>
-              <a:spcAft>
-                <a:spcPts val="600"/>
-              </a:spcAft>
-            </a:pPr>
-            <a:r>
-              <a:rPr sz="2200" b="0" i="0">
-                <a:solidFill>
-                  <a:srgbClr val="0A0A0A"/>
-                </a:solidFill>
-                <a:latin typeface="JetBrains Mono"/>
-              </a:rPr>
-              <a:t>0.872</a:t>
-            </a:r>
-          </a:p>
-        </p:txBody>
-      </p:sp>
-      <p:cxnSp>
-        <p:nvCxnSpPr>
-          <p:cNvPr id="28" name="Connector 27"/>
-          <p:cNvCxnSpPr/>
-          <p:nvPr/>
-        </p:nvCxnSpPr>
-        <p:spPr>
-          <a:xfrm>
-            <a:off x="6400800" y="3584448"/>
-            <a:ext cx="4937760" cy="0"/>
-          </a:xfrm>
-          <a:prstGeom prst="bentConnector3">
-            <a:avLst/>
-          </a:prstGeom>
-          <a:ln w="12700">
-            <a:solidFill>
-              <a:srgbClr val="DAD7CF"/>
-            </a:solidFill>
-          </a:ln>
-        </p:spPr>
-        <p:style>
-          <a:lnRef idx="2">
-            <a:schemeClr val="accent1"/>
-          </a:lnRef>
-          <a:fillRef idx="0">
-            <a:schemeClr val="accent1"/>
-          </a:fillRef>
-          <a:effectRef idx="1">
-            <a:schemeClr val="accent1"/>
-          </a:effectRef>
-          <a:fontRef idx="minor">
-            <a:schemeClr val="tx1"/>
-          </a:fontRef>
-        </p:style>
-      </p:cxnSp>
-      <p:sp>
-        <p:nvSpPr>
-          <p:cNvPr id="29" name="TextBox 28"/>
-          <p:cNvSpPr txBox="1"/>
-          <p:nvPr/>
-        </p:nvSpPr>
-        <p:spPr>
-          <a:xfrm>
-            <a:off x="6400800" y="3730752"/>
-            <a:ext cx="1143000" cy="457200"/>
-          </a:xfrm>
-          <a:prstGeom prst="rect">
-            <a:avLst/>
-          </a:prstGeom>
-          <a:noFill/>
-        </p:spPr>
-        <p:txBody>
-          <a:bodyPr wrap="square" anchor="t" lIns="0" rIns="0" tIns="0" bIns="0">
-            <a:spAutoFit/>
-          </a:bodyPr>
-          <a:lstStyle/>
-          <a:p>
-            <a:pPr algn="l">
-              <a:lnSpc>
-                <a:spcPct val="100000"/>
-              </a:lnSpc>
-              <a:spcBef>
-                <a:spcPts val="0"/>
-              </a:spcBef>
-              <a:spcAft>
-                <a:spcPts val="600"/>
-              </a:spcAft>
-            </a:pPr>
-            <a:r>
-              <a:rPr sz="1300" b="0" i="0">
-                <a:solidFill>
-                  <a:srgbClr val="6B6863"/>
-                </a:solidFill>
-                <a:latin typeface="JetBrains Mono"/>
-              </a:rPr>
-              <a:t>50%</a:t>
-            </a:r>
-          </a:p>
-        </p:txBody>
-      </p:sp>
-      <p:sp>
-        <p:nvSpPr>
-          <p:cNvPr id="30" name="TextBox 29"/>
-          <p:cNvSpPr txBox="1"/>
-          <p:nvPr/>
-        </p:nvSpPr>
-        <p:spPr>
-          <a:xfrm>
-            <a:off x="7955279" y="3685032"/>
-            <a:ext cx="1143000" cy="457200"/>
-          </a:xfrm>
-          <a:prstGeom prst="rect">
-            <a:avLst/>
-          </a:prstGeom>
-          <a:noFill/>
-        </p:spPr>
-        <p:txBody>
-          <a:bodyPr wrap="square" anchor="t" lIns="0" rIns="0" tIns="0" bIns="0">
-            <a:spAutoFit/>
-          </a:bodyPr>
-          <a:lstStyle/>
-          <a:p>
-            <a:pPr algn="r">
-              <a:lnSpc>
-                <a:spcPct val="100000"/>
-              </a:lnSpc>
-              <a:spcBef>
-                <a:spcPts val="0"/>
-              </a:spcBef>
-              <a:spcAft>
-                <a:spcPts val="600"/>
-              </a:spcAft>
-            </a:pPr>
-            <a:r>
-              <a:rPr sz="2200" b="1" i="0">
-                <a:solidFill>
-                  <a:srgbClr val="FF2D55"/>
-                </a:solidFill>
-                <a:latin typeface="JetBrains Mono"/>
-              </a:rPr>
-              <a:t>0.773</a:t>
-            </a:r>
-          </a:p>
-        </p:txBody>
-      </p:sp>
-      <p:sp>
-        <p:nvSpPr>
-          <p:cNvPr id="31" name="TextBox 30"/>
-          <p:cNvSpPr txBox="1"/>
-          <p:nvPr/>
-        </p:nvSpPr>
-        <p:spPr>
-          <a:xfrm>
-            <a:off x="9098280" y="3685032"/>
-            <a:ext cx="1143000" cy="457200"/>
-          </a:xfrm>
-          <a:prstGeom prst="rect">
-            <a:avLst/>
-          </a:prstGeom>
-          <a:noFill/>
-        </p:spPr>
-        <p:txBody>
-          <a:bodyPr wrap="square" anchor="t" lIns="0" rIns="0" tIns="0" bIns="0">
-            <a:spAutoFit/>
-          </a:bodyPr>
-          <a:lstStyle/>
-          <a:p>
-            <a:pPr algn="r">
-              <a:lnSpc>
-                <a:spcPct val="100000"/>
-              </a:lnSpc>
-              <a:spcBef>
-                <a:spcPts val="0"/>
-              </a:spcBef>
-              <a:spcAft>
-                <a:spcPts val="600"/>
-              </a:spcAft>
-            </a:pPr>
-            <a:r>
-              <a:rPr sz="2200" b="0" i="0">
-                <a:solidFill>
-                  <a:srgbClr val="0A0A0A"/>
-                </a:solidFill>
-                <a:latin typeface="JetBrains Mono"/>
-              </a:rPr>
-              <a:t>0.76</a:t>
-            </a:r>
-          </a:p>
-        </p:txBody>
-      </p:sp>
-      <p:sp>
-        <p:nvSpPr>
-          <p:cNvPr id="32" name="TextBox 31"/>
-          <p:cNvSpPr txBox="1"/>
-          <p:nvPr/>
-        </p:nvSpPr>
-        <p:spPr>
-          <a:xfrm>
-            <a:off x="10241280" y="3685032"/>
-            <a:ext cx="1143000" cy="457200"/>
-          </a:xfrm>
-          <a:prstGeom prst="rect">
-            <a:avLst/>
-          </a:prstGeom>
-          <a:noFill/>
-        </p:spPr>
-        <p:txBody>
-          <a:bodyPr wrap="square" anchor="t" lIns="0" rIns="0" tIns="0" bIns="0">
-            <a:spAutoFit/>
-          </a:bodyPr>
-          <a:lstStyle/>
-          <a:p>
-            <a:pPr algn="r">
-              <a:lnSpc>
-                <a:spcPct val="100000"/>
-              </a:lnSpc>
-              <a:spcBef>
-                <a:spcPts val="0"/>
-              </a:spcBef>
-              <a:spcAft>
-                <a:spcPts val="600"/>
-              </a:spcAft>
-            </a:pPr>
-            <a:r>
-              <a:rPr sz="2200" b="0" i="0">
-                <a:solidFill>
-                  <a:srgbClr val="0A0A0A"/>
-                </a:solidFill>
-                <a:latin typeface="JetBrains Mono"/>
-              </a:rPr>
-              <a:t>0.768</a:t>
-            </a:r>
-          </a:p>
-        </p:txBody>
-      </p:sp>
-      <p:cxnSp>
-        <p:nvCxnSpPr>
-          <p:cNvPr id="33" name="Connector 32"/>
-          <p:cNvCxnSpPr/>
-          <p:nvPr/>
-        </p:nvCxnSpPr>
-        <p:spPr>
-          <a:xfrm>
-            <a:off x="6400800" y="4297680"/>
-            <a:ext cx="4937760" cy="0"/>
-          </a:xfrm>
-          <a:prstGeom prst="bentConnector3">
-            <a:avLst/>
-          </a:prstGeom>
-          <a:ln w="12700">
-            <a:solidFill>
-              <a:srgbClr val="DAD7CF"/>
-            </a:solidFill>
-          </a:ln>
-        </p:spPr>
-        <p:style>
-          <a:lnRef idx="2">
-            <a:schemeClr val="accent1"/>
-          </a:lnRef>
-          <a:fillRef idx="0">
-            <a:schemeClr val="accent1"/>
-          </a:fillRef>
-          <a:effectRef idx="1">
-            <a:schemeClr val="accent1"/>
-          </a:effectRef>
-          <a:fontRef idx="minor">
-            <a:schemeClr val="tx1"/>
-          </a:fontRef>
-        </p:style>
-      </p:cxnSp>
-      <p:sp>
-        <p:nvSpPr>
-          <p:cNvPr id="34" name="TextBox 33"/>
-          <p:cNvSpPr txBox="1"/>
-          <p:nvPr/>
-        </p:nvSpPr>
-        <p:spPr>
-          <a:xfrm>
-            <a:off x="777240" y="5852160"/>
-            <a:ext cx="5486400" cy="320040"/>
-          </a:xfrm>
-          <a:prstGeom prst="rect">
-            <a:avLst/>
-          </a:prstGeom>
-          <a:noFill/>
-        </p:spPr>
-        <p:txBody>
-          <a:bodyPr wrap="square" anchor="t" lIns="0" rIns="0" tIns="0" bIns="0">
-            <a:spAutoFit/>
-          </a:bodyPr>
-          <a:lstStyle/>
-          <a:p>
-            <a:pPr algn="l">
-              <a:lnSpc>
-                <a:spcPct val="100000"/>
-              </a:lnSpc>
-              <a:spcBef>
-                <a:spcPts val="0"/>
-              </a:spcBef>
-              <a:spcAft>
-                <a:spcPts val="600"/>
-              </a:spcAft>
-            </a:pPr>
-            <a:r>
-              <a:rPr sz="900" b="0" i="0" spc="80">
-                <a:solidFill>
-                  <a:srgbClr val="6B6863"/>
-                </a:solidFill>
-                <a:latin typeface="JetBrains Mono"/>
-              </a:rPr>
-              <a:t>MANTEL R VS. PCA-2PC GROUND TRUTH · ● = BEST IN ROW</a:t>
+              <a:t>VS. CONTROL, FDR&lt;0.05 · UP TO 131 SPECIES AND 77 METABOLITES DIFFER · METABOLOME SHIFTS ARE BROAD</a:t>
             </a:r>
           </a:p>
         </p:txBody>
@@ -11959,7 +13794,7 @@
                 </a:solidFill>
                 <a:latin typeface="JetBrains Mono"/>
               </a:rPr>
-              <a:t>METHOD SELECTION</a:t>
+              <a:t>EXPLORATION / COUPLING</a:t>
             </a:r>
           </a:p>
         </p:txBody>
@@ -12119,7 +13954,7 @@
                 </a:solidFill>
                 <a:latin typeface="JetBrains Mono"/>
               </a:rPr>
-              <a:t>09 / 13</a:t>
+              <a:t>09 / 16</a:t>
             </a:r>
           </a:p>
         </p:txBody>
@@ -12132,8 +13967,8 @@
         </p:nvSpPr>
         <p:spPr>
           <a:xfrm>
-            <a:off x="777240" y="1371600"/>
-            <a:ext cx="8229600" cy="320040"/>
+            <a:off x="777240" y="1051560"/>
+            <a:ext cx="10058400" cy="320040"/>
           </a:xfrm>
           <a:prstGeom prst="rect">
             <a:avLst/>
@@ -12164,21 +13999,45 @@
                 </a:solidFill>
                 <a:latin typeface="JetBrains Mono"/>
               </a:rPr>
-              <a:t>HOW WE CHOSE THE INSPIRING METHODS</a:t>
-            </a:r>
-          </a:p>
-        </p:txBody>
-      </p:sp>
-      <p:sp>
-        <p:nvSpPr>
-          <p:cNvPr id="11" name="TextBox 10"/>
-          <p:cNvSpPr txBox="1"/>
-          <p:nvPr/>
-        </p:nvSpPr>
-        <p:spPr>
-          <a:xfrm>
-            <a:off x="777240" y="1783080"/>
-            <a:ext cx="10058400" cy="822960"/>
+              <a:t>CROSS-OMICS COUPLING IS WEAK — THIS CAPS IMPUTATION</a:t>
+            </a:r>
+          </a:p>
+        </p:txBody>
+      </p:sp>
+      <p:pic>
+        <p:nvPicPr>
+          <p:cNvPr id="11" name="Picture 10" descr="09_cross_omics_corr.png"/>
+          <p:cNvPicPr>
+            <a:picLocks noChangeAspect="1"/>
+          </p:cNvPicPr>
+          <p:nvPr/>
+        </p:nvPicPr>
+        <p:blipFill>
+          <a:blip r:embed="rId2"/>
+          <a:stretch>
+            <a:fillRect/>
+          </a:stretch>
+        </p:blipFill>
+        <p:spPr>
+          <a:xfrm>
+            <a:off x="777240" y="1691640"/>
+            <a:ext cx="5730240" cy="4297680"/>
+          </a:xfrm>
+          <a:prstGeom prst="rect">
+            <a:avLst/>
+          </a:prstGeom>
+        </p:spPr>
+      </p:pic>
+      <p:sp>
+        <p:nvSpPr>
+          <p:cNvPr id="12" name="TextBox 11"/>
+          <p:cNvSpPr txBox="1"/>
+          <p:nvPr/>
+        </p:nvSpPr>
+        <p:spPr>
+          <a:xfrm>
+            <a:off x="7132320" y="1920240"/>
+            <a:ext cx="4206240" cy="914400"/>
           </a:xfrm>
           <a:prstGeom prst="rect">
             <a:avLst/>
@@ -12193,6 +14052,51 @@
           <a:p>
             <a:pPr algn="l">
               <a:lnSpc>
+                <a:spcPct val="95000"/>
+              </a:lnSpc>
+              <a:spcBef>
+                <a:spcPts val="0"/>
+              </a:spcBef>
+              <a:spcAft>
+                <a:spcPts val="600"/>
+              </a:spcAft>
+            </a:pPr>
+            <a:r>
+              <a:rPr sz="5200" b="1" i="0">
+                <a:solidFill>
+                  <a:srgbClr val="FF2D55"/>
+                </a:solidFill>
+                <a:latin typeface="Space Grotesk"/>
+              </a:rPr>
+              <a:t>0.382</a:t>
+            </a:r>
+          </a:p>
+        </p:txBody>
+      </p:sp>
+      <p:sp>
+        <p:nvSpPr>
+          <p:cNvPr id="13" name="TextBox 12"/>
+          <p:cNvSpPr txBox="1"/>
+          <p:nvPr/>
+        </p:nvSpPr>
+        <p:spPr>
+          <a:xfrm>
+            <a:off x="7132320" y="2633472"/>
+            <a:ext cx="4206240" cy="457200"/>
+          </a:xfrm>
+          <a:prstGeom prst="rect">
+            <a:avLst/>
+          </a:prstGeom>
+          <a:noFill/>
+        </p:spPr>
+        <p:txBody>
+          <a:bodyPr wrap="square" anchor="t" lIns="0" rIns="0" tIns="0" bIns="0">
+            <a:spAutoFit/>
+          </a:bodyPr>
+          <a:lstStyle/>
+          <a:p>
+            <a:pPr algn="l">
+              <a:lnSpc>
                 <a:spcPct val="100000"/>
               </a:lnSpc>
               <a:spcBef>
@@ -12203,263 +14107,76 @@
               </a:spcAft>
             </a:pPr>
             <a:r>
-              <a:rPr sz="2600" b="1" i="0">
-                <a:solidFill>
-                  <a:srgbClr val="0A0A0A"/>
+              <a:rPr sz="900" b="0" i="0" spc="120">
+                <a:solidFill>
+                  <a:srgbClr val="6B6863"/>
+                </a:solidFill>
+                <a:latin typeface="JetBrains Mono"/>
+              </a:rPr>
+              <a:t>MAX |SPEARMAN| TAXA ↔ METABOLITE</a:t>
+            </a:r>
+          </a:p>
+        </p:txBody>
+      </p:sp>
+      <p:sp>
+        <p:nvSpPr>
+          <p:cNvPr id="14" name="TextBox 13"/>
+          <p:cNvSpPr txBox="1"/>
+          <p:nvPr/>
+        </p:nvSpPr>
+        <p:spPr>
+          <a:xfrm>
+            <a:off x="7132320" y="3200400"/>
+            <a:ext cx="4206240" cy="2560320"/>
+          </a:xfrm>
+          <a:prstGeom prst="rect">
+            <a:avLst/>
+          </a:prstGeom>
+          <a:noFill/>
+        </p:spPr>
+        <p:txBody>
+          <a:bodyPr wrap="square" anchor="t" lIns="0" rIns="0" tIns="0" bIns="0">
+            <a:spAutoFit/>
+          </a:bodyPr>
+          <a:lstStyle/>
+          <a:p>
+            <a:pPr algn="l">
+              <a:lnSpc>
+                <a:spcPct val="130000"/>
+              </a:lnSpc>
+              <a:spcBef>
+                <a:spcPts val="0"/>
+              </a:spcBef>
+              <a:spcAft>
+                <a:spcPts val="600"/>
+              </a:spcAft>
+            </a:pPr>
+            <a:r>
+              <a:rPr sz="1400" b="0" i="0">
+                <a:solidFill>
+                  <a:srgbClr val="1C1B19"/>
                 </a:solidFill>
                 <a:latin typeface="Space Grotesk"/>
               </a:rPr>
-              <a:t>Broad cross-field scout, then an adversarial review.</a:t>
-            </a:r>
-          </a:p>
-        </p:txBody>
-      </p:sp>
-      <p:sp>
-        <p:nvSpPr>
-          <p:cNvPr id="12" name="TextBox 11"/>
-          <p:cNvSpPr txBox="1"/>
-          <p:nvPr/>
-        </p:nvSpPr>
-        <p:spPr>
-          <a:xfrm>
-            <a:off x="777240" y="2743200"/>
-            <a:ext cx="10424160" cy="1828800"/>
-          </a:xfrm>
-          <a:prstGeom prst="rect">
-            <a:avLst/>
-          </a:prstGeom>
-          <a:noFill/>
-        </p:spPr>
-        <p:txBody>
-          <a:bodyPr wrap="square" anchor="t" lIns="0" rIns="0" tIns="0" bIns="0">
-            <a:spAutoFit/>
-          </a:bodyPr>
-          <a:lstStyle/>
-          <a:p>
-            <a:pPr algn="l">
-              <a:lnSpc>
-                <a:spcPct val="130000"/>
-              </a:lnSpc>
-              <a:spcBef>
-                <a:spcPts val="0"/>
-              </a:spcBef>
-              <a:spcAft>
-                <a:spcPts val="900"/>
-              </a:spcAft>
-            </a:pPr>
-            <a:r>
-              <a:rPr sz="1450" b="0" i="0">
+              <a:t>Both partners find it independently (ρ &lt; 0.25 in the top pairs). Only a metabolite-specific subset is predictable from microbiome → cross-modal recovery has a </a:t>
+            </a:r>
+            <a:r>
+              <a:rPr sz="1400" b="1" i="0">
                 <a:solidFill>
                   <a:srgbClr val="FF2D55"/>
                 </a:solidFill>
                 <a:latin typeface="Space Grotesk"/>
               </a:rPr>
-              <a:t>— </a:t>
-            </a:r>
-            <a:r>
-              <a:rPr sz="1450" b="1" i="0">
+              <a:t>low ceiling</a:t>
+            </a:r>
+            <a:r>
+              <a:rPr sz="1400" b="0" i="0">
                 <a:solidFill>
                   <a:srgbClr val="1C1B19"/>
                 </a:solidFill>
                 <a:latin typeface="Space Grotesk"/>
               </a:rPr>
-              <a:t>Filter 1</a:t>
-            </a:r>
-            <a:r>
-              <a:rPr sz="1450" b="0" i="0">
-                <a:solidFill>
-                  <a:srgbClr val="1C1B19"/>
-                </a:solidFill>
-                <a:latin typeface="Space Grotesk"/>
-              </a:rPr>
-              <a:t> — sound for a linear Mantel target (deep/nonlinear methods risk decorrelating).</a:t>
-            </a:r>
-          </a:p>
-          <a:p>
-            <a:pPr algn="l">
-              <a:lnSpc>
-                <a:spcPct val="130000"/>
-              </a:lnSpc>
-              <a:spcBef>
-                <a:spcPts val="0"/>
-              </a:spcBef>
-              <a:spcAft>
-                <a:spcPts val="900"/>
-              </a:spcAft>
-            </a:pPr>
-            <a:r>
-              <a:rPr sz="1450" b="0" i="0">
-                <a:solidFill>
-                  <a:srgbClr val="FF2D55"/>
-                </a:solidFill>
-                <a:latin typeface="Space Grotesk"/>
-              </a:rPr>
-              <a:t>— </a:t>
-            </a:r>
-            <a:r>
-              <a:rPr sz="1450" b="1" i="0">
-                <a:solidFill>
-                  <a:srgbClr val="1C1B19"/>
-                </a:solidFill>
-                <a:latin typeface="Space Grotesk"/>
-              </a:rPr>
-              <a:t>Filter 2</a:t>
-            </a:r>
-            <a:r>
-              <a:rPr sz="1450" b="0" i="0">
-                <a:solidFill>
-                  <a:srgbClr val="1C1B19"/>
-                </a:solidFill>
-                <a:latin typeface="Space Grotesk"/>
-              </a:rPr>
-              <a:t> — native whole-modality missingness, not entry-level imputation.</a:t>
-            </a:r>
-          </a:p>
-          <a:p>
-            <a:pPr algn="l">
-              <a:lnSpc>
-                <a:spcPct val="130000"/>
-              </a:lnSpc>
-              <a:spcBef>
-                <a:spcPts val="0"/>
-              </a:spcBef>
-              <a:spcAft>
-                <a:spcPts val="900"/>
-              </a:spcAft>
-            </a:pPr>
-            <a:r>
-              <a:rPr sz="1450" b="0" i="0">
-                <a:solidFill>
-                  <a:srgbClr val="FF2D55"/>
-                </a:solidFill>
-                <a:latin typeface="Space Grotesk"/>
-              </a:rPr>
-              <a:t>— </a:t>
-            </a:r>
-            <a:r>
-              <a:rPr sz="1450" b="1" i="0">
-                <a:solidFill>
-                  <a:srgbClr val="1C1B19"/>
-                </a:solidFill>
-                <a:latin typeface="Space Grotesk"/>
-              </a:rPr>
-              <a:t>Filter 3</a:t>
-            </a:r>
-            <a:r>
-              <a:rPr sz="1450" b="0" i="0">
-                <a:solidFill>
-                  <a:srgbClr val="1C1B19"/>
-                </a:solidFill>
-                <a:latin typeface="Space Grotesk"/>
-              </a:rPr>
-              <a:t> — genuinely cutting-edge (2024–2026), novel for microbiome+metabolome.</a:t>
-            </a:r>
-          </a:p>
-        </p:txBody>
-      </p:sp>
-      <p:sp>
-        <p:nvSpPr>
-          <p:cNvPr id="13" name="Rectangle 12"/>
-          <p:cNvSpPr/>
-          <p:nvPr/>
-        </p:nvSpPr>
-        <p:spPr>
-          <a:xfrm>
-            <a:off x="777240" y="4937760"/>
-            <a:ext cx="36576" cy="914400"/>
-          </a:xfrm>
-          <a:prstGeom prst="rect">
-            <a:avLst/>
-          </a:prstGeom>
-          <a:solidFill>
-            <a:srgbClr val="FF2D55"/>
-          </a:solidFill>
-          <a:ln>
-            <a:noFill/>
-          </a:ln>
-          <a:effectLst/>
-        </p:spPr>
-        <p:style>
-          <a:lnRef idx="1">
-            <a:schemeClr val="accent1"/>
-          </a:lnRef>
-          <a:fillRef idx="3">
-            <a:schemeClr val="accent1"/>
-          </a:fillRef>
-          <a:effectRef idx="2">
-            <a:schemeClr val="accent1"/>
-          </a:effectRef>
-          <a:fontRef idx="minor">
-            <a:schemeClr val="lt1"/>
-          </a:fontRef>
-        </p:style>
-        <p:txBody>
-          <a:bodyPr rtlCol="0" anchor="ctr"/>
-          <a:lstStyle/>
-          <a:p>
-            <a:pPr algn="ctr"/>
-          </a:p>
-        </p:txBody>
-      </p:sp>
-      <p:sp>
-        <p:nvSpPr>
-          <p:cNvPr id="14" name="TextBox 13"/>
-          <p:cNvSpPr txBox="1"/>
-          <p:nvPr/>
-        </p:nvSpPr>
-        <p:spPr>
-          <a:xfrm>
-            <a:off x="1005840" y="4937760"/>
-            <a:ext cx="10058400" cy="1005840"/>
-          </a:xfrm>
-          <a:prstGeom prst="rect">
-            <a:avLst/>
-          </a:prstGeom>
-          <a:noFill/>
-        </p:spPr>
-        <p:txBody>
-          <a:bodyPr wrap="square" anchor="t" lIns="0" rIns="0" tIns="0" bIns="0">
-            <a:spAutoFit/>
-          </a:bodyPr>
-          <a:lstStyle/>
-          <a:p>
-            <a:pPr algn="l">
-              <a:lnSpc>
-                <a:spcPct val="130000"/>
-              </a:lnSpc>
-              <a:spcBef>
-                <a:spcPts val="0"/>
-              </a:spcBef>
-              <a:spcAft>
-                <a:spcPts val="600"/>
-              </a:spcAft>
-            </a:pPr>
-            <a:r>
-              <a:rPr sz="1400" b="0" i="0">
-                <a:solidFill>
-                  <a:srgbClr val="0A0A0A"/>
-                </a:solidFill>
-                <a:latin typeface="Space Grotesk"/>
-              </a:rPr>
-              <a:t>The review </a:t>
-            </a:r>
-            <a:r>
-              <a:rPr sz="1400" b="1" i="0">
-                <a:solidFill>
-                  <a:srgbClr val="FF2D55"/>
-                </a:solidFill>
-                <a:latin typeface="Space Grotesk"/>
-              </a:rPr>
-              <a:t>killed our flashiest first picks</a:t>
-            </a:r>
-            <a:r>
-              <a:rPr sz="1400" b="0" i="0">
-                <a:solidFill>
-                  <a:srgbClr val="0A0A0A"/>
-                </a:solidFill>
-                <a:latin typeface="Space Grotesk"/>
-              </a:rPr>
-              <a:t> honestly — Gromov–Wasserstein's mirror-placement ambiguity; distance-distillation overfitting a linear target. We feature de-risked versions.</a:t>
+              <a:t>.</a:t>
             </a:r>
           </a:p>
         </p:txBody>
